--- a/deck/canon-deck.pptx
+++ b/deck/canon-deck.pptx
@@ -6862,11 +6862,11 @@
             <a:r>
               <a:rPr sz="1800" b="1">
                 <a:solidFill>
-                  <a:srgbClr val="202124"/>
-                </a:solidFill>
-                <a:latin typeface="Google Sans Flex"/>
-              </a:rPr>
-              <a:t>Canon</a:t>
+                  <a:srgbClr val="1C1A17"/>
+                </a:solidFill>
+                <a:latin typeface="Google Sans Flex"/>
+              </a:rPr>
+              <a:t>Localhost</a:t>
             </a:r>
             <a:endParaRPr sz="1800">
               <a:latin typeface="Google Sans Flex"/>
@@ -6899,7 +6899,7 @@
             <a:r>
               <a:rPr sz="1800" b="1">
                 <a:solidFill>
-                  <a:srgbClr val="202124"/>
+                  <a:srgbClr val="1C1A17"/>
                 </a:solidFill>
                 <a:latin typeface="Google Sans Flex"/>
               </a:rPr>
@@ -6936,7 +6936,7 @@
             <a:r>
               <a:rPr sz="1800" b="1">
                 <a:solidFill>
-                  <a:srgbClr val="202124"/>
+                  <a:srgbClr val="1C1A17"/>
                 </a:solidFill>
                 <a:latin typeface="Google Sans Flex"/>
               </a:rPr>
@@ -7231,7 +7231,7 @@
             <a:r>
               <a:rPr sz="1100" b="1">
                 <a:solidFill>
-                  <a:srgbClr val="202124"/>
+                  <a:srgbClr val="1C1A17"/>
                 </a:solidFill>
                 <a:latin typeface="Google Sans Flex"/>
               </a:rPr>
@@ -7240,11 +7240,11 @@
             <a:r>
               <a:rPr sz="1100" b="0">
                 <a:solidFill>
-                  <a:srgbClr val="202124"/>
-                </a:solidFill>
-                <a:latin typeface="Google Sans Flex"/>
-              </a:rPr>
-              <a:t>Cloud Run scales to zero (min instances 0). There is no per-hour resource.</a:t>
+                  <a:srgbClr val="1C1A17"/>
+                </a:solidFill>
+                <a:latin typeface="Google Sans Flex"/>
+              </a:rPr>
+              <a:t>Cloud Run scales to zero (min instances 0). No per-hour resource.</a:t>
             </a:r>
           </a:p>
           <a:p>
@@ -7256,7 +7256,7 @@
             <a:r>
               <a:rPr sz="1100" b="1">
                 <a:solidFill>
-                  <a:srgbClr val="202124"/>
+                  <a:srgbClr val="1C1A17"/>
                 </a:solidFill>
                 <a:latin typeface="Google Sans Flex"/>
               </a:rPr>
@@ -7265,11 +7265,11 @@
             <a:r>
               <a:rPr sz="1100" b="0">
                 <a:solidFill>
-                  <a:srgbClr val="202124"/>
-                </a:solidFill>
-                <a:latin typeface="Google Sans Flex"/>
-              </a:rPr>
-              <a:t>the demo data fits inside the free tier so far.</a:t>
+                  <a:srgbClr val="1C1A17"/>
+                </a:solidFill>
+                <a:latin typeface="Google Sans Flex"/>
+              </a:rPr>
+              <a:t>the demo data fits inside the free tier.</a:t>
             </a:r>
           </a:p>
           <a:p>
@@ -7281,7 +7281,7 @@
             <a:r>
               <a:rPr sz="1100" b="1">
                 <a:solidFill>
-                  <a:srgbClr val="202124"/>
+                  <a:srgbClr val="1C1A17"/>
                 </a:solidFill>
                 <a:latin typeface="Google Sans Flex"/>
               </a:rPr>
@@ -7290,11 +7290,11 @@
             <a:r>
               <a:rPr sz="1100" b="0">
                 <a:solidFill>
-                  <a:srgbClr val="202124"/>
-                </a:solidFill>
-                <a:latin typeface="Google Sans Flex"/>
-              </a:rPr>
-              <a:t>An answer is one embedding and one Flash-Lite call. A check is one embedding and one call, or none when no decision is relevant. An ingest is one extraction call plus a few reconcile calls.</a:t>
+                  <a:srgbClr val="1C1A17"/>
+                </a:solidFill>
+                <a:latin typeface="Google Sans Flex"/>
+              </a:rPr>
+              <a:t>An answer is one embedding and one Flash-Lite call. A check is one call, or none when no decision is relevant. An ingest is one extraction plus a few reconcile calls.</a:t>
             </a:r>
           </a:p>
           <a:p>
@@ -7306,7 +7306,7 @@
             <a:r>
               <a:rPr sz="1100" b="1">
                 <a:solidFill>
-                  <a:srgbClr val="202124"/>
+                  <a:srgbClr val="1C1A17"/>
                 </a:solidFill>
                 <a:latin typeface="Google Sans Flex"/>
               </a:rPr>
@@ -7315,7 +7315,7 @@
             <a:r>
               <a:rPr sz="1100" b="0">
                 <a:solidFill>
-                  <a:srgbClr val="202124"/>
+                  <a:srgbClr val="1C1A17"/>
                 </a:solidFill>
                 <a:latin typeface="Google Sans Flex"/>
               </a:rPr>
@@ -7331,7 +7331,7 @@
             <a:r>
               <a:rPr sz="1100" b="1">
                 <a:solidFill>
-                  <a:srgbClr val="202124"/>
+                  <a:srgbClr val="1C1A17"/>
                 </a:solidFill>
                 <a:latin typeface="Google Sans Flex"/>
               </a:rPr>
@@ -7340,11 +7340,11 @@
             <a:r>
               <a:rPr sz="1100" b="0">
                 <a:solidFill>
-                  <a:srgbClr val="202124"/>
-                </a:solidFill>
-                <a:latin typeface="Google Sans Flex"/>
-              </a:rPr>
-              <a:t>every Gemini call and the Cloud Run service carry the label app=canon, so the billing export splits Canon's spend.</a:t>
+                  <a:srgbClr val="1C1A17"/>
+                </a:solidFill>
+                <a:latin typeface="Google Sans Flex"/>
+              </a:rPr>
+              <a:t>Gemini calls, Cloud Run, Artifact Registry and Hosting carry the label app=canon, so the billing export splits Canon's spend.</a:t>
             </a:r>
           </a:p>
         </p:txBody>
@@ -7373,86 +7373,125 @@
           <a:p>
             <a:pPr>
               <a:spcAft>
-                <a:spcPts val="700"/>
+                <a:spcPts val="500"/>
               </a:spcAft>
             </a:pPr>
             <a:r>
               <a:rPr sz="1100" b="1">
                 <a:solidFill>
-                  <a:srgbClr val="202124"/>
-                </a:solidFill>
-                <a:latin typeface="Google Sans Flex"/>
-              </a:rPr>
-              <a:t>What we measured (2026-10-17):</a:t>
+                  <a:srgbClr val="1C1A17"/>
+                </a:solidFill>
+                <a:latin typeface="Google Sans Flex"/>
+              </a:rPr>
+              <a:t>What we measured:</a:t>
             </a:r>
           </a:p>
           <a:p>
             <a:pPr>
               <a:spcAft>
-                <a:spcPts val="700"/>
+                <a:spcPts val="500"/>
               </a:spcAft>
             </a:pPr>
             <a:r>
               <a:rPr sz="1100" b="0">
                 <a:solidFill>
-                  <a:srgbClr val="202124"/>
-                </a:solidFill>
-                <a:latin typeface="Google Sans Flex"/>
-              </a:rPr>
-              <a:t>- The billing export has no app=canon rows yet. It lags by up to a day.</a:t>
+                  <a:srgbClr val="1C1A17"/>
+                </a:solidFill>
+                <a:latin typeface="Google Sans Flex"/>
+              </a:rPr>
+              <a:t>- Reading the whole 380-source archive (a full seed) costs about INR 80 to 100 in Gemini calls.</a:t>
             </a:r>
           </a:p>
           <a:p>
             <a:pPr>
               <a:spcAft>
-                <a:spcPts val="700"/>
+                <a:spcPts val="500"/>
               </a:spcAft>
             </a:pPr>
             <a:r>
               <a:rPr sz="1100" b="0">
                 <a:solidFill>
-                  <a:srgbClr val="202124"/>
-                </a:solidFill>
-                <a:latin typeface="Google Sans Flex"/>
-              </a:rPr>
-              <a:t>- All embedding usage on the shared billing project since 2026-10-12: INR 0.16.</a:t>
+                  <a:srgbClr val="1C1A17"/>
+                </a:solidFill>
+                <a:latin typeface="Google Sans Flex"/>
+              </a:rPr>
+              <a:t>- Live checks and answers: one call each, about 1 to 2 seconds.</a:t>
             </a:r>
           </a:p>
           <a:p>
             <a:pPr>
               <a:spcAft>
-                <a:spcPts val="700"/>
+                <a:spcPts val="500"/>
               </a:spcAft>
             </a:pPr>
             <a:r>
               <a:rPr sz="1100" b="1">
                 <a:solidFill>
-                  <a:srgbClr val="202124"/>
-                </a:solidFill>
-                <a:latin typeface="Google Sans Flex"/>
-              </a:rPr>
-              <a:t>List price (unverified): </a:t>
-            </a:r>
+                  <a:srgbClr val="1C1A17"/>
+                </a:solidFill>
+                <a:latin typeface="Google Sans Flex"/>
+              </a:rPr>
+              <a:t>Hard caps:</a:t>
+            </a:r>
+          </a:p>
+          <a:p>
+            <a:pPr>
+              <a:spcAft>
+                <a:spcPts val="500"/>
+              </a:spcAft>
+            </a:pPr>
             <a:r>
               <a:rPr sz="1100" b="0">
                 <a:solidFill>
-                  <a:srgbClr val="202124"/>
-                </a:solidFill>
-                <a:latin typeface="Google Sans Flex"/>
-              </a:rPr>
-              <a:t>third-party listings quote USD 0.30 per 1M input tokens and USD 2.50 per 1M output tokens for Gemini 3.5 Flash-Lite. Check the Vertex AI pricing page before you rely on it.</a:t>
+                  <a:srgbClr val="1C1A17"/>
+                </a:solidFill>
+                <a:latin typeface="Google Sans Flex"/>
+              </a:rPr>
+              <a:t>- Daily Gemini cap per instance (1500 generate calls by default).</a:t>
             </a:r>
           </a:p>
           <a:p>
             <a:pPr>
               <a:spcAft>
-                <a:spcPts val="700"/>
+                <a:spcPts val="500"/>
               </a:spcAft>
             </a:pPr>
             <a:r>
+              <a:rPr sz="1100" b="0">
+                <a:solidFill>
+                  <a:srgbClr val="1C1A17"/>
+                </a:solidFill>
+                <a:latin typeface="Google Sans Flex"/>
+              </a:rPr>
+              <a:t>- Discord: 200 messages a day, 20 per user; slash commands stop at the cap.</a:t>
+            </a:r>
+          </a:p>
+          <a:p>
+            <a:pPr>
+              <a:spcAft>
+                <a:spcPts val="500"/>
+              </a:spcAft>
+            </a:pPr>
+            <a:r>
+              <a:rPr sz="1100" b="0">
+                <a:solidFill>
+                  <a:srgbClr val="1C1A17"/>
+                </a:solidFill>
+                <a:latin typeface="Google Sans Flex"/>
+              </a:rPr>
+              <a:t>- 120 POST requests per minute per IP.</a:t>
+            </a:r>
+          </a:p>
+          <a:p>
+            <a:pPr>
+              <a:spcAft>
+                <a:spcPts val="500"/>
+              </a:spcAft>
+            </a:pPr>
+            <a:r>
               <a:rPr sz="1100" b="1">
                 <a:solidFill>
-                  <a:srgbClr val="202124"/>
+                  <a:srgbClr val="1C1A17"/>
                 </a:solidFill>
                 <a:latin typeface="Google Sans Flex"/>
               </a:rPr>
@@ -7461,11 +7500,11 @@
             <a:r>
               <a:rPr sz="1100" b="0">
                 <a:solidFill>
-                  <a:srgbClr val="202124"/>
-                </a:solidFill>
-                <a:latin typeface="Google Sans Flex"/>
-              </a:rPr>
-              <a:t>tokens per call, so we do not quote a per-call price.</a:t>
+                  <a:srgbClr val="1C1A17"/>
+                </a:solidFill>
+                <a:latin typeface="Google Sans Flex"/>
+              </a:rPr>
+              <a:t>tokens per call at scale, so we do not quote a per-user price.</a:t>
             </a:r>
           </a:p>
         </p:txBody>
@@ -7647,7 +7686,7 @@
       </p:sp>
       <p:pic>
         <p:nvPicPr>
-          <p:cNvPr id="136" name="Picture 135" descr="home-block.jpg"/>
+          <p:cNvPr id="136" name="Picture 135" descr="home-1080.jpg"/>
           <p:cNvPicPr>
             <a:picLocks noChangeAspect="1"/>
           </p:cNvPicPr>
@@ -7661,15 +7700,15 @@
         </p:blipFill>
         <p:spPr>
           <a:xfrm>
-            <a:off x="1142086" y="1188720"/>
-            <a:ext cx="2516428" cy="1572768"/>
+            <a:off x="320040" y="1189948"/>
+            <a:ext cx="2724912" cy="1533736"/>
           </a:xfrm>
           <a:prstGeom prst="rect">
             <a:avLst/>
           </a:prstGeom>
           <a:ln w="9525">
             <a:solidFill>
-              <a:srgbClr val="DADCE0"/>
+              <a:srgbClr val="D8CFBE"/>
             </a:solidFill>
           </a:ln>
         </p:spPr>
@@ -7682,8 +7721,8 @@
         </p:nvSpPr>
         <p:spPr>
           <a:xfrm>
-            <a:off x="320040" y="2761488"/>
-            <a:ext cx="4160520" cy="274320"/>
+            <a:off x="320040" y="2724912"/>
+            <a:ext cx="2724912" cy="274320"/>
           </a:xfrm>
           <a:prstGeom prst="rect">
             <a:avLst/>
@@ -7704,18 +7743,18 @@
             <a:r>
               <a:rPr sz="900" b="0">
                 <a:solidFill>
-                  <a:srgbClr val="5F6368"/>
-                </a:solidFill>
-                <a:latin typeface="Google Sans Flex"/>
-              </a:rPr>
-              <a:t>Agent blocked on a Friday deploy</a:t>
+                  <a:srgbClr val="5F5A52"/>
+                </a:solidFill>
+                <a:latin typeface="Google Sans Flex"/>
+              </a:rPr>
+              <a:t>Home: four stories and live counts</a:t>
             </a:r>
           </a:p>
         </p:txBody>
       </p:sp>
       <p:pic>
         <p:nvPicPr>
-          <p:cNvPr id="138" name="Picture 137" descr="ingest-result.jpg"/>
+          <p:cNvPr id="138" name="Picture 137" descr="new-hire-1080.jpg"/>
           <p:cNvPicPr>
             <a:picLocks noChangeAspect="1"/>
           </p:cNvPicPr>
@@ -7729,15 +7768,15 @@
         </p:blipFill>
         <p:spPr>
           <a:xfrm>
-            <a:off x="5485486" y="1188720"/>
-            <a:ext cx="2516428" cy="1572768"/>
+            <a:off x="3209544" y="1189948"/>
+            <a:ext cx="2724912" cy="1533736"/>
           </a:xfrm>
           <a:prstGeom prst="rect">
             <a:avLst/>
           </a:prstGeom>
           <a:ln w="9525">
             <a:solidFill>
-              <a:srgbClr val="DADCE0"/>
+              <a:srgbClr val="D8CFBE"/>
             </a:solidFill>
           </a:ln>
         </p:spPr>
@@ -7750,8 +7789,8 @@
         </p:nvSpPr>
         <p:spPr>
           <a:xfrm>
-            <a:off x="4663440" y="2761488"/>
-            <a:ext cx="4160520" cy="274320"/>
+            <a:off x="3209544" y="2724912"/>
+            <a:ext cx="2724912" cy="274320"/>
           </a:xfrm>
           <a:prstGeom prst="rect">
             <a:avLst/>
@@ -7772,18 +7811,18 @@
             <a:r>
               <a:rPr sz="900" b="0">
                 <a:solidFill>
-                  <a:srgbClr val="5F6368"/>
-                </a:solidFill>
-                <a:latin typeface="Google Sans Flex"/>
-              </a:rPr>
-              <a:t>Paste raises a contradiction</a:t>
+                  <a:srgbClr val="5F5A52"/>
+                </a:solidFill>
+                <a:latin typeface="Google Sans Flex"/>
+              </a:rPr>
+              <a:t>I am new here: out-of-date page, who to ask</a:t>
             </a:r>
           </a:p>
         </p:txBody>
       </p:sp>
       <p:pic>
         <p:nvPicPr>
-          <p:cNvPr id="140" name="Picture 139" descr="ask.jpg"/>
+          <p:cNvPr id="140" name="Picture 139" descr="catch-up-sales-1080.jpg"/>
           <p:cNvPicPr>
             <a:picLocks noChangeAspect="1"/>
           </p:cNvPicPr>
@@ -7797,15 +7836,15 @@
         </p:blipFill>
         <p:spPr>
           <a:xfrm>
-            <a:off x="1142086" y="3035808"/>
-            <a:ext cx="2516428" cy="1572768"/>
+            <a:off x="6099048" y="1189948"/>
+            <a:ext cx="2724912" cy="1533736"/>
           </a:xfrm>
           <a:prstGeom prst="rect">
             <a:avLst/>
           </a:prstGeom>
           <a:ln w="9525">
             <a:solidFill>
-              <a:srgbClr val="DADCE0"/>
+              <a:srgbClr val="D8CFBE"/>
             </a:solidFill>
           </a:ln>
         </p:spPr>
@@ -7818,8 +7857,8 @@
         </p:nvSpPr>
         <p:spPr>
           <a:xfrm>
-            <a:off x="320040" y="4608576"/>
-            <a:ext cx="4160520" cy="274320"/>
+            <a:off x="6099048" y="2724912"/>
+            <a:ext cx="2724912" cy="274320"/>
           </a:xfrm>
           <a:prstGeom prst="rect">
             <a:avLst/>
@@ -7840,18 +7879,18 @@
             <a:r>
               <a:rPr sz="900" b="0">
                 <a:solidFill>
-                  <a:srgbClr val="5F6368"/>
-                </a:solidFill>
-                <a:latin typeface="Google Sans Flex"/>
-              </a:rPr>
-              <a:t>Ask why: cited answer and timeline</a:t>
+                  <a:srgbClr val="5F5A52"/>
+                </a:solidFill>
+                <a:latin typeface="Google Sans Flex"/>
+              </a:rPr>
+              <a:t>Catch me up: sales, ranked to-do list</a:t>
             </a:r>
           </a:p>
         </p:txBody>
       </p:sp>
       <p:pic>
         <p:nvPicPr>
-          <p:cNvPr id="142" name="Picture 141" descr="agents.jpg"/>
+          <p:cNvPr id="142" name="Picture 141" descr="agent-1080.jpg"/>
           <p:cNvPicPr>
             <a:picLocks noChangeAspect="1"/>
           </p:cNvPicPr>
@@ -7865,15 +7904,15 @@
         </p:blipFill>
         <p:spPr>
           <a:xfrm>
-            <a:off x="5485486" y="3035808"/>
-            <a:ext cx="2516428" cy="1572768"/>
+            <a:off x="320040" y="3055324"/>
+            <a:ext cx="2724912" cy="1533736"/>
           </a:xfrm>
           <a:prstGeom prst="rect">
             <a:avLst/>
           </a:prstGeom>
           <a:ln w="9525">
             <a:solidFill>
-              <a:srgbClr val="DADCE0"/>
+              <a:srgbClr val="D8CFBE"/>
             </a:solidFill>
           </a:ln>
         </p:spPr>
@@ -7886,8 +7925,8 @@
         </p:nvSpPr>
         <p:spPr>
           <a:xfrm>
-            <a:off x="4663440" y="4608576"/>
-            <a:ext cx="4160520" cy="274320"/>
+            <a:off x="320040" y="4590288"/>
+            <a:ext cx="2724912" cy="274320"/>
           </a:xfrm>
           <a:prstGeom prst="rect">
             <a:avLst/>
@@ -7908,11 +7947,147 @@
             <a:r>
               <a:rPr sz="900" b="0">
                 <a:solidFill>
-                  <a:srgbClr val="5F6368"/>
-                </a:solidFill>
-                <a:latin typeface="Google Sans Flex"/>
-              </a:rPr>
-              <a:t>Agent playground over MCP</a:t>
+                  <a:srgbClr val="5F5A52"/>
+                </a:solidFill>
+                <a:latin typeface="Google Sans Flex"/>
+              </a:rPr>
+              <a:t>An AI agent gets stopped: Block</a:t>
+            </a:r>
+          </a:p>
+        </p:txBody>
+      </p:sp>
+      <p:pic>
+        <p:nvPicPr>
+          <p:cNvPr id="144" name="Picture 143" descr="ask-1080.jpg"/>
+          <p:cNvPicPr>
+            <a:picLocks noChangeAspect="1"/>
+          </p:cNvPicPr>
+          <p:nvPr/>
+        </p:nvPicPr>
+        <p:blipFill>
+          <a:blip r:embed="rId9"/>
+          <a:stretch>
+            <a:fillRect/>
+          </a:stretch>
+        </p:blipFill>
+        <p:spPr>
+          <a:xfrm>
+            <a:off x="3209544" y="3055324"/>
+            <a:ext cx="2724912" cy="1533736"/>
+          </a:xfrm>
+          <a:prstGeom prst="rect">
+            <a:avLst/>
+          </a:prstGeom>
+          <a:ln w="9525">
+            <a:solidFill>
+              <a:srgbClr val="D8CFBE"/>
+            </a:solidFill>
+          </a:ln>
+        </p:spPr>
+      </p:pic>
+      <p:sp>
+        <p:nvSpPr>
+          <p:cNvPr id="145" name="TextBox 144"/>
+          <p:cNvSpPr txBox="1"/>
+          <p:nvPr/>
+        </p:nvSpPr>
+        <p:spPr>
+          <a:xfrm>
+            <a:off x="3209544" y="4590288"/>
+            <a:ext cx="2724912" cy="274320"/>
+          </a:xfrm>
+          <a:prstGeom prst="rect">
+            <a:avLst/>
+          </a:prstGeom>
+          <a:noFill/>
+        </p:spPr>
+        <p:txBody>
+          <a:bodyPr wrap="square" anchor="t" lIns="45720" rIns="45720">
+            <a:spAutoFit/>
+          </a:bodyPr>
+          <a:lstStyle/>
+          <a:p>
+            <a:pPr algn="ctr">
+              <a:spcAft>
+                <a:spcPts val="400"/>
+              </a:spcAft>
+            </a:pPr>
+            <a:r>
+              <a:rPr sz="900" b="0">
+                <a:solidFill>
+                  <a:srgbClr val="5F5A52"/>
+                </a:solidFill>
+                <a:latin typeface="Google Sans Flex"/>
+              </a:rPr>
+              <a:t>Ask why: cited answer and timeline</a:t>
+            </a:r>
+          </a:p>
+        </p:txBody>
+      </p:sp>
+      <p:pic>
+        <p:nvPicPr>
+          <p:cNvPr id="146" name="Picture 145" descr="org-1080.jpg"/>
+          <p:cNvPicPr>
+            <a:picLocks noChangeAspect="1"/>
+          </p:cNvPicPr>
+          <p:nvPr/>
+        </p:nvPicPr>
+        <p:blipFill>
+          <a:blip r:embed="rId10"/>
+          <a:stretch>
+            <a:fillRect/>
+          </a:stretch>
+        </p:blipFill>
+        <p:spPr>
+          <a:xfrm>
+            <a:off x="6099048" y="3055324"/>
+            <a:ext cx="2724912" cy="1533736"/>
+          </a:xfrm>
+          <a:prstGeom prst="rect">
+            <a:avLst/>
+          </a:prstGeom>
+          <a:ln w="9525">
+            <a:solidFill>
+              <a:srgbClr val="D8CFBE"/>
+            </a:solidFill>
+          </a:ln>
+        </p:spPr>
+      </p:pic>
+      <p:sp>
+        <p:nvSpPr>
+          <p:cNvPr id="147" name="TextBox 146"/>
+          <p:cNvSpPr txBox="1"/>
+          <p:nvPr/>
+        </p:nvSpPr>
+        <p:spPr>
+          <a:xfrm>
+            <a:off x="6099048" y="4590288"/>
+            <a:ext cx="2724912" cy="274320"/>
+          </a:xfrm>
+          <a:prstGeom prst="rect">
+            <a:avLst/>
+          </a:prstGeom>
+          <a:noFill/>
+        </p:spPr>
+        <p:txBody>
+          <a:bodyPr wrap="square" anchor="t" lIns="45720" rIns="45720">
+            <a:spAutoFit/>
+          </a:bodyPr>
+          <a:lstStyle/>
+          <a:p>
+            <a:pPr algn="ctr">
+              <a:spcAft>
+                <a:spcPts val="400"/>
+              </a:spcAft>
+            </a:pPr>
+            <a:r>
+              <a:rPr sz="900" b="0">
+                <a:solidFill>
+                  <a:srgbClr val="5F5A52"/>
+                </a:solidFill>
+                <a:latin typeface="Google Sans Flex"/>
+              </a:rPr>
+              <a:t>People: org tree, who left, successors</a:t>
             </a:r>
           </a:p>
         </p:txBody>
@@ -8102,7 +8277,7 @@
         </p:nvGraphicFramePr>
         <p:xfrm>
           <a:off x="320040" y="1188720"/>
-          <a:ext cx="4754879" cy="2304288"/>
+          <a:ext cx="4754879" cy="2487168"/>
         </p:xfrm>
         <a:graphic>
           <a:graphicData uri="http://schemas.openxmlformats.org/drawingml/2006/table">
@@ -8116,7 +8291,7 @@
                 <a:gridCol w="950976"/>
                 <a:gridCol w="618134"/>
               </a:tblGrid>
-              <a:tr h="329184">
+              <a:tr h="310896">
                 <a:tc>
                   <a:txBody>
                     <a:bodyPr/>
@@ -8135,7 +8310,7 @@
                   </a:txBody>
                   <a:tcPr marT="27432" marB="27432" anchor="ctr">
                     <a:solidFill>
-                      <a:srgbClr val="202124"/>
+                      <a:srgbClr val="1C1A17"/>
                     </a:solidFill>
                   </a:tcPr>
                 </a:tc>
@@ -8157,7 +8332,7 @@
                   </a:txBody>
                   <a:tcPr marT="27432" marB="27432" anchor="ctr">
                     <a:solidFill>
-                      <a:srgbClr val="202124"/>
+                      <a:srgbClr val="1C1A17"/>
                     </a:solidFill>
                   </a:tcPr>
                 </a:tc>
@@ -8179,7 +8354,7 @@
                   </a:txBody>
                   <a:tcPr marT="27432" marB="27432" anchor="ctr">
                     <a:solidFill>
-                      <a:srgbClr val="202124"/>
+                      <a:srgbClr val="1C1A17"/>
                     </a:solidFill>
                   </a:tcPr>
                 </a:tc>
@@ -8201,12 +8376,12 @@
                   </a:txBody>
                   <a:tcPr marT="27432" marB="27432" anchor="ctr">
                     <a:solidFill>
-                      <a:srgbClr val="202124"/>
+                      <a:srgbClr val="1C1A17"/>
                     </a:solidFill>
                   </a:tcPr>
                 </a:tc>
               </a:tr>
-              <a:tr h="329184">
+              <a:tr h="310896">
                 <a:tc>
                   <a:txBody>
                     <a:bodyPr/>
@@ -8215,7 +8390,7 @@
                       <a:r>
                         <a:rPr sz="1000" b="0">
                           <a:solidFill>
-                            <a:srgbClr val="202124"/>
+                            <a:srgbClr val="1C1A17"/>
                           </a:solidFill>
                           <a:latin typeface="Google Sans Flex"/>
                         </a:rPr>
@@ -8225,7 +8400,7 @@
                   </a:txBody>
                   <a:tcPr marT="27432" marB="27432" anchor="ctr">
                     <a:solidFill>
-                      <a:srgbClr val="F1F3F4"/>
+                      <a:srgbClr val="F6F1E7"/>
                     </a:solidFill>
                   </a:tcPr>
                 </a:tc>
@@ -8237,17 +8412,17 @@
                       <a:r>
                         <a:rPr sz="1000" b="0">
                           <a:solidFill>
-                            <a:srgbClr val="202124"/>
+                            <a:srgbClr val="1C1A17"/>
                           </a:solidFill>
                           <a:latin typeface="Google Sans Flex"/>
                         </a:rPr>
-                        <a:t>38</a:t>
+                        <a:t>82</a:t>
                       </a:r>
                     </a:p>
                   </a:txBody>
                   <a:tcPr marT="27432" marB="27432" anchor="ctr">
                     <a:solidFill>
-                      <a:srgbClr val="F1F3F4"/>
+                      <a:srgbClr val="F6F1E7"/>
                     </a:solidFill>
                   </a:tcPr>
                 </a:tc>
@@ -8259,17 +8434,17 @@
                       <a:r>
                         <a:rPr sz="1000" b="0">
                           <a:solidFill>
-                            <a:srgbClr val="202124"/>
+                            <a:srgbClr val="1C1A17"/>
                           </a:solidFill>
                           <a:latin typeface="Google Sans Flex"/>
                         </a:rPr>
-                        <a:t>37</a:t>
+                        <a:t>82</a:t>
                       </a:r>
                     </a:p>
                   </a:txBody>
                   <a:tcPr marT="27432" marB="27432" anchor="ctr">
                     <a:solidFill>
-                      <a:srgbClr val="F1F3F4"/>
+                      <a:srgbClr val="F6F1E7"/>
                     </a:solidFill>
                   </a:tcPr>
                 </a:tc>
@@ -8281,22 +8456,22 @@
                       <a:r>
                         <a:rPr sz="1000" b="0">
                           <a:solidFill>
-                            <a:srgbClr val="202124"/>
+                            <a:srgbClr val="1C1A17"/>
                           </a:solidFill>
                           <a:latin typeface="Google Sans Flex"/>
                         </a:rPr>
-                        <a:t>97%</a:t>
+                        <a:t>100%</a:t>
                       </a:r>
                     </a:p>
                   </a:txBody>
                   <a:tcPr marT="27432" marB="27432" anchor="ctr">
                     <a:solidFill>
-                      <a:srgbClr val="F1F3F4"/>
+                      <a:srgbClr val="F6F1E7"/>
                     </a:solidFill>
                   </a:tcPr>
                 </a:tc>
               </a:tr>
-              <a:tr h="329184">
+              <a:tr h="310896">
                 <a:tc>
                   <a:txBody>
                     <a:bodyPr/>
@@ -8305,7 +8480,7 @@
                       <a:r>
                         <a:rPr sz="1000" b="0">
                           <a:solidFill>
-                            <a:srgbClr val="202124"/>
+                            <a:srgbClr val="1C1A17"/>
                           </a:solidFill>
                           <a:latin typeface="Google Sans Flex"/>
                         </a:rPr>
@@ -8327,11 +8502,11 @@
                       <a:r>
                         <a:rPr sz="1000" b="0">
                           <a:solidFill>
-                            <a:srgbClr val="202124"/>
+                            <a:srgbClr val="1C1A17"/>
                           </a:solidFill>
                           <a:latin typeface="Google Sans Flex"/>
                         </a:rPr>
-                        <a:t>17</a:t>
+                        <a:t>39</a:t>
                       </a:r>
                     </a:p>
                   </a:txBody>
@@ -8349,11 +8524,11 @@
                       <a:r>
                         <a:rPr sz="1000" b="0">
                           <a:solidFill>
-                            <a:srgbClr val="202124"/>
+                            <a:srgbClr val="1C1A17"/>
                           </a:solidFill>
                           <a:latin typeface="Google Sans Flex"/>
                         </a:rPr>
-                        <a:t>13</a:t>
+                        <a:t>35</a:t>
                       </a:r>
                     </a:p>
                   </a:txBody>
@@ -8371,11 +8546,11 @@
                       <a:r>
                         <a:rPr sz="1000" b="0">
                           <a:solidFill>
-                            <a:srgbClr val="202124"/>
+                            <a:srgbClr val="1C1A17"/>
                           </a:solidFill>
                           <a:latin typeface="Google Sans Flex"/>
                         </a:rPr>
-                        <a:t>76%</a:t>
+                        <a:t>90%</a:t>
                       </a:r>
                     </a:p>
                   </a:txBody>
@@ -8386,7 +8561,7 @@
                   </a:tcPr>
                 </a:tc>
               </a:tr>
-              <a:tr h="329184">
+              <a:tr h="310896">
                 <a:tc>
                   <a:txBody>
                     <a:bodyPr/>
@@ -8395,7 +8570,7 @@
                       <a:r>
                         <a:rPr sz="1000" b="0">
                           <a:solidFill>
-                            <a:srgbClr val="202124"/>
+                            <a:srgbClr val="1C1A17"/>
                           </a:solidFill>
                           <a:latin typeface="Google Sans Flex"/>
                         </a:rPr>
@@ -8405,7 +8580,7 @@
                   </a:txBody>
                   <a:tcPr marT="27432" marB="27432" anchor="ctr">
                     <a:solidFill>
-                      <a:srgbClr val="F1F3F4"/>
+                      <a:srgbClr val="F6F1E7"/>
                     </a:solidFill>
                   </a:tcPr>
                 </a:tc>
@@ -8417,7 +8592,7 @@
                       <a:r>
                         <a:rPr sz="1000" b="0">
                           <a:solidFill>
-                            <a:srgbClr val="202124"/>
+                            <a:srgbClr val="1C1A17"/>
                           </a:solidFill>
                           <a:latin typeface="Google Sans Flex"/>
                         </a:rPr>
@@ -8427,7 +8602,7 @@
                   </a:txBody>
                   <a:tcPr marT="27432" marB="27432" anchor="ctr">
                     <a:solidFill>
-                      <a:srgbClr val="F1F3F4"/>
+                      <a:srgbClr val="F6F1E7"/>
                     </a:solidFill>
                   </a:tcPr>
                 </a:tc>
@@ -8439,7 +8614,7 @@
                       <a:r>
                         <a:rPr sz="1000" b="0">
                           <a:solidFill>
-                            <a:srgbClr val="202124"/>
+                            <a:srgbClr val="1C1A17"/>
                           </a:solidFill>
                           <a:latin typeface="Google Sans Flex"/>
                         </a:rPr>
@@ -8449,7 +8624,7 @@
                   </a:txBody>
                   <a:tcPr marT="27432" marB="27432" anchor="ctr">
                     <a:solidFill>
-                      <a:srgbClr val="F1F3F4"/>
+                      <a:srgbClr val="F6F1E7"/>
                     </a:solidFill>
                   </a:tcPr>
                 </a:tc>
@@ -8461,7 +8636,7 @@
                       <a:r>
                         <a:rPr sz="1000" b="0">
                           <a:solidFill>
-                            <a:srgbClr val="202124"/>
+                            <a:srgbClr val="1C1A17"/>
                           </a:solidFill>
                           <a:latin typeface="Google Sans Flex"/>
                         </a:rPr>
@@ -8471,12 +8646,12 @@
                   </a:txBody>
                   <a:tcPr marT="27432" marB="27432" anchor="ctr">
                     <a:solidFill>
-                      <a:srgbClr val="F1F3F4"/>
+                      <a:srgbClr val="F6F1E7"/>
                     </a:solidFill>
                   </a:tcPr>
                 </a:tc>
               </a:tr>
-              <a:tr h="329184">
+              <a:tr h="310896">
                 <a:tc>
                   <a:txBody>
                     <a:bodyPr/>
@@ -8485,11 +8660,11 @@
                       <a:r>
                         <a:rPr sz="1000" b="0">
                           <a:solidFill>
-                            <a:srgbClr val="202124"/>
+                            <a:srgbClr val="1C1A17"/>
                           </a:solidFill>
                           <a:latin typeface="Google Sans Flex"/>
                         </a:rPr>
-                        <a:t>check_intent verdicts</a:t>
+                        <a:t>Out-of-date documents</a:t>
                       </a:r>
                     </a:p>
                   </a:txBody>
@@ -8507,11 +8682,11 @@
                       <a:r>
                         <a:rPr sz="1000" b="0">
                           <a:solidFill>
-                            <a:srgbClr val="202124"/>
+                            <a:srgbClr val="1C1A17"/>
                           </a:solidFill>
                           <a:latin typeface="Google Sans Flex"/>
                         </a:rPr>
-                        <a:t>15</a:t>
+                        <a:t>19</a:t>
                       </a:r>
                     </a:p>
                   </a:txBody>
@@ -8529,11 +8704,11 @@
                       <a:r>
                         <a:rPr sz="1000" b="0">
                           <a:solidFill>
-                            <a:srgbClr val="202124"/>
+                            <a:srgbClr val="1C1A17"/>
                           </a:solidFill>
                           <a:latin typeface="Google Sans Flex"/>
                         </a:rPr>
-                        <a:t>13</a:t>
+                        <a:t>18</a:t>
                       </a:r>
                     </a:p>
                   </a:txBody>
@@ -8551,11 +8726,11 @@
                       <a:r>
                         <a:rPr sz="1000" b="0">
                           <a:solidFill>
-                            <a:srgbClr val="202124"/>
+                            <a:srgbClr val="1C1A17"/>
                           </a:solidFill>
                           <a:latin typeface="Google Sans Flex"/>
                         </a:rPr>
-                        <a:t>87%</a:t>
+                        <a:t>95%</a:t>
                       </a:r>
                     </a:p>
                   </a:txBody>
@@ -8566,7 +8741,7 @@
                   </a:tcPr>
                 </a:tc>
               </a:tr>
-              <a:tr h="329184">
+              <a:tr h="310896">
                 <a:tc>
                   <a:txBody>
                     <a:bodyPr/>
@@ -8575,17 +8750,17 @@
                       <a:r>
                         <a:rPr sz="1000" b="0">
                           <a:solidFill>
-                            <a:srgbClr val="202124"/>
+                            <a:srgbClr val="1C1A17"/>
                           </a:solidFill>
                           <a:latin typeface="Google Sans Flex"/>
                         </a:rPr>
-                        <a:t>Unanswerable, refused</a:t>
+                        <a:t>check_intent verdicts</a:t>
                       </a:r>
                     </a:p>
                   </a:txBody>
                   <a:tcPr marT="27432" marB="27432" anchor="ctr">
                     <a:solidFill>
-                      <a:srgbClr val="F1F3F4"/>
+                      <a:srgbClr val="F6F1E7"/>
                     </a:solidFill>
                   </a:tcPr>
                 </a:tc>
@@ -8597,17 +8772,17 @@
                       <a:r>
                         <a:rPr sz="1000" b="0">
                           <a:solidFill>
-                            <a:srgbClr val="202124"/>
+                            <a:srgbClr val="1C1A17"/>
                           </a:solidFill>
                           <a:latin typeface="Google Sans Flex"/>
                         </a:rPr>
-                        <a:t>5</a:t>
+                        <a:t>37</a:t>
                       </a:r>
                     </a:p>
                   </a:txBody>
                   <a:tcPr marT="27432" marB="27432" anchor="ctr">
                     <a:solidFill>
-                      <a:srgbClr val="F1F3F4"/>
+                      <a:srgbClr val="F6F1E7"/>
                     </a:solidFill>
                   </a:tcPr>
                 </a:tc>
@@ -8619,17 +8794,17 @@
                       <a:r>
                         <a:rPr sz="1000" b="0">
                           <a:solidFill>
-                            <a:srgbClr val="202124"/>
+                            <a:srgbClr val="1C1A17"/>
                           </a:solidFill>
                           <a:latin typeface="Google Sans Flex"/>
                         </a:rPr>
-                        <a:t>5</a:t>
+                        <a:t>32</a:t>
                       </a:r>
                     </a:p>
                   </a:txBody>
                   <a:tcPr marT="27432" marB="27432" anchor="ctr">
                     <a:solidFill>
-                      <a:srgbClr val="F1F3F4"/>
+                      <a:srgbClr val="F6F1E7"/>
                     </a:solidFill>
                   </a:tcPr>
                 </a:tc>
@@ -8641,22 +8816,22 @@
                       <a:r>
                         <a:rPr sz="1000" b="0">
                           <a:solidFill>
-                            <a:srgbClr val="202124"/>
+                            <a:srgbClr val="1C1A17"/>
                           </a:solidFill>
                           <a:latin typeface="Google Sans Flex"/>
                         </a:rPr>
-                        <a:t>100%</a:t>
+                        <a:t>86%</a:t>
                       </a:r>
                     </a:p>
                   </a:txBody>
                   <a:tcPr marT="27432" marB="27432" anchor="ctr">
                     <a:solidFill>
-                      <a:srgbClr val="F1F3F4"/>
+                      <a:srgbClr val="F6F1E7"/>
                     </a:solidFill>
                   </a:tcPr>
                 </a:tc>
               </a:tr>
-              <a:tr h="329184">
+              <a:tr h="310896">
                 <a:tc>
                   <a:txBody>
                     <a:bodyPr/>
@@ -8665,11 +8840,11 @@
                       <a:r>
                         <a:rPr sz="1000" b="0">
                           <a:solidFill>
-                            <a:srgbClr val="202124"/>
+                            <a:srgbClr val="1C1A17"/>
                           </a:solidFill>
                           <a:latin typeface="Google Sans Flex"/>
                         </a:rPr>
-                        <a:t>Latency p50 / p95</a:t>
+                        <a:t>Unanswerable, refused</a:t>
                       </a:r>
                     </a:p>
                   </a:txBody>
@@ -8687,11 +8862,11 @@
                       <a:r>
                         <a:rPr sz="1000" b="0">
                           <a:solidFill>
-                            <a:srgbClr val="202124"/>
+                            <a:srgbClr val="1C1A17"/>
                           </a:solidFill>
                           <a:latin typeface="Google Sans Flex"/>
                         </a:rPr>
-                        <a:t/>
+                        <a:t>5</a:t>
                       </a:r>
                     </a:p>
                   </a:txBody>
@@ -8709,11 +8884,11 @@
                       <a:r>
                         <a:rPr sz="1000" b="0">
                           <a:solidFill>
-                            <a:srgbClr val="202124"/>
+                            <a:srgbClr val="1C1A17"/>
                           </a:solidFill>
                           <a:latin typeface="Google Sans Flex"/>
                         </a:rPr>
-                        <a:t>1079 / 1325 ms</a:t>
+                        <a:t>5</a:t>
                       </a:r>
                     </a:p>
                   </a:txBody>
@@ -8731,7 +8906,53 @@
                       <a:r>
                         <a:rPr sz="1000" b="0">
                           <a:solidFill>
-                            <a:srgbClr val="202124"/>
+                            <a:srgbClr val="1C1A17"/>
+                          </a:solidFill>
+                          <a:latin typeface="Google Sans Flex"/>
+                        </a:rPr>
+                        <a:t>100%</a:t>
+                      </a:r>
+                    </a:p>
+                  </a:txBody>
+                  <a:tcPr marT="27432" marB="27432" anchor="ctr">
+                    <a:solidFill>
+                      <a:srgbClr val="FFFFFF"/>
+                    </a:solidFill>
+                  </a:tcPr>
+                </a:tc>
+              </a:tr>
+              <a:tr h="310896">
+                <a:tc>
+                  <a:txBody>
+                    <a:bodyPr/>
+                    <a:lstStyle/>
+                    <a:p>
+                      <a:r>
+                        <a:rPr sz="1000" b="0">
+                          <a:solidFill>
+                            <a:srgbClr val="1C1A17"/>
+                          </a:solidFill>
+                          <a:latin typeface="Google Sans Flex"/>
+                        </a:rPr>
+                        <a:t>Latency p50 / p95 (ask, check)</a:t>
+                      </a:r>
+                    </a:p>
+                  </a:txBody>
+                  <a:tcPr marT="27432" marB="27432" anchor="ctr">
+                    <a:solidFill>
+                      <a:srgbClr val="F6F1E7"/>
+                    </a:solidFill>
+                  </a:tcPr>
+                </a:tc>
+                <a:tc>
+                  <a:txBody>
+                    <a:bodyPr/>
+                    <a:lstStyle/>
+                    <a:p>
+                      <a:r>
+                        <a:rPr sz="1000" b="0">
+                          <a:solidFill>
+                            <a:srgbClr val="1C1A17"/>
                           </a:solidFill>
                           <a:latin typeface="Google Sans Flex"/>
                         </a:rPr>
@@ -8741,7 +8962,51 @@
                   </a:txBody>
                   <a:tcPr marT="27432" marB="27432" anchor="ctr">
                     <a:solidFill>
-                      <a:srgbClr val="FFFFFF"/>
+                      <a:srgbClr val="F6F1E7"/>
+                    </a:solidFill>
+                  </a:tcPr>
+                </a:tc>
+                <a:tc>
+                  <a:txBody>
+                    <a:bodyPr/>
+                    <a:lstStyle/>
+                    <a:p>
+                      <a:r>
+                        <a:rPr sz="1000" b="0">
+                          <a:solidFill>
+                            <a:srgbClr val="1C1A17"/>
+                          </a:solidFill>
+                          <a:latin typeface="Google Sans Flex"/>
+                        </a:rPr>
+                        <a:t>1221 / 1795 ms</a:t>
+                      </a:r>
+                    </a:p>
+                  </a:txBody>
+                  <a:tcPr marT="27432" marB="27432" anchor="ctr">
+                    <a:solidFill>
+                      <a:srgbClr val="F6F1E7"/>
+                    </a:solidFill>
+                  </a:tcPr>
+                </a:tc>
+                <a:tc>
+                  <a:txBody>
+                    <a:bodyPr/>
+                    <a:lstStyle/>
+                    <a:p>
+                      <a:r>
+                        <a:rPr sz="1000" b="0">
+                          <a:solidFill>
+                            <a:srgbClr val="1C1A17"/>
+                          </a:solidFill>
+                          <a:latin typeface="Google Sans Flex"/>
+                        </a:rPr>
+                        <a:t/>
+                      </a:r>
+                    </a:p>
+                  </a:txBody>
+                  <a:tcPr marT="27432" marB="27432" anchor="ctr">
+                    <a:solidFill>
+                      <a:srgbClr val="F6F1E7"/>
                     </a:solidFill>
                   </a:tcPr>
                 </a:tc>
@@ -8758,8 +9023,8 @@
         </p:nvSpPr>
         <p:spPr>
           <a:xfrm>
-            <a:off x="320040" y="3657600"/>
-            <a:ext cx="4754880" cy="1188720"/>
+            <a:off x="320040" y="3794760"/>
+            <a:ext cx="4754880" cy="1097280"/>
           </a:xfrm>
           <a:prstGeom prst="rect">
             <a:avLst/>
@@ -8780,11 +9045,11 @@
             <a:r>
               <a:rPr sz="900" b="0">
                 <a:solidFill>
-                  <a:srgbClr val="5F6368"/>
-                </a:solidFill>
-                <a:latin typeface="Google Sans Flex"/>
-              </a:rPr>
-              <a:t>Run 2026-10-17 12:47 UTC, model gemini-3.5-flash-lite. Corpus: 259 synthetic sources, about 100 of them pure noise.</a:t>
+                  <a:srgbClr val="5F5A52"/>
+                </a:solidFill>
+                <a:latin typeface="Google Sans Flex"/>
+              </a:rPr>
+              <a:t>Run 2026-10-17 19:10 UTC, model gemini-3.5-flash-lite, dataset acme4: 380 synthetic sources (about 100 pure noise), 14 roles. check_intent re-measured 2026-10-18.</a:t>
             </a:r>
           </a:p>
           <a:p>
@@ -8796,11 +9061,11 @@
             <a:r>
               <a:rPr sz="900" b="0">
                 <a:solidFill>
-                  <a:srgbClr val="5F6368"/>
-                </a:solidFill>
-                <a:latin typeface="Google Sans Flex"/>
-              </a:rPr>
-              <a:t>Reproduce: backend/scripts/seed.py, then backend/scripts/eval.py. The app serves the report at /api/eval.</a:t>
+                  <a:srgbClr val="5F5A52"/>
+                </a:solidFill>
+                <a:latin typeface="Google Sans Flex"/>
+              </a:rPr>
+              <a:t>Reproduce: backend/scripts/seed.py, then eval.py. The app serves the report at /api/eval.</a:t>
             </a:r>
           </a:p>
         </p:txBody>
@@ -8814,7 +9079,7 @@
         <p:spPr>
           <a:xfrm>
             <a:off x="5303520" y="1188720"/>
-            <a:ext cx="3520440" cy="3703320"/>
+            <a:ext cx="3520440" cy="274320"/>
           </a:xfrm>
           <a:prstGeom prst="rect">
             <a:avLst/>
@@ -8829,161 +9094,438 @@
           <a:p>
             <a:pPr>
               <a:spcAft>
-                <a:spcPts val="300"/>
+                <a:spcPts val="400"/>
               </a:spcAft>
             </a:pPr>
             <a:r>
+              <a:rPr sz="1100" b="1">
+                <a:solidFill>
+                  <a:srgbClr val="1C1A17"/>
+                </a:solidFill>
+                <a:latin typeface="Google Sans Flex"/>
+              </a:rPr>
+              <a:t>Memory health: replay in time order</a:t>
+            </a:r>
+          </a:p>
+        </p:txBody>
+      </p:sp>
+      <p:graphicFrame>
+        <p:nvGraphicFramePr>
+          <p:cNvPr id="147" name="Table 146"/>
+          <p:cNvGraphicFramePr>
+            <a:graphicFrameLocks noGrp="1"/>
+          </p:cNvGraphicFramePr>
+          <p:nvPr/>
+        </p:nvGraphicFramePr>
+        <p:xfrm>
+          <a:off x="5303520" y="1508760"/>
+          <a:ext cx="3520440" cy="1645920"/>
+        </p:xfrm>
+        <a:graphic>
+          <a:graphicData uri="http://schemas.openxmlformats.org/drawingml/2006/table">
+            <a:tbl>
+              <a:tblPr firstRow="1" bandRow="1">
+                <a:tableStyleId>{5C22544A-7EE6-4342-B048-85BDC9FD1C3A}</a:tableStyleId>
+              </a:tblPr>
+              <a:tblGrid>
+                <a:gridCol w="2464308"/>
+                <a:gridCol w="1056132"/>
+              </a:tblGrid>
+              <a:tr h="274320">
+                <a:tc>
+                  <a:txBody>
+                    <a:bodyPr/>
+                    <a:lstStyle/>
+                    <a:p>
+                      <a:r>
+                        <a:rPr sz="950" b="1">
+                          <a:solidFill>
+                            <a:srgbClr val="FFFFFF"/>
+                          </a:solidFill>
+                          <a:latin typeface="Google Sans Flex"/>
+                        </a:rPr>
+                        <a:t>Check</a:t>
+                      </a:r>
+                    </a:p>
+                  </a:txBody>
+                  <a:tcPr marT="27432" marB="27432" anchor="ctr">
+                    <a:solidFill>
+                      <a:srgbClr val="1C1A17"/>
+                    </a:solidFill>
+                  </a:tcPr>
+                </a:tc>
+                <a:tc>
+                  <a:txBody>
+                    <a:bodyPr/>
+                    <a:lstStyle/>
+                    <a:p>
+                      <a:r>
+                        <a:rPr sz="950" b="1">
+                          <a:solidFill>
+                            <a:srgbClr val="FFFFFF"/>
+                          </a:solidFill>
+                          <a:latin typeface="Google Sans Flex"/>
+                        </a:rPr>
+                        <a:t>Result</a:t>
+                      </a:r>
+                    </a:p>
+                  </a:txBody>
+                  <a:tcPr marT="27432" marB="27432" anchor="ctr">
+                    <a:solidFill>
+                      <a:srgbClr val="1C1A17"/>
+                    </a:solidFill>
+                  </a:tcPr>
+                </a:tc>
+              </a:tr>
+              <a:tr h="274320">
+                <a:tc>
+                  <a:txBody>
+                    <a:bodyPr/>
+                    <a:lstStyle/>
+                    <a:p>
+                      <a:r>
+                        <a:rPr sz="950" b="0">
+                          <a:solidFill>
+                            <a:srgbClr val="1C1A17"/>
+                          </a:solidFill>
+                          <a:latin typeface="Google Sans Flex"/>
+                        </a:rPr>
+                        <a:t>Decisions with no traceable source</a:t>
+                      </a:r>
+                    </a:p>
+                  </a:txBody>
+                  <a:tcPr marT="27432" marB="27432" anchor="ctr">
+                    <a:solidFill>
+                      <a:srgbClr val="F6F1E7"/>
+                    </a:solidFill>
+                  </a:tcPr>
+                </a:tc>
+                <a:tc>
+                  <a:txBody>
+                    <a:bodyPr/>
+                    <a:lstStyle/>
+                    <a:p>
+                      <a:r>
+                        <a:rPr sz="950" b="0">
+                          <a:solidFill>
+                            <a:srgbClr val="1C1A17"/>
+                          </a:solidFill>
+                          <a:latin typeface="Google Sans Flex"/>
+                        </a:rPr>
+                        <a:t>0 of 10</a:t>
+                      </a:r>
+                    </a:p>
+                  </a:txBody>
+                  <a:tcPr marT="27432" marB="27432" anchor="ctr">
+                    <a:solidFill>
+                      <a:srgbClr val="F6F1E7"/>
+                    </a:solidFill>
+                  </a:tcPr>
+                </a:tc>
+              </a:tr>
+              <a:tr h="274320">
+                <a:tc>
+                  <a:txBody>
+                    <a:bodyPr/>
+                    <a:lstStyle/>
+                    <a:p>
+                      <a:r>
+                        <a:rPr sz="950" b="0">
+                          <a:solidFill>
+                            <a:srgbClr val="1C1A17"/>
+                          </a:solidFill>
+                          <a:latin typeface="Google Sans Flex"/>
+                        </a:rPr>
+                        <a:t>Duplicate decisions</a:t>
+                      </a:r>
+                    </a:p>
+                  </a:txBody>
+                  <a:tcPr marT="27432" marB="27432" anchor="ctr">
+                    <a:solidFill>
+                      <a:srgbClr val="FFFFFF"/>
+                    </a:solidFill>
+                  </a:tcPr>
+                </a:tc>
+                <a:tc>
+                  <a:txBody>
+                    <a:bodyPr/>
+                    <a:lstStyle/>
+                    <a:p>
+                      <a:r>
+                        <a:rPr sz="950" b="0">
+                          <a:solidFill>
+                            <a:srgbClr val="1C1A17"/>
+                          </a:solidFill>
+                          <a:latin typeface="Google Sans Flex"/>
+                        </a:rPr>
+                        <a:t>0</a:t>
+                      </a:r>
+                    </a:p>
+                  </a:txBody>
+                  <a:tcPr marT="27432" marB="27432" anchor="ctr">
+                    <a:solidFill>
+                      <a:srgbClr val="FFFFFF"/>
+                    </a:solidFill>
+                  </a:tcPr>
+                </a:tc>
+              </a:tr>
+              <a:tr h="274320">
+                <a:tc>
+                  <a:txBody>
+                    <a:bodyPr/>
+                    <a:lstStyle/>
+                    <a:p>
+                      <a:r>
+                        <a:rPr sz="950" b="0">
+                          <a:solidFill>
+                            <a:srgbClr val="1C1A17"/>
+                          </a:solidFill>
+                          <a:latin typeface="Google Sans Flex"/>
+                        </a:rPr>
+                        <a:t>Quarter checkpoints correct</a:t>
+                      </a:r>
+                    </a:p>
+                  </a:txBody>
+                  <a:tcPr marT="27432" marB="27432" anchor="ctr">
+                    <a:solidFill>
+                      <a:srgbClr val="F6F1E7"/>
+                    </a:solidFill>
+                  </a:tcPr>
+                </a:tc>
+                <a:tc>
+                  <a:txBody>
+                    <a:bodyPr/>
+                    <a:lstStyle/>
+                    <a:p>
+                      <a:r>
+                        <a:rPr sz="950" b="0">
+                          <a:solidFill>
+                            <a:srgbClr val="1C1A17"/>
+                          </a:solidFill>
+                          <a:latin typeface="Google Sans Flex"/>
+                        </a:rPr>
+                        <a:t>3 of 3</a:t>
+                      </a:r>
+                    </a:p>
+                  </a:txBody>
+                  <a:tcPr marT="27432" marB="27432" anchor="ctr">
+                    <a:solidFill>
+                      <a:srgbClr val="F6F1E7"/>
+                    </a:solidFill>
+                  </a:tcPr>
+                </a:tc>
+              </a:tr>
+              <a:tr h="274320">
+                <a:tc>
+                  <a:txBody>
+                    <a:bodyPr/>
+                    <a:lstStyle/>
+                    <a:p>
+                      <a:r>
+                        <a:rPr sz="950" b="0">
+                          <a:solidFill>
+                            <a:srgbClr val="1C1A17"/>
+                          </a:solidFill>
+                          <a:latin typeface="Google Sans Flex"/>
+                        </a:rPr>
+                        <a:t>Supersession chains correct</a:t>
+                      </a:r>
+                    </a:p>
+                  </a:txBody>
+                  <a:tcPr marT="27432" marB="27432" anchor="ctr">
+                    <a:solidFill>
+                      <a:srgbClr val="FFFFFF"/>
+                    </a:solidFill>
+                  </a:tcPr>
+                </a:tc>
+                <a:tc>
+                  <a:txBody>
+                    <a:bodyPr/>
+                    <a:lstStyle/>
+                    <a:p>
+                      <a:r>
+                        <a:rPr sz="950" b="0">
+                          <a:solidFill>
+                            <a:srgbClr val="1C1A17"/>
+                          </a:solidFill>
+                          <a:latin typeface="Google Sans Flex"/>
+                        </a:rPr>
+                        <a:t>1 of 1</a:t>
+                      </a:r>
+                    </a:p>
+                  </a:txBody>
+                  <a:tcPr marT="27432" marB="27432" anchor="ctr">
+                    <a:solidFill>
+                      <a:srgbClr val="FFFFFF"/>
+                    </a:solidFill>
+                  </a:tcPr>
+                </a:tc>
+              </a:tr>
+              <a:tr h="274320">
+                <a:tc>
+                  <a:txBody>
+                    <a:bodyPr/>
+                    <a:lstStyle/>
+                    <a:p>
+                      <a:r>
+                        <a:rPr sz="950" b="0">
+                          <a:solidFill>
+                            <a:srgbClr val="1C1A17"/>
+                          </a:solidFill>
+                          <a:latin typeface="Google Sans Flex"/>
+                        </a:rPr>
+                        <a:t>Authority cases correct</a:t>
+                      </a:r>
+                    </a:p>
+                  </a:txBody>
+                  <a:tcPr marT="27432" marB="27432" anchor="ctr">
+                    <a:solidFill>
+                      <a:srgbClr val="F6F1E7"/>
+                    </a:solidFill>
+                  </a:tcPr>
+                </a:tc>
+                <a:tc>
+                  <a:txBody>
+                    <a:bodyPr/>
+                    <a:lstStyle/>
+                    <a:p>
+                      <a:r>
+                        <a:rPr sz="950" b="0">
+                          <a:solidFill>
+                            <a:srgbClr val="1C1A17"/>
+                          </a:solidFill>
+                          <a:latin typeface="Google Sans Flex"/>
+                        </a:rPr>
+                        <a:t>12 of 12</a:t>
+                      </a:r>
+                    </a:p>
+                  </a:txBody>
+                  <a:tcPr marT="27432" marB="27432" anchor="ctr">
+                    <a:solidFill>
+                      <a:srgbClr val="F6F1E7"/>
+                    </a:solidFill>
+                  </a:tcPr>
+                </a:tc>
+              </a:tr>
+            </a:tbl>
+          </a:graphicData>
+        </a:graphic>
+      </p:graphicFrame>
+      <p:sp>
+        <p:nvSpPr>
+          <p:cNvPr id="148" name="TextBox 147"/>
+          <p:cNvSpPr txBox="1"/>
+          <p:nvPr/>
+        </p:nvSpPr>
+        <p:spPr>
+          <a:xfrm>
+            <a:off x="5303520" y="3291840"/>
+            <a:ext cx="3520440" cy="1554480"/>
+          </a:xfrm>
+          <a:prstGeom prst="rect">
+            <a:avLst/>
+          </a:prstGeom>
+          <a:noFill/>
+        </p:spPr>
+        <p:txBody>
+          <a:bodyPr wrap="square" anchor="t" lIns="45720" rIns="45720">
+            <a:spAutoFit/>
+          </a:bodyPr>
+          <a:lstStyle/>
+          <a:p>
+            <a:pPr>
+              <a:spcAft>
+                <a:spcPts val="200"/>
+              </a:spcAft>
+            </a:pPr>
+            <a:r>
               <a:rPr sz="900" b="1">
                 <a:solidFill>
-                  <a:srgbClr val="202124"/>
-                </a:solidFill>
-                <a:latin typeface="Google Sans Flex"/>
-              </a:rPr>
-              <a:t>Notes and misses, in the open</a:t>
+                  <a:srgbClr val="1C1A17"/>
+                </a:solidFill>
+                <a:latin typeface="Google Sans Flex"/>
+              </a:rPr>
+              <a:t>In the open:</a:t>
             </a:r>
           </a:p>
           <a:p>
             <a:pPr>
               <a:spcAft>
-                <a:spcPts val="300"/>
+                <a:spcPts val="200"/>
               </a:spcAft>
             </a:pPr>
             <a:r>
               <a:rPr sz="900" b="0">
                 <a:solidFill>
-                  <a:srgbClr val="202124"/>
-                </a:solidFill>
-                <a:latin typeface="Google Sans Flex"/>
-              </a:rPr>
-              <a:t>- stale docs found 7/8</a:t>
+                  <a:srgbClr val="1C1A17"/>
+                </a:solidFill>
+                <a:latin typeface="Google Sans Flex"/>
+              </a:rPr>
+              <a:t>- premise changes found 2/5, our weakest part</a:t>
             </a:r>
           </a:p>
           <a:p>
             <a:pPr>
               <a:spcAft>
-                <a:spcPts val="300"/>
+                <a:spcPts val="200"/>
               </a:spcAft>
             </a:pPr>
             <a:r>
               <a:rPr sz="900" b="0">
                 <a:solidFill>
-                  <a:srgbClr val="202124"/>
-                </a:solidFill>
-                <a:latin typeface="Google Sans Flex"/>
-              </a:rPr>
-              <a:t>- premise changes found 4/5</a:t>
+                  <a:srgbClr val="1C1A17"/>
+                </a:solidFill>
+                <a:latin typeface="Google Sans Flex"/>
+              </a:rPr>
+              <a:t>- updates 19/20, contradictions 16/19</a:t>
             </a:r>
           </a:p>
           <a:p>
             <a:pPr>
               <a:spcAft>
-                <a:spcPts val="300"/>
+                <a:spcPts val="200"/>
               </a:spcAft>
             </a:pPr>
             <a:r>
               <a:rPr sz="900" b="0">
                 <a:solidFill>
-                  <a:srgbClr val="202124"/>
-                </a:solidFill>
-                <a:latin typeface="Google Sans Flex"/>
-              </a:rPr>
-              <a:t>- updates found 7/9, contradictions found 6/8</a:t>
+                  <a:srgbClr val="1C1A17"/>
+                </a:solidFill>
+                <a:latin typeface="Google Sans Flex"/>
+              </a:rPr>
+              <a:t>- answerable questions 21/21 cited an expected decision</a:t>
             </a:r>
           </a:p>
           <a:p>
             <a:pPr>
               <a:spcAft>
-                <a:spcPts val="300"/>
+                <a:spcPts val="200"/>
               </a:spcAft>
             </a:pPr>
             <a:r>
               <a:rPr sz="900" b="0">
                 <a:solidFill>
-                  <a:srgbClr val="202124"/>
-                </a:solidFill>
-                <a:latin typeface="Google Sans Flex"/>
-              </a:rPr>
-              <a:t>- answerable questions answered 10/10, citing an expected decision 10</a:t>
+                  <a:srgbClr val="1C1A17"/>
+                </a:solidFill>
+                <a:latin typeface="Google Sans Flex"/>
+              </a:rPr>
+              <a:t>- 579 stored quotes, all verified word for word</a:t>
             </a:r>
           </a:p>
           <a:p>
             <a:pPr>
               <a:spcAft>
-                <a:spcPts val="300"/>
+                <a:spcPts val="200"/>
               </a:spcAft>
             </a:pPr>
             <a:r>
               <a:rPr sz="900" b="0">
                 <a:solidFill>
-                  <a:srgbClr val="202124"/>
-                </a:solidFill>
-                <a:latin typeface="Google Sans Flex"/>
-              </a:rPr>
-              <a:t>- 206 stored quotes, every one verified word for word against its source</a:t>
-            </a:r>
-          </a:p>
-          <a:p>
-            <a:pPr>
-              <a:spcAft>
-                <a:spcPts val="300"/>
-              </a:spcAft>
-            </a:pPr>
-            <a:r>
-              <a:rPr sz="900" b="0">
-                <a:solidFill>
-                  <a:srgbClr val="202124"/>
-                </a:solidFill>
-                <a:latin typeface="Google Sans Flex"/>
-              </a:rPr>
-              <a:t>- latency over 30 ask and check calls, sequential, client to Vertex AI and Firestore in asia-south1</a:t>
-            </a:r>
-          </a:p>
-          <a:p>
-            <a:pPr>
-              <a:spcAft>
-                <a:spcPts val="300"/>
-              </a:spcAft>
-            </a:pPr>
-            <a:r>
-              <a:rPr sz="900" b="0">
-                <a:solidFill>
-                  <a:srgbClr val="202124"/>
-                </a:solidFill>
-                <a:latin typeface="Google Sans Flex"/>
-              </a:rPr>
-              <a:t>- check miss check-05: expected allow, got block</a:t>
-            </a:r>
-          </a:p>
-          <a:p>
-            <a:pPr>
-              <a:spcAft>
-                <a:spcPts val="300"/>
-              </a:spcAft>
-            </a:pPr>
-            <a:r>
-              <a:rPr sz="900" b="0">
-                <a:solidFill>
-                  <a:srgbClr val="202124"/>
-                </a:solidFill>
-                <a:latin typeface="Google Sans Flex"/>
-              </a:rPr>
-              <a:t>- check miss check-09: expected block, got allow</a:t>
-            </a:r>
-          </a:p>
-          <a:p>
-            <a:pPr>
-              <a:spcAft>
-                <a:spcPts val="300"/>
-              </a:spcAft>
-            </a:pPr>
-            <a:r>
-              <a:rPr sz="900" b="0">
-                <a:solidFill>
-                  <a:srgbClr val="202124"/>
-                </a:solidFill>
-                <a:latin typeface="Google Sans Flex"/>
-              </a:rPr>
-              <a:t>- live paste samples: relation correct 3/3, ingest p50 2249 ms</a:t>
+                  <a:srgbClr val="1C1A17"/>
+                </a:solidFill>
+                <a:latin typeface="Google Sans Flex"/>
+              </a:rPr>
+              <a:t>- check misses lean to caution (warn)</a:t>
             </a:r>
           </a:p>
         </p:txBody>
@@ -9193,7 +9735,7 @@
             <a:r>
               <a:rPr sz="1200" b="1">
                 <a:solidFill>
-                  <a:srgbClr val="202124"/>
+                  <a:srgbClr val="1C1A17"/>
                 </a:solidFill>
                 <a:latin typeface="Google Sans Flex"/>
               </a:rPr>
@@ -9202,11 +9744,11 @@
             <a:r>
               <a:rPr sz="1200" b="0">
                 <a:solidFill>
-                  <a:srgbClr val="202124"/>
-                </a:solidFill>
-                <a:latin typeface="Google Sans Flex"/>
-              </a:rPr>
-              <a:t>Slack, Microsoft Teams and Discord plug-ins that ingest threads and answer in place. A Discord slash command exists today.</a:t>
+                  <a:srgbClr val="1C1A17"/>
+                </a:solidFill>
+                <a:latin typeface="Google Sans Flex"/>
+              </a:rPr>
+              <a:t>Slack and Microsoft Teams next to the live Discord connector, answering in place.</a:t>
             </a:r>
           </a:p>
           <a:p>
@@ -9218,7 +9760,7 @@
             <a:r>
               <a:rPr sz="1200" b="1">
                 <a:solidFill>
-                  <a:srgbClr val="202124"/>
+                  <a:srgbClr val="1C1A17"/>
                 </a:solidFill>
                 <a:latin typeface="Google Sans Flex"/>
               </a:rPr>
@@ -9227,7 +9769,7 @@
             <a:r>
               <a:rPr sz="1200" b="0">
                 <a:solidFill>
-                  <a:srgbClr val="202124"/>
+                  <a:srgbClr val="1C1A17"/>
                 </a:solidFill>
                 <a:latin typeface="Google Sans Flex"/>
               </a:rPr>
@@ -9243,7 +9785,7 @@
             <a:r>
               <a:rPr sz="1200" b="1">
                 <a:solidFill>
-                  <a:srgbClr val="202124"/>
+                  <a:srgbClr val="1C1A17"/>
                 </a:solidFill>
                 <a:latin typeface="Google Sans Flex"/>
               </a:rPr>
@@ -9252,11 +9794,11 @@
             <a:r>
               <a:rPr sz="1200" b="0">
                 <a:solidFill>
-                  <a:srgbClr val="202124"/>
-                </a:solidFill>
-                <a:latin typeface="Google Sans Flex"/>
-              </a:rPr>
-              <a:t>the GitHub webhook already checks PR text; next, check diffs and post review comments for every repo.</a:t>
+                  <a:srgbClr val="1C1A17"/>
+                </a:solidFill>
+                <a:latin typeface="Google Sans Flex"/>
+              </a:rPr>
+              <a:t>check PR diffs against the record and post review comments for every repo.</a:t>
             </a:r>
           </a:p>
         </p:txBody>
@@ -9291,7 +9833,7 @@
             <a:r>
               <a:rPr sz="1200" b="1">
                 <a:solidFill>
-                  <a:srgbClr val="202124"/>
+                  <a:srgbClr val="1C1A17"/>
                 </a:solidFill>
                 <a:latin typeface="Google Sans Flex"/>
               </a:rPr>
@@ -9300,11 +9842,11 @@
             <a:r>
               <a:rPr sz="1200" b="0">
                 <a:solidFill>
-                  <a:srgbClr val="202124"/>
-                </a:solidFill>
-                <a:latin typeface="Google Sans Flex"/>
-              </a:rPr>
-              <a:t>manufacturing SOP drift. A line change or a supplier note that contradicts the approved standard operating procedure raises an alert before a shift runs it.</a:t>
+                  <a:srgbClr val="1C1A17"/>
+                </a:solidFill>
+                <a:latin typeface="Google Sans Flex"/>
+              </a:rPr>
+              <a:t>manufacturing SOP drift. A line change or a supplier note that contradicts the approved procedure raises an alert before a shift runs it.</a:t>
             </a:r>
           </a:p>
           <a:p>
@@ -9316,7 +9858,7 @@
             <a:r>
               <a:rPr sz="1200" b="1">
                 <a:solidFill>
-                  <a:srgbClr val="202124"/>
+                  <a:srgbClr val="1C1A17"/>
                 </a:solidFill>
                 <a:latin typeface="Google Sans Flex"/>
               </a:rPr>
@@ -9325,11 +9867,11 @@
             <a:r>
               <a:rPr sz="1200" b="0">
                 <a:solidFill>
-                  <a:srgbClr val="202124"/>
-                </a:solidFill>
-                <a:latin typeface="Google Sans Flex"/>
-              </a:rPr>
-              <a:t>the benchmark shows 4 of 17 contradictions missed; we will tune reconciliation against the gold set.</a:t>
+                  <a:srgbClr val="1C1A17"/>
+                </a:solidFill>
+                <a:latin typeface="Google Sans Flex"/>
+              </a:rPr>
+              <a:t>premise watch finds 2 of 5 today; we will tune it against the gold set.</a:t>
             </a:r>
           </a:p>
           <a:p>
@@ -9341,7 +9883,7 @@
             <a:r>
               <a:rPr sz="1200" b="1">
                 <a:solidFill>
-                  <a:srgbClr val="202124"/>
+                  <a:srgbClr val="1C1A17"/>
                 </a:solidFill>
                 <a:latin typeface="Google Sans Flex"/>
               </a:rPr>
@@ -9350,11 +9892,11 @@
             <a:r>
               <a:rPr sz="1200" b="0">
                 <a:solidFill>
-                  <a:srgbClr val="202124"/>
-                </a:solidFill>
-                <a:latin typeface="Google Sans Flex"/>
-              </a:rPr>
-              <a:t>ingest this repository's own README, PRs and commits next to the synthetic corpus.</a:t>
+                  <a:srgbClr val="1C1A17"/>
+                </a:solidFill>
+                <a:latin typeface="Google Sans Flex"/>
+              </a:rPr>
+              <a:t>this repository's own README, PRs and commits next to the synthetic corpus.</a:t>
             </a:r>
           </a:p>
         </p:txBody>
@@ -9558,13 +10100,13 @@
           <a:p>
             <a:pPr>
               <a:spcAft>
-                <a:spcPts val="1200"/>
+                <a:spcPts val="1000"/>
               </a:spcAft>
             </a:pPr>
             <a:r>
               <a:rPr sz="1400" b="1">
                 <a:solidFill>
-                  <a:srgbClr val="202124"/>
+                  <a:srgbClr val="1C1A17"/>
                 </a:solidFill>
                 <a:latin typeface="Google Sans Flex"/>
               </a:rPr>
@@ -9573,7 +10115,7 @@
             <a:r>
               <a:rPr sz="1400" b="0">
                 <a:solidFill>
-                  <a:srgbClr val="202124"/>
+                  <a:srgbClr val="1C1A17"/>
                 </a:solidFill>
                 <a:latin typeface="Google Sans Flex"/>
               </a:rPr>
@@ -9583,13 +10125,13 @@
           <a:p>
             <a:pPr>
               <a:spcAft>
-                <a:spcPts val="1200"/>
+                <a:spcPts val="1000"/>
               </a:spcAft>
             </a:pPr>
             <a:r>
               <a:rPr sz="1400" b="1">
                 <a:solidFill>
-                  <a:srgbClr val="202124"/>
+                  <a:srgbClr val="1C1A17"/>
                 </a:solidFill>
                 <a:latin typeface="Google Sans Flex"/>
               </a:rPr>
@@ -9598,7 +10140,7 @@
             <a:r>
               <a:rPr sz="1400" b="0">
                 <a:solidFill>
-                  <a:srgbClr val="202124"/>
+                  <a:srgbClr val="1C1A17"/>
                 </a:solidFill>
                 <a:latin typeface="Google Sans Flex"/>
               </a:rPr>
@@ -9608,13 +10150,13 @@
           <a:p>
             <a:pPr>
               <a:spcAft>
-                <a:spcPts val="1200"/>
+                <a:spcPts val="1000"/>
               </a:spcAft>
             </a:pPr>
             <a:r>
               <a:rPr sz="1400" b="1">
                 <a:solidFill>
-                  <a:srgbClr val="202124"/>
+                  <a:srgbClr val="1C1A17"/>
                 </a:solidFill>
                 <a:latin typeface="Google Sans Flex"/>
               </a:rPr>
@@ -9623,48 +10165,73 @@
             <a:r>
               <a:rPr sz="1400" b="0">
                 <a:solidFill>
-                  <a:srgbClr val="202124"/>
-                </a:solidFill>
-                <a:latin typeface="Google Sans Flex"/>
-              </a:rPr>
-              <a:t>https://canon-tn07.web.app</a:t>
+                  <a:srgbClr val="1C1A17"/>
+                </a:solidFill>
+                <a:latin typeface="Google Sans Flex"/>
+              </a:rPr>
+              <a:t>https://canon-tn07.web.app  (also https://canon.tn07.dev)</a:t>
             </a:r>
           </a:p>
           <a:p>
             <a:pPr>
               <a:spcAft>
-                <a:spcPts val="1200"/>
+                <a:spcPts val="1000"/>
               </a:spcAft>
             </a:pPr>
             <a:r>
               <a:rPr sz="1400" b="1">
                 <a:solidFill>
-                  <a:srgbClr val="202124"/>
-                </a:solidFill>
-                <a:latin typeface="Google Sans Flex"/>
-              </a:rPr>
-              <a:t>Cloud Run API: </a:t>
+                  <a:srgbClr val="1C1A17"/>
+                </a:solidFill>
+                <a:latin typeface="Google Sans Flex"/>
+              </a:rPr>
+              <a:t>Cloud Run: </a:t>
             </a:r>
             <a:r>
               <a:rPr sz="1400" b="0">
                 <a:solidFill>
-                  <a:srgbClr val="202124"/>
-                </a:solidFill>
-                <a:latin typeface="Google Sans Flex"/>
-              </a:rPr>
-              <a:t>https://canon-ezvux7gqxa-el.a.run.app</a:t>
+                  <a:srgbClr val="1C1A17"/>
+                </a:solidFill>
+                <a:latin typeface="Google Sans Flex"/>
+              </a:rPr>
+              <a:t>https://canon-ezvux7gqxa-el.a.run.app/health</a:t>
             </a:r>
           </a:p>
           <a:p>
             <a:pPr>
               <a:spcAft>
-                <a:spcPts val="1200"/>
+                <a:spcPts val="1000"/>
               </a:spcAft>
             </a:pPr>
             <a:r>
               <a:rPr sz="1400" b="1">
                 <a:solidFill>
-                  <a:srgbClr val="202124"/>
+                  <a:srgbClr val="1C1A17"/>
+                </a:solidFill>
+                <a:latin typeface="Google Sans Flex"/>
+              </a:rPr>
+              <a:t>Live Discord demo: </a:t>
+            </a:r>
+            <a:r>
+              <a:rPr sz="1400" b="0">
+                <a:solidFill>
+                  <a:srgbClr val="1C1A17"/>
+                </a:solidFill>
+                <a:latin typeface="Google Sans Flex"/>
+              </a:rPr>
+              <a:t>https://discord.gg/HwSgjmcgF5</a:t>
+            </a:r>
+          </a:p>
+          <a:p>
+            <a:pPr>
+              <a:spcAft>
+                <a:spcPts val="1000"/>
+              </a:spcAft>
+            </a:pPr>
+            <a:r>
+              <a:rPr sz="1400" b="1">
+                <a:solidFill>
+                  <a:srgbClr val="1C1A17"/>
                 </a:solidFill>
                 <a:latin typeface="Google Sans Flex"/>
               </a:rPr>
@@ -9673,7 +10240,7 @@
             <a:r>
               <a:rPr sz="1400" b="0">
                 <a:solidFill>
-                  <a:srgbClr val="202124"/>
+                  <a:srgbClr val="1C1A17"/>
                 </a:solidFill>
                 <a:latin typeface="Google Sans Flex"/>
               </a:rPr>
@@ -9683,13 +10250,13 @@
           <a:p>
             <a:pPr>
               <a:spcAft>
-                <a:spcPts val="1200"/>
+                <a:spcPts val="1000"/>
               </a:spcAft>
             </a:pPr>
             <a:r>
               <a:rPr sz="1400" b="0">
                 <a:solidFill>
-                  <a:srgbClr val="202124"/>
+                  <a:srgbClr val="1C1A17"/>
                 </a:solidFill>
                 <a:latin typeface="Google Sans Flex"/>
               </a:rPr>
@@ -9698,6 +10265,30 @@
           </a:p>
         </p:txBody>
       </p:sp>
+      <p:pic>
+        <p:nvPicPr>
+          <p:cNvPr id="161" name="Picture 160" descr="lockup.png"/>
+          <p:cNvPicPr>
+            <a:picLocks noChangeAspect="1"/>
+          </p:cNvPicPr>
+          <p:nvPr/>
+        </p:nvPicPr>
+        <p:blipFill>
+          <a:blip r:embed="rId5"/>
+          <a:stretch>
+            <a:fillRect/>
+          </a:stretch>
+        </p:blipFill>
+        <p:spPr>
+          <a:xfrm>
+            <a:off x="6949440" y="4297680"/>
+            <a:ext cx="1828800" cy="471424"/>
+          </a:xfrm>
+          <a:prstGeom prst="rect">
+            <a:avLst/>
+          </a:prstGeom>
+        </p:spPr>
+      </p:pic>
     </p:spTree>
   </p:cSld>
   <p:clrMapOvr>
@@ -9926,112 +10517,9 @@
           </a:p>
         </p:txBody>
       </p:sp>
-      <p:sp>
-        <p:nvSpPr>
-          <p:cNvPr id="72" name="TextBox 71"/>
-          <p:cNvSpPr txBox="1"/>
-          <p:nvPr/>
-        </p:nvSpPr>
-        <p:spPr>
-          <a:xfrm>
-            <a:off x="320040" y="1188720"/>
-            <a:ext cx="4114800" cy="3703320"/>
-          </a:xfrm>
-          <a:prstGeom prst="rect">
-            <a:avLst/>
-          </a:prstGeom>
-          <a:noFill/>
-        </p:spPr>
-        <p:txBody>
-          <a:bodyPr wrap="square" anchor="t" lIns="45720" rIns="45720">
-            <a:spAutoFit/>
-          </a:bodyPr>
-          <a:lstStyle/>
-          <a:p>
-            <a:pPr>
-              <a:spcAft>
-                <a:spcPts val="700"/>
-              </a:spcAft>
-            </a:pPr>
-            <a:r>
-              <a:rPr sz="1200" b="1">
-                <a:solidFill>
-                  <a:srgbClr val="202124"/>
-                </a:solidFill>
-                <a:latin typeface="Google Sans Flex"/>
-              </a:rPr>
-              <a:t>Canon is the shared memory of a company, for its people and for its AI agents.</a:t>
-            </a:r>
-          </a:p>
-          <a:p>
-            <a:pPr>
-              <a:spcAft>
-                <a:spcPts val="700"/>
-              </a:spcAft>
-            </a:pPr>
-            <a:r>
-              <a:rPr sz="1200" b="0">
-                <a:solidFill>
-                  <a:srgbClr val="202124"/>
-                </a:solidFill>
-                <a:latin typeface="Google Sans Flex"/>
-              </a:rPr>
-              <a:t>Teams decide things in Slack threads, meetings, PRs and email. The wiki goes stale. New hires and AI agents act on old information.</a:t>
-            </a:r>
-          </a:p>
-          <a:p>
-            <a:pPr>
-              <a:spcAft>
-                <a:spcPts val="700"/>
-              </a:spcAft>
-            </a:pPr>
-            <a:r>
-              <a:rPr sz="1200" b="0">
-                <a:solidFill>
-                  <a:srgbClr val="202124"/>
-                </a:solidFill>
-                <a:latin typeface="Google Sans Flex"/>
-              </a:rPr>
-              <a:t>Canon keeps one record of decisions. Each decision has a rationale, an owner, a date and a quote checked word for word against its source.</a:t>
-            </a:r>
-          </a:p>
-          <a:p>
-            <a:pPr>
-              <a:spcAft>
-                <a:spcPts val="700"/>
-              </a:spcAft>
-            </a:pPr>
-            <a:r>
-              <a:rPr sz="1200" b="0">
-                <a:solidFill>
-                  <a:srgbClr val="202124"/>
-                </a:solidFill>
-                <a:latin typeface="Google Sans Flex"/>
-              </a:rPr>
-              <a:t>Every new message, document and agent action is checked against that record. Canon flags drift: a contradiction, a stale wiki page, a broken premise.</a:t>
-            </a:r>
-          </a:p>
-          <a:p>
-            <a:pPr>
-              <a:spcAft>
-                <a:spcPts val="700"/>
-              </a:spcAft>
-            </a:pPr>
-            <a:r>
-              <a:rPr sz="1200" b="0">
-                <a:solidFill>
-                  <a:srgbClr val="202124"/>
-                </a:solidFill>
-                <a:latin typeface="Google Sans Flex"/>
-              </a:rPr>
-              <a:t>Coding agents connect over MCP and call check_intent before they act. A Friday cron deploy is blocked, with the incident review as evidence.</a:t>
-            </a:r>
-          </a:p>
-        </p:txBody>
-      </p:sp>
       <p:pic>
         <p:nvPicPr>
-          <p:cNvPr id="73" name="Picture 72" descr="home-block.jpg"/>
+          <p:cNvPr id="72" name="Picture 71" descr="lockup.png"/>
           <p:cNvPicPr>
             <a:picLocks noChangeAspect="1"/>
           </p:cNvPicPr>
@@ -10045,19 +10533,201 @@
         </p:blipFill>
         <p:spPr>
           <a:xfrm>
-            <a:off x="4572000" y="1711642"/>
-            <a:ext cx="4251960" cy="2657475"/>
+            <a:off x="7543800" y="731520"/>
+            <a:ext cx="1280160" cy="329997"/>
+          </a:xfrm>
+          <a:prstGeom prst="rect">
+            <a:avLst/>
+          </a:prstGeom>
+        </p:spPr>
+      </p:pic>
+      <p:sp>
+        <p:nvSpPr>
+          <p:cNvPr id="73" name="TextBox 72"/>
+          <p:cNvSpPr txBox="1"/>
+          <p:nvPr/>
+        </p:nvSpPr>
+        <p:spPr>
+          <a:xfrm>
+            <a:off x="320040" y="1188720"/>
+            <a:ext cx="4114800" cy="3703320"/>
+          </a:xfrm>
+          <a:prstGeom prst="rect">
+            <a:avLst/>
+          </a:prstGeom>
+          <a:noFill/>
+        </p:spPr>
+        <p:txBody>
+          <a:bodyPr wrap="square" anchor="t" lIns="45720" rIns="45720">
+            <a:spAutoFit/>
+          </a:bodyPr>
+          <a:lstStyle/>
+          <a:p>
+            <a:pPr>
+              <a:spcAft>
+                <a:spcPts val="600"/>
+              </a:spcAft>
+            </a:pPr>
+            <a:r>
+              <a:rPr sz="1100" b="1">
+                <a:solidFill>
+                  <a:srgbClr val="1C1A17"/>
+                </a:solidFill>
+                <a:latin typeface="Google Sans Flex"/>
+              </a:rPr>
+              <a:t>Canon is the shared memory of a company, for its people and its AI agents.</a:t>
+            </a:r>
+          </a:p>
+          <a:p>
+            <a:pPr>
+              <a:spcAft>
+                <a:spcPts val="600"/>
+              </a:spcAft>
+            </a:pPr>
+            <a:r>
+              <a:rPr sz="1100" b="0">
+                <a:solidFill>
+                  <a:srgbClr val="1C1A17"/>
+                </a:solidFill>
+                <a:latin typeface="Google Sans Flex"/>
+              </a:rPr>
+              <a:t>Teams decide things in Slack threads, meetings and pull requests, then forget. Wiki pages go out of date. New hires and coding agents act on old rules.</a:t>
+            </a:r>
+          </a:p>
+          <a:p>
+            <a:pPr>
+              <a:spcAft>
+                <a:spcPts val="600"/>
+              </a:spcAft>
+            </a:pPr>
+            <a:r>
+              <a:rPr sz="1100" b="0">
+                <a:solidFill>
+                  <a:srgbClr val="1C1A17"/>
+                </a:solidFill>
+                <a:latin typeface="Google Sans Flex"/>
+              </a:rPr>
+              <a:t>Canon keeps one record of decisions: rationale, owner, date, authority, and a quote checked word for word against its source.</a:t>
+            </a:r>
+          </a:p>
+          <a:p>
+            <a:pPr>
+              <a:spcAft>
+                <a:spcPts val="600"/>
+              </a:spcAft>
+            </a:pPr>
+            <a:r>
+              <a:rPr sz="1100" b="0">
+                <a:solidFill>
+                  <a:srgbClr val="1C1A17"/>
+                </a:solidFill>
+                <a:latin typeface="Google Sans Flex"/>
+              </a:rPr>
+              <a:t>It checks every new message, document and agent action against that record, and warns when one is about to break a decision.</a:t>
+            </a:r>
+          </a:p>
+          <a:p>
+            <a:pPr>
+              <a:spcAft>
+                <a:spcPts val="600"/>
+              </a:spcAft>
+            </a:pPr>
+            <a:r>
+              <a:rPr sz="1100" b="0">
+                <a:solidFill>
+                  <a:srgbClr val="1C1A17"/>
+                </a:solidFill>
+                <a:latin typeface="Google Sans Flex"/>
+              </a:rPr>
+              <a:t>Coding agents connect over MCP and call check_intent before they act. A Friday deploy job is blocked, with the incident review as evidence.</a:t>
+            </a:r>
+          </a:p>
+          <a:p>
+            <a:pPr>
+              <a:spcAft>
+                <a:spcPts val="600"/>
+              </a:spcAft>
+            </a:pPr>
+            <a:r>
+              <a:rPr sz="1100" b="0">
+                <a:solidFill>
+                  <a:srgbClr val="1C1A17"/>
+                </a:solidFill>
+                <a:latin typeface="Google Sans Flex"/>
+              </a:rPr>
+              <a:t>Live on a public Discord server: post a message, and Canon replies within a minute.</a:t>
+            </a:r>
+          </a:p>
+        </p:txBody>
+      </p:sp>
+      <p:pic>
+        <p:nvPicPr>
+          <p:cNvPr id="74" name="Picture 73" descr="agent-1080.jpg"/>
+          <p:cNvPicPr>
+            <a:picLocks noChangeAspect="1"/>
+          </p:cNvPicPr>
+          <p:nvPr/>
+        </p:nvPicPr>
+        <p:blipFill>
+          <a:blip r:embed="rId5"/>
+          <a:stretch>
+            <a:fillRect/>
+          </a:stretch>
+        </p:blipFill>
+        <p:spPr>
+          <a:xfrm>
+            <a:off x="4572000" y="1638017"/>
+            <a:ext cx="4251960" cy="2393246"/>
           </a:xfrm>
           <a:prstGeom prst="rect">
             <a:avLst/>
           </a:prstGeom>
           <a:ln w="9525">
             <a:solidFill>
-              <a:srgbClr val="DADCE0"/>
+              <a:srgbClr val="D8CFBE"/>
             </a:solidFill>
           </a:ln>
         </p:spPr>
       </p:pic>
+      <p:sp>
+        <p:nvSpPr>
+          <p:cNvPr id="75" name="TextBox 74"/>
+          <p:cNvSpPr txBox="1"/>
+          <p:nvPr/>
+        </p:nvSpPr>
+        <p:spPr>
+          <a:xfrm>
+            <a:off x="4572000" y="4031263"/>
+            <a:ext cx="4251960" cy="274320"/>
+          </a:xfrm>
+          <a:prstGeom prst="rect">
+            <a:avLst/>
+          </a:prstGeom>
+          <a:noFill/>
+        </p:spPr>
+        <p:txBody>
+          <a:bodyPr wrap="square" anchor="t" lIns="45720" rIns="45720">
+            <a:spAutoFit/>
+          </a:bodyPr>
+          <a:lstStyle/>
+          <a:p>
+            <a:pPr algn="ctr">
+              <a:spcAft>
+                <a:spcPts val="400"/>
+              </a:spcAft>
+            </a:pPr>
+            <a:r>
+              <a:rPr sz="900" b="0">
+                <a:solidFill>
+                  <a:srgbClr val="5F5A52"/>
+                </a:solidFill>
+                <a:latin typeface="Google Sans Flex"/>
+              </a:rPr>
+              <a:t>canon.tn07.dev: an AI agent gets stopped</a:t>
+            </a:r>
+          </a:p>
+        </p:txBody>
+      </p:sp>
     </p:spTree>
   </p:cSld>
   <p:clrMapOvr>
@@ -10256,11 +10926,11 @@
             <a:avLst/>
           </a:prstGeom>
           <a:solidFill>
-            <a:srgbClr val="202124"/>
+            <a:srgbClr val="1C1A17"/>
           </a:solidFill>
           <a:ln>
             <a:solidFill>
-              <a:srgbClr val="DADCE0"/>
+              <a:srgbClr val="D8CFBE"/>
             </a:solidFill>
           </a:ln>
           <a:effectLst/>
@@ -10326,11 +10996,11 @@
             <a:r>
               <a:rPr sz="1100" b="0">
                 <a:solidFill>
-                  <a:srgbClr val="202124"/>
-                </a:solidFill>
-                <a:latin typeface="Google Sans Flex"/>
-              </a:rPr>
-              <a:t>- Meeting-memory tools (Mnemo style) summarise. Decision logs (Decision Ledger style) store. Spec checkers (Spec Keeper style) review code.</a:t>
+                  <a:srgbClr val="1C1A17"/>
+                </a:solidFill>
+                <a:latin typeface="Google Sans Flex"/>
+              </a:rPr>
+              <a:t>- Meeting-memory tools summarise. Decision logs store. Spec checkers review code.</a:t>
             </a:r>
           </a:p>
           <a:p>
@@ -10342,11 +11012,27 @@
             <a:r>
               <a:rPr sz="1100" b="0">
                 <a:solidFill>
-                  <a:srgbClr val="202124"/>
-                </a:solidFill>
-                <a:latin typeface="Google Sans Flex"/>
-              </a:rPr>
-              <a:t>- Canon does all three on one record, and its first-class users include AI agents, not only people.</a:t>
+                  <a:srgbClr val="1C1A17"/>
+                </a:solidFill>
+                <a:latin typeface="Google Sans Flex"/>
+              </a:rPr>
+              <a:t>- Canon does all three on one record, and knows who may change a rule: official, proposed or claim, from the org tree.</a:t>
+            </a:r>
+          </a:p>
+          <a:p>
+            <a:pPr>
+              <a:spcAft>
+                <a:spcPts val="600"/>
+              </a:spcAft>
+            </a:pPr>
+            <a:r>
+              <a:rPr sz="1100" b="0">
+                <a:solidFill>
+                  <a:srgbClr val="1C1A17"/>
+                </a:solidFill>
+                <a:latin typeface="Google Sans Flex"/>
+              </a:rPr>
+              <a:t>- Its users include AI agents, not only people.</a:t>
             </a:r>
           </a:p>
         </p:txBody>
@@ -10366,11 +11052,11 @@
             <a:avLst/>
           </a:prstGeom>
           <a:solidFill>
-            <a:srgbClr val="202124"/>
+            <a:srgbClr val="1C1A17"/>
           </a:solidFill>
           <a:ln>
             <a:solidFill>
-              <a:srgbClr val="DADCE0"/>
+              <a:srgbClr val="D8CFBE"/>
             </a:solidFill>
           </a:ln>
           <a:effectLst/>
@@ -10401,7 +11087,7 @@
                 </a:solidFill>
                 <a:latin typeface="Google Sans Flex"/>
               </a:rPr>
-              <a:t>How does it solve the problem?</a:t>
+              <a:t>How it solves the problem</a:t>
             </a:r>
           </a:p>
         </p:txBody>
@@ -10436,11 +11122,11 @@
             <a:r>
               <a:rPr sz="1100" b="0">
                 <a:solidFill>
-                  <a:srgbClr val="202124"/>
-                </a:solidFill>
-                <a:latin typeface="Google Sans Flex"/>
-              </a:rPr>
-              <a:t>- Extracts decisions with verified quotes from any source.</a:t>
+                  <a:srgbClr val="1C1A17"/>
+                </a:solidFill>
+                <a:latin typeface="Google Sans Flex"/>
+              </a:rPr>
+              <a:t>- Extracts decisions with verified quotes from chats, meetings, wiki, PRs, PDFs and screenshots.</a:t>
             </a:r>
           </a:p>
           <a:p>
@@ -10452,11 +11138,11 @@
             <a:r>
               <a:rPr sz="1100" b="0">
                 <a:solidFill>
-                  <a:srgbClr val="202124"/>
-                </a:solidFill>
-                <a:latin typeface="Google Sans Flex"/>
-              </a:rPr>
-              <a:t>- Reconciles each one: same, update or contradiction.</a:t>
+                  <a:srgbClr val="1C1A17"/>
+                </a:solidFill>
+                <a:latin typeface="Google Sans Flex"/>
+              </a:rPr>
+              <a:t>- Reconciles each one: same, update or contradiction, ordered by effective date.</a:t>
             </a:r>
           </a:p>
           <a:p>
@@ -10468,11 +11154,11 @@
             <a:r>
               <a:rPr sz="1100" b="0">
                 <a:solidFill>
-                  <a:srgbClr val="202124"/>
-                </a:solidFill>
-                <a:latin typeface="Google Sans Flex"/>
-              </a:rPr>
-              <a:t>- Raises alerts on stale docs and broken premises.</a:t>
+                  <a:srgbClr val="1C1A17"/>
+                </a:solidFill>
+                <a:latin typeface="Google Sans Flex"/>
+              </a:rPr>
+              <a:t>- Flags out-of-date documents and broken premises, and sends unverified claims to the right lead.</a:t>
             </a:r>
           </a:p>
           <a:p>
@@ -10484,11 +11170,11 @@
             <a:r>
               <a:rPr sz="1100" b="0">
                 <a:solidFill>
-                  <a:srgbClr val="202124"/>
-                </a:solidFill>
-                <a:latin typeface="Google Sans Flex"/>
-              </a:rPr>
-              <a:t>- Answers why, with citations, or says I do not know.</a:t>
+                  <a:srgbClr val="1C1A17"/>
+                </a:solidFill>
+                <a:latin typeface="Google Sans Flex"/>
+              </a:rPr>
+              <a:t>- Answers why with citations, or says I do not know.</a:t>
             </a:r>
           </a:p>
         </p:txBody>
@@ -10508,11 +11194,11 @@
             <a:avLst/>
           </a:prstGeom>
           <a:solidFill>
-            <a:srgbClr val="202124"/>
+            <a:srgbClr val="1C1A17"/>
           </a:solidFill>
           <a:ln>
             <a:solidFill>
-              <a:srgbClr val="DADCE0"/>
+              <a:srgbClr val="D8CFBE"/>
             </a:solidFill>
           </a:ln>
           <a:effectLst/>
@@ -10578,7 +11264,7 @@
             <a:r>
               <a:rPr sz="1100" b="0">
                 <a:solidFill>
-                  <a:srgbClr val="202124"/>
+                  <a:srgbClr val="1C1A17"/>
                 </a:solidFill>
                 <a:latin typeface="Google Sans Flex"/>
               </a:rPr>
@@ -10594,11 +11280,11 @@
             <a:r>
               <a:rPr sz="1100" b="0">
                 <a:solidFill>
-                  <a:srgbClr val="202124"/>
-                </a:solidFill>
-                <a:latin typeface="Google Sans Flex"/>
-              </a:rPr>
-              <a:t>- Every agent read, write and check shows in a live feed.</a:t>
+                  <a:srgbClr val="1C1A17"/>
+                </a:solidFill>
+                <a:latin typeface="Google Sans Flex"/>
+              </a:rPr>
+              <a:t>- Every agent read, write and check is recorded for people to see.</a:t>
             </a:r>
           </a:p>
           <a:p>
@@ -10610,11 +11296,11 @@
             <a:r>
               <a:rPr sz="1100" b="0">
                 <a:solidFill>
-                  <a:srgbClr val="202124"/>
-                </a:solidFill>
-                <a:latin typeface="Google Sans Flex"/>
-              </a:rPr>
-              <a:t>- Also an ADK agent over A2A.</a:t>
+                  <a:srgbClr val="1C1A17"/>
+                </a:solidFill>
+                <a:latin typeface="Google Sans Flex"/>
+              </a:rPr>
+              <a:t>- Also an ADK agent over A2A, and a Discord bot.</a:t>
             </a:r>
           </a:p>
         </p:txBody>
@@ -10818,151 +11504,151 @@
           <a:p>
             <a:pPr>
               <a:spcAft>
-                <a:spcPts val="700"/>
+                <a:spcPts val="600"/>
               </a:spcAft>
             </a:pPr>
             <a:r>
-              <a:rPr sz="1100" b="1">
-                <a:solidFill>
-                  <a:srgbClr val="202124"/>
-                </a:solidFill>
-                <a:latin typeface="Google Sans Flex"/>
-              </a:rPr>
-              <a:t>Ingest any source: </a:t>
-            </a:r>
-            <a:r>
-              <a:rPr sz="1100" b="0">
-                <a:solidFill>
-                  <a:srgbClr val="202124"/>
-                </a:solidFill>
-                <a:latin typeface="Google Sans Flex"/>
-              </a:rPr>
-              <a:t>Slack, meeting, wiki, PR, commit, email, free paste, image or PDF.</a:t>
+              <a:rPr sz="1050" b="1">
+                <a:solidFill>
+                  <a:srgbClr val="1C1A17"/>
+                </a:solidFill>
+                <a:latin typeface="Google Sans Flex"/>
+              </a:rPr>
+              <a:t>Ingest anything: </a:t>
+            </a:r>
+            <a:r>
+              <a:rPr sz="1050" b="0">
+                <a:solidFill>
+                  <a:srgbClr val="1C1A17"/>
+                </a:solidFill>
+                <a:latin typeface="Google Sans Flex"/>
+              </a:rPr>
+              <a:t>Slack, meetings, wiki, PRs, commits, email, paste, PDFs and screenshots (Gemini reads them).</a:t>
             </a:r>
           </a:p>
           <a:p>
             <a:pPr>
               <a:spcAft>
-                <a:spcPts val="700"/>
+                <a:spcPts val="600"/>
               </a:spcAft>
             </a:pPr>
             <a:r>
-              <a:rPr sz="1100" b="1">
-                <a:solidFill>
-                  <a:srgbClr val="202124"/>
+              <a:rPr sz="1050" b="1">
+                <a:solidFill>
+                  <a:srgbClr val="1C1A17"/>
                 </a:solidFill>
                 <a:latin typeface="Google Sans Flex"/>
               </a:rPr>
               <a:t>Decision extraction: </a:t>
             </a:r>
             <a:r>
-              <a:rPr sz="1100" b="0">
-                <a:solidFill>
-                  <a:srgbClr val="202124"/>
-                </a:solidFill>
-                <a:latin typeface="Google Sans Flex"/>
-              </a:rPr>
-              <a:t>statement, rationale, assumptions, owner, date, verified quotes.</a:t>
+              <a:rPr sz="1050" b="0">
+                <a:solidFill>
+                  <a:srgbClr val="1C1A17"/>
+                </a:solidFill>
+                <a:latin typeface="Google Sans Flex"/>
+              </a:rPr>
+              <a:t>statement, rationale, assumptions, owner, date, quotes verified word for word.</a:t>
             </a:r>
           </a:p>
           <a:p>
             <a:pPr>
               <a:spcAft>
-                <a:spcPts val="700"/>
+                <a:spcPts val="600"/>
               </a:spcAft>
             </a:pPr>
             <a:r>
-              <a:rPr sz="1100" b="1">
-                <a:solidFill>
-                  <a:srgbClr val="202124"/>
+              <a:rPr sz="1050" b="1">
+                <a:solidFill>
+                  <a:srgbClr val="1C1A17"/>
                 </a:solidFill>
                 <a:latin typeface="Google Sans Flex"/>
               </a:rPr>
               <a:t>Reconciliation: </a:t>
             </a:r>
             <a:r>
-              <a:rPr sz="1100" b="0">
-                <a:solidFill>
-                  <a:srgbClr val="202124"/>
-                </a:solidFill>
-                <a:latin typeface="Google Sans Flex"/>
-              </a:rPr>
-              <a:t>same, update (supersedes) or contradiction.</a:t>
+              <a:rPr sz="1050" b="0">
+                <a:solidFill>
+                  <a:srgbClr val="1C1A17"/>
+                </a:solidFill>
+                <a:latin typeface="Google Sans Flex"/>
+              </a:rPr>
+              <a:t>same, update (supersedes) or contradiction, ordered by effective date. Older copies marked outdated.</a:t>
             </a:r>
           </a:p>
           <a:p>
             <a:pPr>
               <a:spcAft>
-                <a:spcPts val="700"/>
+                <a:spcPts val="600"/>
               </a:spcAft>
             </a:pPr>
             <a:r>
-              <a:rPr sz="1100" b="1">
-                <a:solidFill>
-                  <a:srgbClr val="202124"/>
+              <a:rPr sz="1050" b="1">
+                <a:solidFill>
+                  <a:srgbClr val="1C1A17"/>
+                </a:solidFill>
+                <a:latin typeface="Google Sans Flex"/>
+              </a:rPr>
+              <a:t>Authority: </a:t>
+            </a:r>
+            <a:r>
+              <a:rPr sz="1050" b="0">
+                <a:solidFill>
+                  <a:srgbClr val="1C1A17"/>
+                </a:solidFill>
+                <a:latin typeface="Google Sans Flex"/>
+              </a:rPr>
+              <a:t>official, proposed or claim from the org tree. Unverified claims go to the right lead. Jokes are ignored.</a:t>
+            </a:r>
+          </a:p>
+          <a:p>
+            <a:pPr>
+              <a:spcAft>
+                <a:spcPts val="600"/>
+              </a:spcAft>
+            </a:pPr>
+            <a:r>
+              <a:rPr sz="1050" b="1">
+                <a:solidFill>
+                  <a:srgbClr val="1C1A17"/>
                 </a:solidFill>
                 <a:latin typeface="Google Sans Flex"/>
               </a:rPr>
               <a:t>Drift alerts: </a:t>
             </a:r>
             <a:r>
-              <a:rPr sz="1100" b="0">
-                <a:solidFill>
-                  <a:srgbClr val="202124"/>
-                </a:solidFill>
-                <a:latin typeface="Google Sans Flex"/>
-              </a:rPr>
-              <a:t>stale wiki pages and premise changes, both quotes side by side.</a:t>
+              <a:rPr sz="1050" b="0">
+                <a:solidFill>
+                  <a:srgbClr val="1C1A17"/>
+                </a:solidFill>
+                <a:latin typeface="Google Sans Flex"/>
+              </a:rPr>
+              <a:t>out-of-date documents and broken premises, both quotes side by side.</a:t>
             </a:r>
           </a:p>
           <a:p>
             <a:pPr>
               <a:spcAft>
-                <a:spcPts val="700"/>
+                <a:spcPts val="600"/>
               </a:spcAft>
             </a:pPr>
             <a:r>
-              <a:rPr sz="1100" b="1">
-                <a:solidFill>
-                  <a:srgbClr val="202124"/>
+              <a:rPr sz="1050" b="1">
+                <a:solidFill>
+                  <a:srgbClr val="1C1A17"/>
                 </a:solidFill>
                 <a:latin typeface="Google Sans Flex"/>
               </a:rPr>
               <a:t>Ask why: </a:t>
             </a:r>
             <a:r>
-              <a:rPr sz="1100" b="0">
-                <a:solidFill>
-                  <a:srgbClr val="202124"/>
-                </a:solidFill>
-                <a:latin typeface="Google Sans Flex"/>
-              </a:rPr>
-              <a:t>cited answer and decision timeline; refuses when the record is silent.</a:t>
-            </a:r>
-          </a:p>
-          <a:p>
-            <a:pPr>
-              <a:spcAft>
-                <a:spcPts val="700"/>
-              </a:spcAft>
-            </a:pPr>
-            <a:r>
-              <a:rPr sz="1100" b="1">
-                <a:solidFill>
-                  <a:srgbClr val="202124"/>
-                </a:solidFill>
-                <a:latin typeface="Google Sans Flex"/>
-              </a:rPr>
-              <a:t>Catch me up: </a:t>
-            </a:r>
-            <a:r>
-              <a:rPr sz="1100" b="0">
-                <a:solidFill>
-                  <a:srgbClr val="202124"/>
-                </a:solidFill>
-                <a:latin typeface="Google Sans Flex"/>
-              </a:rPr>
-              <a:t>engineer, PM or new-hire briefing with ranked next actions (score 0 to 100 with reasons) and who to ask.</a:t>
+              <a:rPr sz="1050" b="0">
+                <a:solidFill>
+                  <a:srgbClr val="1C1A17"/>
+                </a:solidFill>
+                <a:latin typeface="Google Sans Flex"/>
+              </a:rPr>
+              <a:t>cited answer and timeline; refuses when the record is silent.</a:t>
             </a:r>
           </a:p>
         </p:txBody>
@@ -10991,167 +11677,176 @@
           <a:p>
             <a:pPr>
               <a:spcAft>
-                <a:spcPts val="700"/>
+                <a:spcPts val="600"/>
               </a:spcAft>
             </a:pPr>
             <a:r>
-              <a:rPr sz="1100" b="1">
-                <a:solidFill>
-                  <a:srgbClr val="202124"/>
-                </a:solidFill>
-                <a:latin typeface="Google Sans Flex"/>
-              </a:rPr>
-              <a:t>Agent guard: </a:t>
-            </a:r>
-            <a:r>
-              <a:rPr sz="1100" b="0">
-                <a:solidFill>
-                  <a:srgbClr val="202124"/>
-                </a:solidFill>
-                <a:latin typeface="Google Sans Flex"/>
-              </a:rPr>
-              <a:t>check_intent gives allow, warn or block with the deciding decisions.</a:t>
+              <a:rPr sz="1050" b="1">
+                <a:solidFill>
+                  <a:srgbClr val="1C1A17"/>
+                </a:solidFill>
+                <a:latin typeface="Google Sans Flex"/>
+              </a:rPr>
+              <a:t>I am new here: </a:t>
+            </a:r>
+            <a:r>
+              <a:rPr sz="1050" b="0">
+                <a:solidFill>
+                  <a:srgbClr val="1C1A17"/>
+                </a:solidFill>
+                <a:latin typeface="Google Sans Flex"/>
+              </a:rPr>
+              <a:t>five things you must know, a page not to trust, people to ask.</a:t>
             </a:r>
           </a:p>
           <a:p>
             <a:pPr>
               <a:spcAft>
-                <a:spcPts val="700"/>
+                <a:spcPts val="600"/>
               </a:spcAft>
             </a:pPr>
             <a:r>
-              <a:rPr sz="1100" b="1">
-                <a:solidFill>
-                  <a:srgbClr val="202124"/>
-                </a:solidFill>
-                <a:latin typeface="Google Sans Flex"/>
-              </a:rPr>
-              <a:t>MCP server: </a:t>
-            </a:r>
-            <a:r>
-              <a:rPr sz="1100" b="0">
-                <a:solidFill>
-                  <a:srgbClr val="202124"/>
-                </a:solidFill>
-                <a:latin typeface="Google Sans Flex"/>
-              </a:rPr>
-              <a:t>six tools over streamable HTTP for Claude Code and Codex.</a:t>
+              <a:rPr sz="1050" b="1">
+                <a:solidFill>
+                  <a:srgbClr val="1C1A17"/>
+                </a:solidFill>
+                <a:latin typeface="Google Sans Flex"/>
+              </a:rPr>
+              <a:t>Catch me up: </a:t>
+            </a:r>
+            <a:r>
+              <a:rPr sz="1050" b="0">
+                <a:solidFill>
+                  <a:srgbClr val="1C1A17"/>
+                </a:solidFill>
+                <a:latin typeface="Google Sans Flex"/>
+              </a:rPr>
+              <a:t>14 roles, a summary and a ranked to-do list with reasons.</a:t>
             </a:r>
           </a:p>
           <a:p>
             <a:pPr>
               <a:spcAft>
-                <a:spcPts val="700"/>
+                <a:spcPts val="600"/>
               </a:spcAft>
             </a:pPr>
             <a:r>
-              <a:rPr sz="1100" b="1">
-                <a:solidFill>
-                  <a:srgbClr val="202124"/>
-                </a:solidFill>
-                <a:latin typeface="Google Sans Flex"/>
-              </a:rPr>
-              <a:t>Live agent activity feed and an agent playground in the browser.</a:t>
+              <a:rPr sz="1050" b="1">
+                <a:solidFill>
+                  <a:srgbClr val="1C1A17"/>
+                </a:solidFill>
+                <a:latin typeface="Google Sans Flex"/>
+              </a:rPr>
+              <a:t>Agent guard over MCP: </a:t>
+            </a:r>
+            <a:r>
+              <a:rPr sz="1050" b="0">
+                <a:solidFill>
+                  <a:srgbClr val="1C1A17"/>
+                </a:solidFill>
+                <a:latin typeface="Google Sans Flex"/>
+              </a:rPr>
+              <a:t>check_intent gives allow, warn or block. Six tools for Claude Code and Codex. ADK agent over A2A.</a:t>
             </a:r>
           </a:p>
           <a:p>
             <a:pPr>
               <a:spcAft>
-                <a:spcPts val="700"/>
+                <a:spcPts val="600"/>
               </a:spcAft>
             </a:pPr>
             <a:r>
-              <a:rPr sz="1100" b="1">
-                <a:solidFill>
-                  <a:srgbClr val="202124"/>
-                </a:solidFill>
-                <a:latin typeface="Google Sans Flex"/>
-              </a:rPr>
-              <a:t>Ask the departed expert: </a:t>
-            </a:r>
-            <a:r>
-              <a:rPr sz="1100" b="0">
-                <a:solidFill>
-                  <a:srgbClr val="202124"/>
-                </a:solidFill>
-                <a:latin typeface="Google Sans Flex"/>
-              </a:rPr>
-              <a:t>answers in a former colleague's voice, from their quotes only.</a:t>
+              <a:rPr sz="1050" b="1">
+                <a:solidFill>
+                  <a:srgbClr val="1C1A17"/>
+                </a:solidFill>
+                <a:latin typeface="Google Sans Flex"/>
+              </a:rPr>
+              <a:t>Discord, live: </a:t>
+            </a:r>
+            <a:r>
+              <a:rPr sz="1050" b="0">
+                <a:solidFill>
+                  <a:srgbClr val="1C1A17"/>
+                </a:solidFill>
+                <a:latin typeface="Google Sans Flex"/>
+              </a:rPr>
+              <a:t>synced every minute (threads, files, PDFs, screenshots); replies under the message; /canon ask, check, catchup, remember.</a:t>
             </a:r>
           </a:p>
           <a:p>
             <a:pPr>
               <a:spcAft>
-                <a:spcPts val="700"/>
+                <a:spcPts val="600"/>
               </a:spcAft>
             </a:pPr>
             <a:r>
-              <a:rPr sz="1100" b="1">
-                <a:solidFill>
-                  <a:srgbClr val="202124"/>
-                </a:solidFill>
-                <a:latin typeface="Google Sans Flex"/>
-              </a:rPr>
-              <a:t>Human in the loop: </a:t>
-            </a:r>
-            <a:r>
-              <a:rPr sz="1100" b="0">
-                <a:solidFill>
-                  <a:srgbClr val="202124"/>
-                </a:solidFill>
-                <a:latin typeface="Google Sans Flex"/>
-              </a:rPr>
-              <a:t>alerts stay open until a person resolves them.</a:t>
+              <a:rPr sz="1050" b="1">
+                <a:solidFill>
+                  <a:srgbClr val="1C1A17"/>
+                </a:solidFill>
+                <a:latin typeface="Google Sans Flex"/>
+              </a:rPr>
+              <a:t>People and org: </a:t>
+            </a:r>
+            <a:r>
+              <a:rPr sz="1050" b="0">
+                <a:solidFill>
+                  <a:srgbClr val="1C1A17"/>
+                </a:solidFill>
+                <a:latin typeface="Google Sans Flex"/>
+              </a:rPr>
+              <a:t>who owns what, who left, who took over.</a:t>
             </a:r>
           </a:p>
           <a:p>
             <a:pPr>
               <a:spcAft>
-                <a:spcPts val="700"/>
+                <a:spcPts val="600"/>
               </a:spcAft>
             </a:pPr>
             <a:r>
-              <a:rPr sz="1100" b="1">
-                <a:solidFill>
-                  <a:srgbClr val="202124"/>
-                </a:solidFill>
-                <a:latin typeface="Google Sans Flex"/>
-              </a:rPr>
-              <a:t>Integrations: </a:t>
-            </a:r>
-            <a:r>
-              <a:rPr sz="1100" b="0">
-                <a:solidFill>
-                  <a:srgbClr val="202124"/>
-                </a:solidFill>
-                <a:latin typeface="Google Sans Flex"/>
-              </a:rPr>
-              <a:t>A2A agent card, GitHub PR webhook, Discord slash command.</a:t>
+              <a:rPr sz="1050" b="1">
+                <a:solidFill>
+                  <a:srgbClr val="1C1A17"/>
+                </a:solidFill>
+                <a:latin typeface="Google Sans Flex"/>
+              </a:rPr>
+              <a:t>Measured: </a:t>
+            </a:r>
+            <a:r>
+              <a:rPr sz="1050" b="0">
+                <a:solidFill>
+                  <a:srgbClr val="1C1A17"/>
+                </a:solidFill>
+                <a:latin typeface="Google Sans Flex"/>
+              </a:rPr>
+              <a:t>gold-set benchmark and a memory-health replay, served in the app.</a:t>
             </a:r>
           </a:p>
           <a:p>
             <a:pPr>
               <a:spcAft>
-                <a:spcPts val="700"/>
+                <a:spcPts val="600"/>
               </a:spcAft>
             </a:pPr>
             <a:r>
-              <a:rPr sz="1100" b="1">
-                <a:solidFill>
-                  <a:srgbClr val="202124"/>
-                </a:solidFill>
-                <a:latin typeface="Google Sans Flex"/>
-              </a:rPr>
-              <a:t>Benchmark: </a:t>
-            </a:r>
-            <a:r>
-              <a:rPr sz="1100" b="0">
-                <a:solidFill>
-                  <a:srgbClr val="202124"/>
-                </a:solidFill>
-                <a:latin typeface="Google Sans Flex"/>
-              </a:rPr>
-              <a:t>planted problems vs found, on a labelled gold set.</a:t>
+              <a:rPr sz="1050" b="1">
+                <a:solidFill>
+                  <a:srgbClr val="1C1A17"/>
+                </a:solidFill>
+                <a:latin typeface="Google Sans Flex"/>
+              </a:rPr>
+              <a:t>Cost controls: </a:t>
+            </a:r>
+            <a:r>
+              <a:rPr sz="1050" b="0">
+                <a:solidFill>
+                  <a:srgbClr val="1C1A17"/>
+                </a:solidFill>
+                <a:latin typeface="Google Sans Flex"/>
+              </a:rPr>
+              <a:t>daily Gemini cap, Discord caps, scale to zero.</a:t>
             </a:r>
           </a:p>
         </p:txBody>
@@ -11340,7 +12035,7 @@
         <p:spPr>
           <a:xfrm>
             <a:off x="320040" y="1143000"/>
-            <a:ext cx="4572000" cy="274320"/>
+            <a:ext cx="5486400" cy="274320"/>
           </a:xfrm>
           <a:prstGeom prst="rect">
             <a:avLst/>
@@ -11361,11 +12056,11 @@
             <a:r>
               <a:rPr sz="1100" b="1">
                 <a:solidFill>
-                  <a:srgbClr val="202124"/>
-                </a:solidFill>
-                <a:latin typeface="Google Sans Flex"/>
-              </a:rPr>
-              <a:t>A. A new source arrives (web paste, Slack, PR, agent)</a:t>
+                  <a:srgbClr val="1C1A17"/>
+                </a:solidFill>
+                <a:latin typeface="Google Sans Flex"/>
+              </a:rPr>
+              <a:t>A. A new source arrives (web paste, Discord, PR, agent, PDF)</a:t>
             </a:r>
           </a:p>
         </p:txBody>
@@ -11385,11 +12080,11 @@
             <a:avLst/>
           </a:prstGeom>
           <a:solidFill>
-            <a:srgbClr val="F1F3F4"/>
+            <a:srgbClr val="F6F1E7"/>
           </a:solidFill>
           <a:ln>
             <a:solidFill>
-              <a:srgbClr val="DADCE0"/>
+              <a:srgbClr val="D8CFBE"/>
             </a:solidFill>
           </a:ln>
           <a:effectLst/>
@@ -11416,7 +12111,7 @@
             <a:r>
               <a:rPr sz="1000" b="0">
                 <a:solidFill>
-                  <a:srgbClr val="202124"/>
+                  <a:srgbClr val="1C1A17"/>
                 </a:solidFill>
                 <a:latin typeface="Google Sans Flex"/>
               </a:rPr>
@@ -11428,11 +12123,11 @@
             <a:r>
               <a:rPr sz="800" b="0">
                 <a:solidFill>
-                  <a:srgbClr val="5F6368"/>
-                </a:solidFill>
-                <a:latin typeface="Google Sans Flex"/>
-              </a:rPr>
-              <a:t>text or image</a:t>
+                  <a:srgbClr val="5F5A52"/>
+                </a:solidFill>
+                <a:latin typeface="Google Sans Flex"/>
+              </a:rPr>
+              <a:t>text, PDF or image</a:t>
             </a:r>
           </a:p>
         </p:txBody>
@@ -11452,11 +12147,11 @@
             <a:avLst/>
           </a:prstGeom>
           <a:solidFill>
-            <a:srgbClr val="F1F3F4"/>
+            <a:srgbClr val="F6F1E7"/>
           </a:solidFill>
           <a:ln>
             <a:solidFill>
-              <a:srgbClr val="DADCE0"/>
+              <a:srgbClr val="D8CFBE"/>
             </a:solidFill>
           </a:ln>
           <a:effectLst/>
@@ -11483,7 +12178,7 @@
             <a:r>
               <a:rPr sz="1000" b="0">
                 <a:solidFill>
-                  <a:srgbClr val="202124"/>
+                  <a:srgbClr val="1C1A17"/>
                 </a:solidFill>
                 <a:latin typeface="Google Sans Flex"/>
               </a:rPr>
@@ -11495,7 +12190,7 @@
             <a:r>
               <a:rPr sz="800" b="0">
                 <a:solidFill>
-                  <a:srgbClr val="5F6368"/>
+                  <a:srgbClr val="5F5A52"/>
                 </a:solidFill>
                 <a:latin typeface="Google Sans Flex"/>
               </a:rPr>
@@ -11519,11 +12214,11 @@
             <a:avLst/>
           </a:prstGeom>
           <a:solidFill>
-            <a:srgbClr val="F1F3F4"/>
+            <a:srgbClr val="F6F1E7"/>
           </a:solidFill>
           <a:ln>
             <a:solidFill>
-              <a:srgbClr val="DADCE0"/>
+              <a:srgbClr val="D8CFBE"/>
             </a:solidFill>
           </a:ln>
           <a:effectLst/>
@@ -11550,7 +12245,7 @@
             <a:r>
               <a:rPr sz="1000" b="0">
                 <a:solidFill>
-                  <a:srgbClr val="202124"/>
+                  <a:srgbClr val="1C1A17"/>
                 </a:solidFill>
                 <a:latin typeface="Google Sans Flex"/>
               </a:rPr>
@@ -11562,7 +12257,7 @@
             <a:r>
               <a:rPr sz="800" b="0">
                 <a:solidFill>
-                  <a:srgbClr val="5F6368"/>
+                  <a:srgbClr val="5F5A52"/>
                 </a:solidFill>
                 <a:latin typeface="Google Sans Flex"/>
               </a:rPr>
@@ -11586,11 +12281,11 @@
             <a:avLst/>
           </a:prstGeom>
           <a:solidFill>
-            <a:srgbClr val="F1F3F4"/>
+            <a:srgbClr val="F6F1E7"/>
           </a:solidFill>
           <a:ln>
             <a:solidFill>
-              <a:srgbClr val="DADCE0"/>
+              <a:srgbClr val="D8CFBE"/>
             </a:solidFill>
           </a:ln>
           <a:effectLst/>
@@ -11617,7 +12312,7 @@
             <a:r>
               <a:rPr sz="1000" b="0">
                 <a:solidFill>
-                  <a:srgbClr val="202124"/>
+                  <a:srgbClr val="1C1A17"/>
                 </a:solidFill>
                 <a:latin typeface="Google Sans Flex"/>
               </a:rPr>
@@ -11629,7 +12324,7 @@
             <a:r>
               <a:rPr sz="800" b="0">
                 <a:solidFill>
-                  <a:srgbClr val="5F6368"/>
+                  <a:srgbClr val="5F5A52"/>
                 </a:solidFill>
                 <a:latin typeface="Google Sans Flex"/>
               </a:rPr>
@@ -11653,11 +12348,11 @@
             <a:avLst/>
           </a:prstGeom>
           <a:solidFill>
-            <a:srgbClr val="F1F3F4"/>
+            <a:srgbClr val="F6F1E7"/>
           </a:solidFill>
           <a:ln>
             <a:solidFill>
-              <a:srgbClr val="DADCE0"/>
+              <a:srgbClr val="D8CFBE"/>
             </a:solidFill>
           </a:ln>
           <a:effectLst/>
@@ -11684,11 +12379,11 @@
             <a:r>
               <a:rPr sz="1000" b="0">
                 <a:solidFill>
-                  <a:srgbClr val="202124"/>
-                </a:solidFill>
-                <a:latin typeface="Google Sans Flex"/>
-              </a:rPr>
-              <a:t>Reconcile</a:t>
+                  <a:srgbClr val="1C1A17"/>
+                </a:solidFill>
+                <a:latin typeface="Google Sans Flex"/>
+              </a:rPr>
+              <a:t>Authority + reconcile</a:t>
             </a:r>
           </a:p>
           <a:p>
@@ -11696,7 +12391,7 @@
             <a:r>
               <a:rPr sz="800" b="0">
                 <a:solidFill>
-                  <a:srgbClr val="5F6368"/>
+                  <a:srgbClr val="5F5A52"/>
                 </a:solidFill>
                 <a:latin typeface="Google Sans Flex"/>
               </a:rPr>
@@ -11720,11 +12415,11 @@
             <a:avLst/>
           </a:prstGeom>
           <a:solidFill>
-            <a:srgbClr val="F1F3F4"/>
+            <a:srgbClr val="F6F1E7"/>
           </a:solidFill>
           <a:ln>
             <a:solidFill>
-              <a:srgbClr val="DADCE0"/>
+              <a:srgbClr val="D8CFBE"/>
             </a:solidFill>
           </a:ln>
           <a:effectLst/>
@@ -11751,7 +12446,7 @@
             <a:r>
               <a:rPr sz="1000" b="0">
                 <a:solidFill>
-                  <a:srgbClr val="202124"/>
+                  <a:srgbClr val="1C1A17"/>
                 </a:solidFill>
                 <a:latin typeface="Google Sans Flex"/>
               </a:rPr>
@@ -11763,11 +12458,11 @@
             <a:r>
               <a:rPr sz="800" b="0">
                 <a:solidFill>
-                  <a:srgbClr val="5F6368"/>
-                </a:solidFill>
-                <a:latin typeface="Google Sans Flex"/>
-              </a:rPr>
-              <a:t>stale docs, premises</a:t>
+                  <a:srgbClr val="5F5A52"/>
+                </a:solidFill>
+                <a:latin typeface="Google Sans Flex"/>
+              </a:rPr>
+              <a:t>old docs, premises</a:t>
             </a:r>
           </a:p>
         </p:txBody>
@@ -11788,7 +12483,7 @@
           </a:prstGeom>
           <a:ln w="15875">
             <a:solidFill>
-              <a:srgbClr val="5F6368"/>
+              <a:srgbClr val="5F5A52"/>
             </a:solidFill>
             <a:tailEnd type="triangle" w="med" len="med"/>
           </a:ln>
@@ -11824,7 +12519,7 @@
           </a:prstGeom>
           <a:ln w="15875">
             <a:solidFill>
-              <a:srgbClr val="5F6368"/>
+              <a:srgbClr val="5F5A52"/>
             </a:solidFill>
             <a:tailEnd type="triangle" w="med" len="med"/>
           </a:ln>
@@ -11860,7 +12555,7 @@
           </a:prstGeom>
           <a:ln w="15875">
             <a:solidFill>
-              <a:srgbClr val="5F6368"/>
+              <a:srgbClr val="5F5A52"/>
             </a:solidFill>
             <a:tailEnd type="triangle" w="med" len="med"/>
           </a:ln>
@@ -11896,7 +12591,7 @@
           </a:prstGeom>
           <a:ln w="15875">
             <a:solidFill>
-              <a:srgbClr val="5F6368"/>
+              <a:srgbClr val="5F5A52"/>
             </a:solidFill>
             <a:tailEnd type="triangle" w="med" len="med"/>
           </a:ln>
@@ -11932,7 +12627,7 @@
           </a:prstGeom>
           <a:ln w="15875">
             <a:solidFill>
-              <a:srgbClr val="5F6368"/>
+              <a:srgbClr val="5F5A52"/>
             </a:solidFill>
             <a:tailEnd type="triangle" w="med" len="med"/>
           </a:ln>
@@ -11967,11 +12662,11 @@
             <a:avLst/>
           </a:prstGeom>
           <a:solidFill>
-            <a:srgbClr val="E8F0FE"/>
+            <a:srgbClr val="FBF4F1"/>
           </a:solidFill>
           <a:ln>
             <a:solidFill>
-              <a:srgbClr val="DADCE0"/>
+              <a:srgbClr val="D8CFBE"/>
             </a:solidFill>
           </a:ln>
           <a:effectLst/>
@@ -11998,11 +12693,11 @@
             <a:r>
               <a:rPr sz="1100" b="1">
                 <a:solidFill>
-                  <a:srgbClr val="202124"/>
-                </a:solidFill>
-                <a:latin typeface="Google Sans Flex"/>
-              </a:rPr>
-              <a:t>Firestore record: decisions, alerts, activity</a:t>
+                  <a:srgbClr val="1C1A17"/>
+                </a:solidFill>
+                <a:latin typeface="Google Sans Flex"/>
+              </a:rPr>
+              <a:t>Firestore record: decisions, alerts, activity, people</a:t>
             </a:r>
           </a:p>
           <a:p>
@@ -12010,7 +12705,7 @@
             <a:r>
               <a:rPr sz="900" b="0">
                 <a:solidFill>
-                  <a:srgbClr val="5F6368"/>
+                  <a:srgbClr val="5F5A52"/>
                 </a:solidFill>
                 <a:latin typeface="Google Sans Flex"/>
               </a:rPr>
@@ -12035,7 +12730,7 @@
           </a:prstGeom>
           <a:ln w="15875">
             <a:solidFill>
-              <a:srgbClr val="5F6368"/>
+              <a:srgbClr val="5F5A52"/>
             </a:solidFill>
             <a:tailEnd type="triangle" w="med" len="med"/>
           </a:ln>
@@ -12085,7 +12780,7 @@
             <a:r>
               <a:rPr sz="1100" b="1">
                 <a:solidFill>
-                  <a:srgbClr val="202124"/>
+                  <a:srgbClr val="1C1A17"/>
                 </a:solidFill>
                 <a:latin typeface="Google Sans Flex"/>
               </a:rPr>
@@ -12109,11 +12804,11 @@
             <a:avLst/>
           </a:prstGeom>
           <a:solidFill>
-            <a:srgbClr val="F1F3F4"/>
+            <a:srgbClr val="F6F1E7"/>
           </a:solidFill>
           <a:ln>
             <a:solidFill>
-              <a:srgbClr val="DADCE0"/>
+              <a:srgbClr val="D8CFBE"/>
             </a:solidFill>
           </a:ln>
           <a:effectLst/>
@@ -12140,7 +12835,7 @@
             <a:r>
               <a:rPr sz="1000" b="0">
                 <a:solidFill>
-                  <a:srgbClr val="202124"/>
+                  <a:srgbClr val="1C1A17"/>
                 </a:solidFill>
                 <a:latin typeface="Google Sans Flex"/>
               </a:rPr>
@@ -12152,7 +12847,7 @@
             <a:r>
               <a:rPr sz="800" b="0">
                 <a:solidFill>
-                  <a:srgbClr val="5F6368"/>
+                  <a:srgbClr val="5F5A52"/>
                 </a:solidFill>
                 <a:latin typeface="Google Sans Flex"/>
               </a:rPr>
@@ -12176,11 +12871,11 @@
             <a:avLst/>
           </a:prstGeom>
           <a:solidFill>
-            <a:srgbClr val="F1F3F4"/>
+            <a:srgbClr val="F6F1E7"/>
           </a:solidFill>
           <a:ln>
             <a:solidFill>
-              <a:srgbClr val="DADCE0"/>
+              <a:srgbClr val="D8CFBE"/>
             </a:solidFill>
           </a:ln>
           <a:effectLst/>
@@ -12207,7 +12902,7 @@
             <a:r>
               <a:rPr sz="1000" b="0">
                 <a:solidFill>
-                  <a:srgbClr val="202124"/>
+                  <a:srgbClr val="1C1A17"/>
                 </a:solidFill>
                 <a:latin typeface="Google Sans Flex"/>
               </a:rPr>
@@ -12219,7 +12914,7 @@
             <a:r>
               <a:rPr sz="800" b="0">
                 <a:solidFill>
-                  <a:srgbClr val="5F6368"/>
+                  <a:srgbClr val="5F5A52"/>
                 </a:solidFill>
                 <a:latin typeface="Google Sans Flex"/>
               </a:rPr>
@@ -12243,11 +12938,11 @@
             <a:avLst/>
           </a:prstGeom>
           <a:solidFill>
-            <a:srgbClr val="F1F3F4"/>
+            <a:srgbClr val="F6F1E7"/>
           </a:solidFill>
           <a:ln>
             <a:solidFill>
-              <a:srgbClr val="DADCE0"/>
+              <a:srgbClr val="D8CFBE"/>
             </a:solidFill>
           </a:ln>
           <a:effectLst/>
@@ -12274,7 +12969,7 @@
             <a:r>
               <a:rPr sz="1000" b="0">
                 <a:solidFill>
-                  <a:srgbClr val="202124"/>
+                  <a:srgbClr val="1C1A17"/>
                 </a:solidFill>
                 <a:latin typeface="Google Sans Flex"/>
               </a:rPr>
@@ -12286,7 +12981,7 @@
             <a:r>
               <a:rPr sz="800" b="0">
                 <a:solidFill>
-                  <a:srgbClr val="5F6368"/>
+                  <a:srgbClr val="5F5A52"/>
                 </a:solidFill>
                 <a:latin typeface="Google Sans Flex"/>
               </a:rPr>
@@ -12310,11 +13005,11 @@
             <a:avLst/>
           </a:prstGeom>
           <a:solidFill>
-            <a:srgbClr val="F1F3F4"/>
+            <a:srgbClr val="F6F1E7"/>
           </a:solidFill>
           <a:ln>
             <a:solidFill>
-              <a:srgbClr val="DADCE0"/>
+              <a:srgbClr val="D8CFBE"/>
             </a:solidFill>
           </a:ln>
           <a:effectLst/>
@@ -12341,7 +13036,7 @@
             <a:r>
               <a:rPr sz="1000" b="0">
                 <a:solidFill>
-                  <a:srgbClr val="202124"/>
+                  <a:srgbClr val="1C1A17"/>
                 </a:solidFill>
                 <a:latin typeface="Google Sans Flex"/>
               </a:rPr>
@@ -12353,7 +13048,7 @@
             <a:r>
               <a:rPr sz="800" b="0">
                 <a:solidFill>
-                  <a:srgbClr val="5F6368"/>
+                  <a:srgbClr val="5F5A52"/>
                 </a:solidFill>
                 <a:latin typeface="Google Sans Flex"/>
               </a:rPr>
@@ -12377,11 +13072,11 @@
             <a:avLst/>
           </a:prstGeom>
           <a:solidFill>
-            <a:srgbClr val="F1F3F4"/>
+            <a:srgbClr val="F6F1E7"/>
           </a:solidFill>
           <a:ln>
             <a:solidFill>
-              <a:srgbClr val="DADCE0"/>
+              <a:srgbClr val="D8CFBE"/>
             </a:solidFill>
           </a:ln>
           <a:effectLst/>
@@ -12408,7 +13103,7 @@
             <a:r>
               <a:rPr sz="1000" b="0">
                 <a:solidFill>
-                  <a:srgbClr val="202124"/>
+                  <a:srgbClr val="1C1A17"/>
                 </a:solidFill>
                 <a:latin typeface="Google Sans Flex"/>
               </a:rPr>
@@ -12420,7 +13115,7 @@
             <a:r>
               <a:rPr sz="800" b="0">
                 <a:solidFill>
-                  <a:srgbClr val="5F6368"/>
+                  <a:srgbClr val="5F5A52"/>
                 </a:solidFill>
                 <a:latin typeface="Google Sans Flex"/>
               </a:rPr>
@@ -12444,11 +13139,11 @@
             <a:avLst/>
           </a:prstGeom>
           <a:solidFill>
-            <a:srgbClr val="F1F3F4"/>
+            <a:srgbClr val="F6F1E7"/>
           </a:solidFill>
           <a:ln>
             <a:solidFill>
-              <a:srgbClr val="DADCE0"/>
+              <a:srgbClr val="D8CFBE"/>
             </a:solidFill>
           </a:ln>
           <a:effectLst/>
@@ -12475,11 +13170,11 @@
             <a:r>
               <a:rPr sz="1000" b="0">
                 <a:solidFill>
-                  <a:srgbClr val="202124"/>
-                </a:solidFill>
-                <a:latin typeface="Google Sans Flex"/>
-              </a:rPr>
-              <a:t>Activity feed</a:t>
+                  <a:srgbClr val="1C1A17"/>
+                </a:solidFill>
+                <a:latin typeface="Google Sans Flex"/>
+              </a:rPr>
+              <a:t>Recorded</a:t>
             </a:r>
           </a:p>
           <a:p>
@@ -12487,11 +13182,11 @@
             <a:r>
               <a:rPr sz="800" b="0">
                 <a:solidFill>
-                  <a:srgbClr val="5F6368"/>
-                </a:solidFill>
-                <a:latin typeface="Google Sans Flex"/>
-              </a:rPr>
-              <a:t>web, MCP, A2A</a:t>
+                  <a:srgbClr val="5F5A52"/>
+                </a:solidFill>
+                <a:latin typeface="Google Sans Flex"/>
+              </a:rPr>
+              <a:t>web, MCP, A2A, Discord</a:t>
             </a:r>
           </a:p>
         </p:txBody>
@@ -12512,7 +13207,7 @@
           </a:prstGeom>
           <a:ln w="15875">
             <a:solidFill>
-              <a:srgbClr val="5F6368"/>
+              <a:srgbClr val="5F5A52"/>
             </a:solidFill>
             <a:tailEnd type="triangle" w="med" len="med"/>
           </a:ln>
@@ -12548,7 +13243,7 @@
           </a:prstGeom>
           <a:ln w="15875">
             <a:solidFill>
-              <a:srgbClr val="5F6368"/>
+              <a:srgbClr val="5F5A52"/>
             </a:solidFill>
             <a:tailEnd type="triangle" w="med" len="med"/>
           </a:ln>
@@ -12584,7 +13279,7 @@
           </a:prstGeom>
           <a:ln w="15875">
             <a:solidFill>
-              <a:srgbClr val="5F6368"/>
+              <a:srgbClr val="5F5A52"/>
             </a:solidFill>
             <a:tailEnd type="triangle" w="med" len="med"/>
           </a:ln>
@@ -12620,7 +13315,7 @@
           </a:prstGeom>
           <a:ln w="15875">
             <a:solidFill>
-              <a:srgbClr val="5F6368"/>
+              <a:srgbClr val="5F5A52"/>
             </a:solidFill>
             <a:tailEnd type="triangle" w="med" len="med"/>
           </a:ln>
@@ -12656,7 +13351,7 @@
           </a:prstGeom>
           <a:ln w="15875">
             <a:solidFill>
-              <a:srgbClr val="5F6368"/>
+              <a:srgbClr val="5F5A52"/>
             </a:solidFill>
             <a:tailEnd type="triangle" w="med" len="med"/>
           </a:ln>
@@ -12692,7 +13387,7 @@
           </a:prstGeom>
           <a:ln w="15875">
             <a:solidFill>
-              <a:srgbClr val="5F6368"/>
+              <a:srgbClr val="5F5A52"/>
             </a:solidFill>
             <a:tailEnd type="triangle" w="med" len="med"/>
           </a:ln>
@@ -12911,7 +13606,7 @@
           </a:prstGeom>
           <a:ln w="9525">
             <a:solidFill>
-              <a:srgbClr val="DADCE0"/>
+              <a:srgbClr val="D8CFBE"/>
             </a:solidFill>
           </a:ln>
         </p:spPr>
@@ -12946,18 +13641,18 @@
             <a:r>
               <a:rPr sz="900" b="0">
                 <a:solidFill>
-                  <a:srgbClr val="5F6368"/>
-                </a:solidFill>
-                <a:latin typeface="Google Sans Flex"/>
-              </a:rPr>
-              <a:t>Home: briefing, alerts, agent feed</a:t>
+                  <a:srgbClr val="5F5A52"/>
+                </a:solidFill>
+                <a:latin typeface="Google Sans Flex"/>
+              </a:rPr>
+              <a:t>Home: stories and live counts</a:t>
             </a:r>
           </a:p>
         </p:txBody>
       </p:sp>
       <p:pic>
         <p:nvPicPr>
-          <p:cNvPr id="106" name="Picture 105" descr="ingest.jpg"/>
+          <p:cNvPr id="106" name="Picture 105" descr="new-hire.jpg"/>
           <p:cNvPicPr>
             <a:picLocks noChangeAspect="1"/>
           </p:cNvPicPr>
@@ -12979,7 +13674,7 @@
           </a:prstGeom>
           <a:ln w="9525">
             <a:solidFill>
-              <a:srgbClr val="DADCE0"/>
+              <a:srgbClr val="D8CFBE"/>
             </a:solidFill>
           </a:ln>
         </p:spPr>
@@ -13014,18 +13709,18 @@
             <a:r>
               <a:rPr sz="900" b="0">
                 <a:solidFill>
-                  <a:srgbClr val="5F6368"/>
-                </a:solidFill>
-                <a:latin typeface="Google Sans Flex"/>
-              </a:rPr>
-              <a:t>Ingest: paste and reconcile</a:t>
+                  <a:srgbClr val="5F5A52"/>
+                </a:solidFill>
+                <a:latin typeface="Google Sans Flex"/>
+              </a:rPr>
+              <a:t>I am new here</a:t>
             </a:r>
           </a:p>
         </p:txBody>
       </p:sp>
       <p:pic>
         <p:nvPicPr>
-          <p:cNvPr id="108" name="Picture 107" descr="agents.jpg"/>
+          <p:cNvPr id="108" name="Picture 107" descr="agent.jpg"/>
           <p:cNvPicPr>
             <a:picLocks noChangeAspect="1"/>
           </p:cNvPicPr>
@@ -13047,7 +13742,7 @@
           </a:prstGeom>
           <a:ln w="9525">
             <a:solidFill>
-              <a:srgbClr val="DADCE0"/>
+              <a:srgbClr val="D8CFBE"/>
             </a:solidFill>
           </a:ln>
         </p:spPr>
@@ -13082,11 +13777,11 @@
             <a:r>
               <a:rPr sz="900" b="0">
                 <a:solidFill>
-                  <a:srgbClr val="5F6368"/>
-                </a:solidFill>
-                <a:latin typeface="Google Sans Flex"/>
-              </a:rPr>
-              <a:t>Agents: MCP playground</a:t>
+                  <a:srgbClr val="5F5A52"/>
+                </a:solidFill>
+                <a:latin typeface="Google Sans Flex"/>
+              </a:rPr>
+              <a:t>For agents: the block</a:t>
             </a:r>
           </a:p>
         </p:txBody>
@@ -13281,11 +13976,11 @@
             <a:avLst/>
           </a:prstGeom>
           <a:solidFill>
-            <a:srgbClr val="F1F3F4"/>
+            <a:srgbClr val="F6F1E7"/>
           </a:solidFill>
           <a:ln>
             <a:solidFill>
-              <a:srgbClr val="DADCE0"/>
+              <a:srgbClr val="D8CFBE"/>
             </a:solidFill>
           </a:ln>
           <a:effectLst/>
@@ -13312,7 +14007,7 @@
             <a:r>
               <a:rPr sz="1000" b="0">
                 <a:solidFill>
-                  <a:srgbClr val="202124"/>
+                  <a:srgbClr val="1C1A17"/>
                 </a:solidFill>
                 <a:latin typeface="Google Sans Flex"/>
               </a:rPr>
@@ -13324,7 +14019,7 @@
             <a:r>
               <a:rPr sz="800" b="0">
                 <a:solidFill>
-                  <a:srgbClr val="5F6368"/>
+                  <a:srgbClr val="5F5A52"/>
                 </a:solidFill>
                 <a:latin typeface="Google Sans Flex"/>
               </a:rPr>
@@ -13348,11 +14043,11 @@
             <a:avLst/>
           </a:prstGeom>
           <a:solidFill>
-            <a:srgbClr val="F1F3F4"/>
+            <a:srgbClr val="F6F1E7"/>
           </a:solidFill>
           <a:ln>
             <a:solidFill>
-              <a:srgbClr val="DADCE0"/>
+              <a:srgbClr val="D8CFBE"/>
             </a:solidFill>
           </a:ln>
           <a:effectLst/>
@@ -13379,7 +14074,7 @@
             <a:r>
               <a:rPr sz="1000" b="0">
                 <a:solidFill>
-                  <a:srgbClr val="202124"/>
+                  <a:srgbClr val="1C1A17"/>
                 </a:solidFill>
                 <a:latin typeface="Google Sans Flex"/>
               </a:rPr>
@@ -13391,7 +14086,7 @@
             <a:r>
               <a:rPr sz="800" b="0">
                 <a:solidFill>
-                  <a:srgbClr val="5F6368"/>
+                  <a:srgbClr val="5F5A52"/>
                 </a:solidFill>
                 <a:latin typeface="Google Sans Flex"/>
               </a:rPr>
@@ -13415,11 +14110,11 @@
             <a:avLst/>
           </a:prstGeom>
           <a:solidFill>
-            <a:srgbClr val="F1F3F4"/>
+            <a:srgbClr val="F6F1E7"/>
           </a:solidFill>
           <a:ln>
             <a:solidFill>
-              <a:srgbClr val="DADCE0"/>
+              <a:srgbClr val="D8CFBE"/>
             </a:solidFill>
           </a:ln>
           <a:effectLst/>
@@ -13446,7 +14141,7 @@
             <a:r>
               <a:rPr sz="1000" b="0">
                 <a:solidFill>
-                  <a:srgbClr val="202124"/>
+                  <a:srgbClr val="1C1A17"/>
                 </a:solidFill>
                 <a:latin typeface="Google Sans Flex"/>
               </a:rPr>
@@ -13458,7 +14153,7 @@
             <a:r>
               <a:rPr sz="800" b="0">
                 <a:solidFill>
-                  <a:srgbClr val="5F6368"/>
+                  <a:srgbClr val="5F5A52"/>
                 </a:solidFill>
                 <a:latin typeface="Google Sans Flex"/>
               </a:rPr>
@@ -13482,11 +14177,11 @@
             <a:avLst/>
           </a:prstGeom>
           <a:solidFill>
-            <a:srgbClr val="F1F3F4"/>
+            <a:srgbClr val="F6F1E7"/>
           </a:solidFill>
           <a:ln>
             <a:solidFill>
-              <a:srgbClr val="DADCE0"/>
+              <a:srgbClr val="D8CFBE"/>
             </a:solidFill>
           </a:ln>
           <a:effectLst/>
@@ -13513,11 +14208,11 @@
             <a:r>
               <a:rPr sz="1000" b="0">
                 <a:solidFill>
-                  <a:srgbClr val="202124"/>
-                </a:solidFill>
-                <a:latin typeface="Google Sans Flex"/>
-              </a:rPr>
-              <a:t>GitHub, Discord</a:t>
+                  <a:srgbClr val="1C1A17"/>
+                </a:solidFill>
+                <a:latin typeface="Google Sans Flex"/>
+              </a:rPr>
+              <a:t>Discord server</a:t>
             </a:r>
           </a:p>
           <a:p>
@@ -13525,11 +14220,11 @@
             <a:r>
               <a:rPr sz="800" b="0">
                 <a:solidFill>
-                  <a:srgbClr val="5F6368"/>
-                </a:solidFill>
-                <a:latin typeface="Google Sans Flex"/>
-              </a:rPr>
-              <a:t>webhooks</a:t>
+                  <a:srgbClr val="5F5A52"/>
+                </a:solidFill>
+                <a:latin typeface="Google Sans Flex"/>
+              </a:rPr>
+              <a:t>Cloud Scheduler, 1 min</a:t>
             </a:r>
           </a:p>
         </p:txBody>
@@ -13549,11 +14244,11 @@
             <a:avLst/>
           </a:prstGeom>
           <a:solidFill>
-            <a:srgbClr val="E8F0FE"/>
+            <a:srgbClr val="FBF4F1"/>
           </a:solidFill>
           <a:ln>
             <a:solidFill>
-              <a:srgbClr val="1A73E8"/>
+              <a:srgbClr val="C8361E"/>
             </a:solidFill>
           </a:ln>
           <a:effectLst/>
@@ -13610,11 +14305,11 @@
             <a:r>
               <a:rPr sz="1000" b="1">
                 <a:solidFill>
-                  <a:srgbClr val="1A73E8"/>
-                </a:solidFill>
-                <a:latin typeface="Google Sans Flex"/>
-              </a:rPr>
-              <a:t>Cloud Run service canon (asia-south1, min 0)</a:t>
+                  <a:srgbClr val="C8361E"/>
+                </a:solidFill>
+                <a:latin typeface="Google Sans Flex"/>
+              </a:rPr>
+              <a:t>Cloud Run: canon, asia-south1, min 0</a:t>
             </a:r>
           </a:p>
         </p:txBody>
@@ -13638,7 +14333,7 @@
           </a:solidFill>
           <a:ln>
             <a:solidFill>
-              <a:srgbClr val="DADCE0"/>
+              <a:srgbClr val="D8CFBE"/>
             </a:solidFill>
           </a:ln>
           <a:effectLst/>
@@ -13665,7 +14360,7 @@
             <a:r>
               <a:rPr sz="1000" b="0">
                 <a:solidFill>
-                  <a:srgbClr val="202124"/>
+                  <a:srgbClr val="1C1A17"/>
                 </a:solidFill>
                 <a:latin typeface="Google Sans Flex"/>
               </a:rPr>
@@ -13693,7 +14388,7 @@
           </a:solidFill>
           <a:ln>
             <a:solidFill>
-              <a:srgbClr val="DADCE0"/>
+              <a:srgbClr val="D8CFBE"/>
             </a:solidFill>
           </a:ln>
           <a:effectLst/>
@@ -13720,7 +14415,7 @@
             <a:r>
               <a:rPr sz="1000" b="0">
                 <a:solidFill>
-                  <a:srgbClr val="202124"/>
+                  <a:srgbClr val="1C1A17"/>
                 </a:solidFill>
                 <a:latin typeface="Google Sans Flex"/>
               </a:rPr>
@@ -13748,7 +14443,7 @@
           </a:solidFill>
           <a:ln>
             <a:solidFill>
-              <a:srgbClr val="DADCE0"/>
+              <a:srgbClr val="D8CFBE"/>
             </a:solidFill>
           </a:ln>
           <a:effectLst/>
@@ -13775,7 +14470,7 @@
             <a:r>
               <a:rPr sz="1000" b="0">
                 <a:solidFill>
-                  <a:srgbClr val="202124"/>
+                  <a:srgbClr val="1C1A17"/>
                 </a:solidFill>
                 <a:latin typeface="Google Sans Flex"/>
               </a:rPr>
@@ -13803,7 +14498,7 @@
           </a:solidFill>
           <a:ln>
             <a:solidFill>
-              <a:srgbClr val="DADCE0"/>
+              <a:srgbClr val="D8CFBE"/>
             </a:solidFill>
           </a:ln>
           <a:effectLst/>
@@ -13830,11 +14525,11 @@
             <a:r>
               <a:rPr sz="1000" b="0">
                 <a:solidFill>
-                  <a:srgbClr val="202124"/>
-                </a:solidFill>
-                <a:latin typeface="Google Sans Flex"/>
-              </a:rPr>
-              <a:t>Hooks</a:t>
+                  <a:srgbClr val="1C1A17"/>
+                </a:solidFill>
+                <a:latin typeface="Google Sans Flex"/>
+              </a:rPr>
+              <a:t>Discord sync</a:t>
             </a:r>
           </a:p>
         </p:txBody>
@@ -13858,7 +14553,7 @@
           </a:solidFill>
           <a:ln>
             <a:solidFill>
-              <a:srgbClr val="DADCE0"/>
+              <a:srgbClr val="D8CFBE"/>
             </a:solidFill>
           </a:ln>
           <a:effectLst/>
@@ -13885,7 +14580,7 @@
             <a:r>
               <a:rPr sz="1100" b="1">
                 <a:solidFill>
-                  <a:srgbClr val="202124"/>
+                  <a:srgbClr val="1C1A17"/>
                 </a:solidFill>
                 <a:latin typeface="Google Sans Flex"/>
               </a:rPr>
@@ -13897,11 +14592,11 @@
             <a:r>
               <a:rPr sz="900" b="0">
                 <a:solidFill>
-                  <a:srgbClr val="5F6368"/>
-                </a:solidFill>
-                <a:latin typeface="Google Sans Flex"/>
-              </a:rPr>
-              <a:t>ingest, reconcile</a:t>
+                  <a:srgbClr val="5F5A52"/>
+                </a:solidFill>
+                <a:latin typeface="Google Sans Flex"/>
+              </a:rPr>
+              <a:t>ingest, authority</a:t>
             </a:r>
           </a:p>
           <a:p>
@@ -13909,11 +14604,11 @@
             <a:r>
               <a:rPr sz="900" b="0">
                 <a:solidFill>
-                  <a:srgbClr val="5F6368"/>
-                </a:solidFill>
-                <a:latin typeface="Google Sans Flex"/>
-              </a:rPr>
-              <a:t>ask, briefing</a:t>
+                  <a:srgbClr val="5F5A52"/>
+                </a:solidFill>
+                <a:latin typeface="Google Sans Flex"/>
+              </a:rPr>
+              <a:t>reconcile, ask</a:t>
             </a:r>
           </a:p>
           <a:p>
@@ -13921,11 +14616,11 @@
             <a:r>
               <a:rPr sz="900" b="0">
                 <a:solidFill>
-                  <a:srgbClr val="5F6368"/>
-                </a:solidFill>
-                <a:latin typeface="Google Sans Flex"/>
-              </a:rPr>
-              <a:t>check, expert</a:t>
+                  <a:srgbClr val="5F5A52"/>
+                </a:solidFill>
+                <a:latin typeface="Google Sans Flex"/>
+              </a:rPr>
+              <a:t>briefing, check</a:t>
             </a:r>
           </a:p>
         </p:txBody>
@@ -13946,7 +14641,7 @@
           </a:prstGeom>
           <a:ln w="15875">
             <a:solidFill>
-              <a:srgbClr val="5F6368"/>
+              <a:srgbClr val="5F5A52"/>
             </a:solidFill>
             <a:tailEnd type="triangle" w="med" len="med"/>
           </a:ln>
@@ -13982,7 +14677,7 @@
           </a:prstGeom>
           <a:ln w="15875">
             <a:solidFill>
-              <a:srgbClr val="5F6368"/>
+              <a:srgbClr val="5F5A52"/>
             </a:solidFill>
             <a:tailEnd type="triangle" w="med" len="med"/>
           </a:ln>
@@ -14018,7 +14713,7 @@
           </a:prstGeom>
           <a:ln w="15875">
             <a:solidFill>
-              <a:srgbClr val="5F6368"/>
+              <a:srgbClr val="5F5A52"/>
             </a:solidFill>
             <a:tailEnd type="triangle" w="med" len="med"/>
           </a:ln>
@@ -14054,7 +14749,7 @@
           </a:prstGeom>
           <a:ln w="15875">
             <a:solidFill>
-              <a:srgbClr val="5F6368"/>
+              <a:srgbClr val="5F5A52"/>
             </a:solidFill>
             <a:tailEnd type="triangle" w="med" len="med"/>
           </a:ln>
@@ -14090,7 +14785,7 @@
           </a:prstGeom>
           <a:ln w="15875">
             <a:solidFill>
-              <a:srgbClr val="5F6368"/>
+              <a:srgbClr val="5F5A52"/>
             </a:solidFill>
             <a:tailEnd type="triangle" w="med" len="med"/>
           </a:ln>
@@ -14126,7 +14821,7 @@
           </a:prstGeom>
           <a:ln w="15875">
             <a:solidFill>
-              <a:srgbClr val="5F6368"/>
+              <a:srgbClr val="5F5A52"/>
             </a:solidFill>
             <a:tailEnd type="triangle" w="med" len="med"/>
           </a:ln>
@@ -14162,7 +14857,7 @@
           </a:prstGeom>
           <a:ln w="15875">
             <a:solidFill>
-              <a:srgbClr val="5F6368"/>
+              <a:srgbClr val="5F5A52"/>
             </a:solidFill>
             <a:tailEnd type="triangle" w="med" len="med"/>
           </a:ln>
@@ -14198,7 +14893,7 @@
           </a:prstGeom>
           <a:ln w="15875">
             <a:solidFill>
-              <a:srgbClr val="5F6368"/>
+              <a:srgbClr val="5F5A52"/>
             </a:solidFill>
             <a:tailEnd type="triangle" w="med" len="med"/>
           </a:ln>
@@ -14237,7 +14932,7 @@
           </a:solidFill>
           <a:ln>
             <a:solidFill>
-              <a:srgbClr val="DADCE0"/>
+              <a:srgbClr val="D8CFBE"/>
             </a:solidFill>
           </a:ln>
           <a:effectLst/>
@@ -14264,7 +14959,7 @@
             <a:r>
               <a:rPr sz="1000" b="0">
                 <a:solidFill>
-                  <a:srgbClr val="202124"/>
+                  <a:srgbClr val="1C1A17"/>
                 </a:solidFill>
                 <a:latin typeface="Google Sans Flex"/>
               </a:rPr>
@@ -14276,11 +14971,11 @@
             <a:r>
               <a:rPr sz="800" b="0">
                 <a:solidFill>
-                  <a:srgbClr val="5F6368"/>
-                </a:solidFill>
-                <a:latin typeface="Google Sans Flex"/>
-              </a:rPr>
-              <a:t>verified quotes, refusal threshold,</a:t>
+                  <a:srgbClr val="5F5A52"/>
+                </a:solidFill>
+                <a:latin typeface="Google Sans Flex"/>
+              </a:rPr>
+              <a:t>verified quotes, refusal threshold, source fencing,</a:t>
             </a:r>
           </a:p>
           <a:p>
@@ -14288,11 +14983,11 @@
             <a:r>
               <a:rPr sz="800" b="0">
                 <a:solidFill>
-                  <a:srgbClr val="5F6368"/>
-                </a:solidFill>
-                <a:latin typeface="Google Sans Flex"/>
-              </a:rPr>
-              <a:t>source fencing, input limits, timeouts</a:t>
+                  <a:srgbClr val="5F5A52"/>
+                </a:solidFill>
+                <a:latin typeface="Google Sans Flex"/>
+              </a:rPr>
+              <a:t>input limits, timeouts, daily Gemini cap</a:t>
             </a:r>
           </a:p>
         </p:txBody>
@@ -14312,11 +15007,11 @@
             <a:avLst/>
           </a:prstGeom>
           <a:solidFill>
-            <a:srgbClr val="F1F3F4"/>
+            <a:srgbClr val="F6F1E7"/>
           </a:solidFill>
           <a:ln>
             <a:solidFill>
-              <a:srgbClr val="DADCE0"/>
+              <a:srgbClr val="D8CFBE"/>
             </a:solidFill>
           </a:ln>
           <a:effectLst/>
@@ -14343,7 +15038,7 @@
             <a:r>
               <a:rPr sz="1100" b="0">
                 <a:solidFill>
-                  <a:srgbClr val="202124"/>
+                  <a:srgbClr val="1C1A17"/>
                 </a:solidFill>
                 <a:latin typeface="Google Sans Flex"/>
               </a:rPr>
@@ -14355,7 +15050,7 @@
             <a:r>
               <a:rPr sz="900" b="0">
                 <a:solidFill>
-                  <a:srgbClr val="5F6368"/>
+                  <a:srgbClr val="5F5A52"/>
                 </a:solidFill>
                 <a:latin typeface="Google Sans Flex"/>
               </a:rPr>
@@ -14367,11 +15062,11 @@
             <a:r>
               <a:rPr sz="900" b="0">
                 <a:solidFill>
-                  <a:srgbClr val="5F6368"/>
-                </a:solidFill>
-                <a:latin typeface="Google Sans Flex"/>
-              </a:rPr>
-              <a:t>structured output, label app=canon</a:t>
+                  <a:srgbClr val="5F5A52"/>
+                </a:solidFill>
+                <a:latin typeface="Google Sans Flex"/>
+              </a:rPr>
+              <a:t>structured output, PDFs, images</a:t>
             </a:r>
           </a:p>
         </p:txBody>
@@ -14391,11 +15086,11 @@
             <a:avLst/>
           </a:prstGeom>
           <a:solidFill>
-            <a:srgbClr val="F1F3F4"/>
+            <a:srgbClr val="F6F1E7"/>
           </a:solidFill>
           <a:ln>
             <a:solidFill>
-              <a:srgbClr val="DADCE0"/>
+              <a:srgbClr val="D8CFBE"/>
             </a:solidFill>
           </a:ln>
           <a:effectLst/>
@@ -14422,7 +15117,7 @@
             <a:r>
               <a:rPr sz="1100" b="0">
                 <a:solidFill>
-                  <a:srgbClr val="202124"/>
+                  <a:srgbClr val="1C1A17"/>
                 </a:solidFill>
                 <a:latin typeface="Google Sans Flex"/>
               </a:rPr>
@@ -14434,7 +15129,7 @@
             <a:r>
               <a:rPr sz="900" b="0">
                 <a:solidFill>
-                  <a:srgbClr val="5F6368"/>
+                  <a:srgbClr val="5F5A52"/>
                 </a:solidFill>
                 <a:latin typeface="Google Sans Flex"/>
               </a:rPr>
@@ -14458,11 +15153,11 @@
             <a:avLst/>
           </a:prstGeom>
           <a:solidFill>
-            <a:srgbClr val="F1F3F4"/>
+            <a:srgbClr val="F6F1E7"/>
           </a:solidFill>
           <a:ln>
             <a:solidFill>
-              <a:srgbClr val="DADCE0"/>
+              <a:srgbClr val="D8CFBE"/>
             </a:solidFill>
           </a:ln>
           <a:effectLst/>
@@ -14489,7 +15184,7 @@
             <a:r>
               <a:rPr sz="1100" b="0">
                 <a:solidFill>
-                  <a:srgbClr val="202124"/>
+                  <a:srgbClr val="1C1A17"/>
                 </a:solidFill>
                 <a:latin typeface="Google Sans Flex"/>
               </a:rPr>
@@ -14501,7 +15196,7 @@
             <a:r>
               <a:rPr sz="900" b="0">
                 <a:solidFill>
-                  <a:srgbClr val="5F6368"/>
+                  <a:srgbClr val="5F5A52"/>
                 </a:solidFill>
                 <a:latin typeface="Google Sans Flex"/>
               </a:rPr>
@@ -14513,7 +15208,7 @@
             <a:r>
               <a:rPr sz="900" b="0">
                 <a:solidFill>
-                  <a:srgbClr val="5F6368"/>
+                  <a:srgbClr val="5F5A52"/>
                 </a:solidFill>
                 <a:latin typeface="Google Sans Flex"/>
               </a:rPr>
@@ -14538,7 +15233,7 @@
           </a:prstGeom>
           <a:ln w="15875">
             <a:solidFill>
-              <a:srgbClr val="5F6368"/>
+              <a:srgbClr val="5F5A52"/>
             </a:solidFill>
             <a:tailEnd type="triangle" w="med" len="med"/>
           </a:ln>
@@ -14574,7 +15269,7 @@
           </a:prstGeom>
           <a:ln w="15875">
             <a:solidFill>
-              <a:srgbClr val="5F6368"/>
+              <a:srgbClr val="5F5A52"/>
             </a:solidFill>
             <a:tailEnd type="triangle" w="med" len="med"/>
           </a:ln>
@@ -14610,7 +15305,7 @@
           </a:prstGeom>
           <a:ln w="15875">
             <a:solidFill>
-              <a:srgbClr val="5F6368"/>
+              <a:srgbClr val="5F5A52"/>
             </a:solidFill>
             <a:tailEnd type="triangle" w="med" len="med"/>
           </a:ln>
@@ -14815,7 +15510,7 @@
         </p:nvGraphicFramePr>
         <p:xfrm>
           <a:off x="320040" y="1188720"/>
-          <a:ext cx="8503919" cy="3474720"/>
+          <a:ext cx="8503919" cy="3520440"/>
         </p:xfrm>
         <a:graphic>
           <a:graphicData uri="http://schemas.openxmlformats.org/drawingml/2006/table">
@@ -14827,14 +15522,14 @@
                 <a:gridCol w="2806293"/>
                 <a:gridCol w="5697626"/>
               </a:tblGrid>
-              <a:tr h="347472">
+              <a:tr h="320040">
                 <a:tc>
                   <a:txBody>
                     <a:bodyPr/>
                     <a:lstStyle/>
                     <a:p>
                       <a:r>
-                        <a:rPr sz="1000" b="1">
+                        <a:rPr sz="950" b="1">
                           <a:solidFill>
                             <a:srgbClr val="FFFFFF"/>
                           </a:solidFill>
@@ -14846,7 +15541,7 @@
                   </a:txBody>
                   <a:tcPr marT="27432" marB="27432" anchor="ctr">
                     <a:solidFill>
-                      <a:srgbClr val="202124"/>
+                      <a:srgbClr val="1C1A17"/>
                     </a:solidFill>
                   </a:tcPr>
                 </a:tc>
@@ -14856,7 +15551,7 @@
                     <a:lstStyle/>
                     <a:p>
                       <a:r>
-                        <a:rPr sz="1000" b="1">
+                        <a:rPr sz="950" b="1">
                           <a:solidFill>
                             <a:srgbClr val="FFFFFF"/>
                           </a:solidFill>
@@ -14868,21 +15563,21 @@
                   </a:txBody>
                   <a:tcPr marT="27432" marB="27432" anchor="ctr">
                     <a:solidFill>
-                      <a:srgbClr val="202124"/>
+                      <a:srgbClr val="1C1A17"/>
                     </a:solidFill>
                   </a:tcPr>
                 </a:tc>
               </a:tr>
-              <a:tr h="347472">
+              <a:tr h="320040">
                 <a:tc>
                   <a:txBody>
                     <a:bodyPr/>
                     <a:lstStyle/>
                     <a:p>
                       <a:r>
-                        <a:rPr sz="1000" b="0">
+                        <a:rPr sz="950" b="0">
                           <a:solidFill>
-                            <a:srgbClr val="202124"/>
+                            <a:srgbClr val="1C1A17"/>
                           </a:solidFill>
                           <a:latin typeface="Google Sans Flex"/>
                         </a:rPr>
@@ -14892,7 +15587,7 @@
                   </a:txBody>
                   <a:tcPr marT="27432" marB="27432" anchor="ctr">
                     <a:solidFill>
-                      <a:srgbClr val="F1F3F4"/>
+                      <a:srgbClr val="F6F1E7"/>
                     </a:solidFill>
                   </a:tcPr>
                 </a:tc>
@@ -14902,33 +15597,33 @@
                     <a:lstStyle/>
                     <a:p>
                       <a:r>
-                        <a:rPr sz="1000" b="0">
+                        <a:rPr sz="950" b="0">
                           <a:solidFill>
-                            <a:srgbClr val="202124"/>
+                            <a:srgbClr val="1C1A17"/>
                           </a:solidFill>
                           <a:latin typeface="Google Sans Flex"/>
                         </a:rPr>
-                        <a:t>Extraction, reconciliation, drift checks, answers, briefings, check_intent verdicts; structured output (response_schema)</a:t>
+                        <a:t>Extraction, reconciliation, drift checks, answers, briefings, verdicts; structured output; reads PDFs and images</a:t>
                       </a:r>
                     </a:p>
                   </a:txBody>
                   <a:tcPr marT="27432" marB="27432" anchor="ctr">
                     <a:solidFill>
-                      <a:srgbClr val="F1F3F4"/>
+                      <a:srgbClr val="F6F1E7"/>
                     </a:solidFill>
                   </a:tcPr>
                 </a:tc>
               </a:tr>
-              <a:tr h="347472">
+              <a:tr h="320040">
                 <a:tc>
                   <a:txBody>
                     <a:bodyPr/>
                     <a:lstStyle/>
                     <a:p>
                       <a:r>
-                        <a:rPr sz="1000" b="0">
+                        <a:rPr sz="950" b="0">
                           <a:solidFill>
-                            <a:srgbClr val="202124"/>
+                            <a:srgbClr val="1C1A17"/>
                           </a:solidFill>
                           <a:latin typeface="Google Sans Flex"/>
                         </a:rPr>
@@ -14948,9 +15643,9 @@
                     <a:lstStyle/>
                     <a:p>
                       <a:r>
-                        <a:rPr sz="1000" b="0">
+                        <a:rPr sz="950" b="0">
                           <a:solidFill>
-                            <a:srgbClr val="202124"/>
+                            <a:srgbClr val="1C1A17"/>
                           </a:solidFill>
                           <a:latin typeface="Google Sans Flex"/>
                         </a:rPr>
@@ -14965,16 +15660,16 @@
                   </a:tcPr>
                 </a:tc>
               </a:tr>
-              <a:tr h="347472">
+              <a:tr h="320040">
                 <a:tc>
                   <a:txBody>
                     <a:bodyPr/>
                     <a:lstStyle/>
                     <a:p>
                       <a:r>
-                        <a:rPr sz="1000" b="0">
+                        <a:rPr sz="950" b="0">
                           <a:solidFill>
-                            <a:srgbClr val="202124"/>
+                            <a:srgbClr val="1C1A17"/>
                           </a:solidFill>
                           <a:latin typeface="Google Sans Flex"/>
                         </a:rPr>
@@ -14984,7 +15679,7 @@
                   </a:txBody>
                   <a:tcPr marT="27432" marB="27432" anchor="ctr">
                     <a:solidFill>
-                      <a:srgbClr val="F1F3F4"/>
+                      <a:srgbClr val="F6F1E7"/>
                     </a:solidFill>
                   </a:tcPr>
                 </a:tc>
@@ -14994,9 +15689,9 @@
                     <a:lstStyle/>
                     <a:p>
                       <a:r>
-                        <a:rPr sz="1000" b="0">
+                        <a:rPr sz="950" b="0">
                           <a:solidFill>
-                            <a:srgbClr val="202124"/>
+                            <a:srgbClr val="1C1A17"/>
                           </a:solidFill>
                           <a:latin typeface="Google Sans Flex"/>
                         </a:rPr>
@@ -15006,21 +15701,21 @@
                   </a:txBody>
                   <a:tcPr marT="27432" marB="27432" anchor="ctr">
                     <a:solidFill>
-                      <a:srgbClr val="F1F3F4"/>
+                      <a:srgbClr val="F6F1E7"/>
                     </a:solidFill>
                   </a:tcPr>
                 </a:tc>
               </a:tr>
-              <a:tr h="347472">
+              <a:tr h="320040">
                 <a:tc>
                   <a:txBody>
                     <a:bodyPr/>
                     <a:lstStyle/>
                     <a:p>
                       <a:r>
-                        <a:rPr sz="1000" b="0">
+                        <a:rPr sz="950" b="0">
                           <a:solidFill>
-                            <a:srgbClr val="202124"/>
+                            <a:srgbClr val="1C1A17"/>
                           </a:solidFill>
                           <a:latin typeface="Google Sans Flex"/>
                         </a:rPr>
@@ -15040,13 +15735,13 @@
                     <a:lstStyle/>
                     <a:p>
                       <a:r>
-                        <a:rPr sz="1000" b="0">
+                        <a:rPr sz="950" b="0">
                           <a:solidFill>
-                            <a:srgbClr val="202124"/>
+                            <a:srgbClr val="1C1A17"/>
                           </a:solidFill>
                           <a:latin typeface="Google Sans Flex"/>
                         </a:rPr>
-                        <a:t>One scale-to-zero service: FastAPI API, MCP server, A2A agent, GitHub and Discord hooks</a:t>
+                        <a:t>One scale-to-zero service: API, MCP server, A2A agent, Discord sync and slash commands</a:t>
                       </a:r>
                     </a:p>
                   </a:txBody>
@@ -15057,16 +15752,16 @@
                   </a:tcPr>
                 </a:tc>
               </a:tr>
-              <a:tr h="347472">
+              <a:tr h="320040">
                 <a:tc>
                   <a:txBody>
                     <a:bodyPr/>
                     <a:lstStyle/>
                     <a:p>
                       <a:r>
-                        <a:rPr sz="1000" b="0">
+                        <a:rPr sz="950" b="0">
                           <a:solidFill>
-                            <a:srgbClr val="202124"/>
+                            <a:srgbClr val="1C1A17"/>
                           </a:solidFill>
                           <a:latin typeface="Google Sans Flex"/>
                         </a:rPr>
@@ -15076,7 +15771,7 @@
                   </a:txBody>
                   <a:tcPr marT="27432" marB="27432" anchor="ctr">
                     <a:solidFill>
-                      <a:srgbClr val="F1F3F4"/>
+                      <a:srgbClr val="F6F1E7"/>
                     </a:solidFill>
                   </a:tcPr>
                 </a:tc>
@@ -15086,37 +15781,37 @@
                     <a:lstStyle/>
                     <a:p>
                       <a:r>
-                        <a:rPr sz="1000" b="0">
+                        <a:rPr sz="950" b="0">
                           <a:solidFill>
-                            <a:srgbClr val="202124"/>
+                            <a:srgbClr val="1C1A17"/>
                           </a:solidFill>
                           <a:latin typeface="Google Sans Flex"/>
                         </a:rPr>
-                        <a:t>Static web app; rewrites /api, /mcp, /a2a to Cloud Run on one origin</a:t>
+                        <a:t>Static web app; rewrites /api, /mcp, /a2a, /hooks, /discord to Cloud Run on one origin</a:t>
                       </a:r>
                     </a:p>
                   </a:txBody>
                   <a:tcPr marT="27432" marB="27432" anchor="ctr">
                     <a:solidFill>
-                      <a:srgbClr val="F1F3F4"/>
+                      <a:srgbClr val="F6F1E7"/>
                     </a:solidFill>
                   </a:tcPr>
                 </a:tc>
               </a:tr>
-              <a:tr h="347472">
+              <a:tr h="320040">
                 <a:tc>
                   <a:txBody>
                     <a:bodyPr/>
                     <a:lstStyle/>
                     <a:p>
                       <a:r>
-                        <a:rPr sz="1000" b="0">
+                        <a:rPr sz="950" b="0">
                           <a:solidFill>
-                            <a:srgbClr val="202124"/>
+                            <a:srgbClr val="1C1A17"/>
                           </a:solidFill>
                           <a:latin typeface="Google Sans Flex"/>
                         </a:rPr>
-                        <a:t>Agent Development Kit (ADK) + A2A</a:t>
+                        <a:t>Cloud Scheduler</a:t>
                       </a:r>
                     </a:p>
                   </a:txBody>
@@ -15132,13 +15827,13 @@
                     <a:lstStyle/>
                     <a:p>
                       <a:r>
-                        <a:rPr sz="1000" b="0">
+                        <a:rPr sz="950" b="0">
                           <a:solidFill>
-                            <a:srgbClr val="202124"/>
+                            <a:srgbClr val="1C1A17"/>
                           </a:solidFill>
                           <a:latin typeface="Google Sans Flex"/>
                         </a:rPr>
-                        <a:t>Canon as an LlmAgent with four tools, discoverable by agent card</a:t>
+                        <a:t>Calls the Discord sync every minute, so no always-on gateway is needed</a:t>
                       </a:r>
                     </a:p>
                   </a:txBody>
@@ -15149,26 +15844,26 @@
                   </a:tcPr>
                 </a:tc>
               </a:tr>
-              <a:tr h="347472">
+              <a:tr h="320040">
                 <a:tc>
                   <a:txBody>
                     <a:bodyPr/>
                     <a:lstStyle/>
                     <a:p>
                       <a:r>
-                        <a:rPr sz="1000" b="0">
+                        <a:rPr sz="950" b="0">
                           <a:solidFill>
-                            <a:srgbClr val="202124"/>
+                            <a:srgbClr val="1C1A17"/>
                           </a:solidFill>
                           <a:latin typeface="Google Sans Flex"/>
                         </a:rPr>
-                        <a:t>Model Context Protocol (FastMCP)</a:t>
+                        <a:t>Secret Manager, Cloud Monitoring</a:t>
                       </a:r>
                     </a:p>
                   </a:txBody>
                   <a:tcPr marT="27432" marB="27432" anchor="ctr">
                     <a:solidFill>
-                      <a:srgbClr val="F1F3F4"/>
+                      <a:srgbClr val="F6F1E7"/>
                     </a:solidFill>
                   </a:tcPr>
                 </a:tc>
@@ -15178,37 +15873,37 @@
                     <a:lstStyle/>
                     <a:p>
                       <a:r>
-                        <a:rPr sz="1000" b="0">
+                        <a:rPr sz="950" b="0">
                           <a:solidFill>
-                            <a:srgbClr val="202124"/>
+                            <a:srgbClr val="1C1A17"/>
                           </a:solidFill>
                           <a:latin typeface="Google Sans Flex"/>
                         </a:rPr>
-                        <a:t>Six tools over streamable HTTP for Claude Code, Codex and other clients</a:t>
+                        <a:t>One secret for every Canon credential; alert policies relayed to Discord</a:t>
                       </a:r>
                     </a:p>
                   </a:txBody>
                   <a:tcPr marT="27432" marB="27432" anchor="ctr">
                     <a:solidFill>
-                      <a:srgbClr val="F1F3F4"/>
+                      <a:srgbClr val="F6F1E7"/>
                     </a:solidFill>
                   </a:tcPr>
                 </a:tc>
               </a:tr>
-              <a:tr h="347472">
+              <a:tr h="320040">
                 <a:tc>
                   <a:txBody>
                     <a:bodyPr/>
                     <a:lstStyle/>
                     <a:p>
                       <a:r>
-                        <a:rPr sz="1000" b="0">
+                        <a:rPr sz="950" b="0">
                           <a:solidFill>
-                            <a:srgbClr val="202124"/>
+                            <a:srgbClr val="1C1A17"/>
                           </a:solidFill>
                           <a:latin typeface="Google Sans Flex"/>
                         </a:rPr>
-                        <a:t>Python 3.12, FastAPI, uv, pytest</a:t>
+                        <a:t>ADK + A2A, MCP (FastMCP)</a:t>
                       </a:r>
                     </a:p>
                   </a:txBody>
@@ -15224,13 +15919,13 @@
                     <a:lstStyle/>
                     <a:p>
                       <a:r>
-                        <a:rPr sz="1000" b="0">
+                        <a:rPr sz="950" b="0">
                           <a:solidFill>
-                            <a:srgbClr val="202124"/>
+                            <a:srgbClr val="1C1A17"/>
                           </a:solidFill>
                           <a:latin typeface="Google Sans Flex"/>
                         </a:rPr>
-                        <a:t>Backend; tests replay recorded Gemini fixtures, no network</a:t>
+                        <a:t>Canon as an LlmAgent with four tools; six MCP tools over streamable HTTP</a:t>
                       </a:r>
                     </a:p>
                   </a:txBody>
@@ -15241,26 +15936,26 @@
                   </a:tcPr>
                 </a:tc>
               </a:tr>
-              <a:tr h="347472">
+              <a:tr h="320040">
                 <a:tc>
                   <a:txBody>
                     <a:bodyPr/>
                     <a:lstStyle/>
                     <a:p>
                       <a:r>
-                        <a:rPr sz="1000" b="0">
+                        <a:rPr sz="950" b="0">
                           <a:solidFill>
-                            <a:srgbClr val="202124"/>
+                            <a:srgbClr val="1C1A17"/>
                           </a:solidFill>
                           <a:latin typeface="Google Sans Flex"/>
                         </a:rPr>
-                        <a:t>React, TypeScript, Vite</a:t>
+                        <a:t>Python 3.12, FastAPI, uv, pytest</a:t>
                       </a:r>
                     </a:p>
                   </a:txBody>
                   <a:tcPr marT="27432" marB="27432" anchor="ctr">
                     <a:solidFill>
-                      <a:srgbClr val="F1F3F4"/>
+                      <a:srgbClr val="F6F1E7"/>
                     </a:solidFill>
                   </a:tcPr>
                 </a:tc>
@@ -15270,19 +15965,65 @@
                     <a:lstStyle/>
                     <a:p>
                       <a:r>
-                        <a:rPr sz="1000" b="0">
+                        <a:rPr sz="950" b="0">
                           <a:solidFill>
-                            <a:srgbClr val="202124"/>
+                            <a:srgbClr val="1C1A17"/>
                           </a:solidFill>
                           <a:latin typeface="Google Sans Flex"/>
                         </a:rPr>
-                        <a:t>Web app: home, decisions, ask, ingest, agents, benchmark</a:t>
+                        <a:t>Backend; 85 tests replay recorded Gemini fixtures, no network</a:t>
                       </a:r>
                     </a:p>
                   </a:txBody>
                   <a:tcPr marT="27432" marB="27432" anchor="ctr">
                     <a:solidFill>
-                      <a:srgbClr val="F1F3F4"/>
+                      <a:srgbClr val="F6F1E7"/>
+                    </a:solidFill>
+                  </a:tcPr>
+                </a:tc>
+              </a:tr>
+              <a:tr h="320040">
+                <a:tc>
+                  <a:txBody>
+                    <a:bodyPr/>
+                    <a:lstStyle/>
+                    <a:p>
+                      <a:r>
+                        <a:rPr sz="950" b="0">
+                          <a:solidFill>
+                            <a:srgbClr val="1C1A17"/>
+                          </a:solidFill>
+                          <a:latin typeface="Google Sans Flex"/>
+                        </a:rPr>
+                        <a:t>React, TypeScript, Vite, Tailwind</a:t>
+                      </a:r>
+                    </a:p>
+                  </a:txBody>
+                  <a:tcPr marT="27432" marB="27432" anchor="ctr">
+                    <a:solidFill>
+                      <a:srgbClr val="FFFFFF"/>
+                    </a:solidFill>
+                  </a:tcPr>
+                </a:tc>
+                <a:tc>
+                  <a:txBody>
+                    <a:bodyPr/>
+                    <a:lstStyle/>
+                    <a:p>
+                      <a:r>
+                        <a:rPr sz="950" b="0">
+                          <a:solidFill>
+                            <a:srgbClr val="1C1A17"/>
+                          </a:solidFill>
+                          <a:latin typeface="Google Sans Flex"/>
+                        </a:rPr>
+                        <a:t>Editorial web app: stories, catch-up, agents, paste, ask, decisions, people, benchmark</a:t>
+                      </a:r>
+                    </a:p>
+                  </a:txBody>
+                  <a:tcPr marT="27432" marB="27432" anchor="ctr">
+                    <a:solidFill>
+                      <a:srgbClr val="FFFFFF"/>
                     </a:solidFill>
                   </a:tcPr>
                 </a:tc>

--- a/deck/canon-deck.pptx
+++ b/deck/canon-deck.pptx
@@ -11126,7 +11126,7 @@
                 </a:solidFill>
                 <a:latin typeface="Google Sans Flex"/>
               </a:rPr>
-              <a:t>- Extracts decisions with verified quotes from chats, meetings, wiki, PRs, PDFs and screenshots.</a:t>
+              <a:t>- Extracts decisions with verified quotes from chats, meetings, wiki, PRs, PDFs, screenshots and voice recordings.</a:t>
             </a:r>
           </a:p>
           <a:p>
@@ -11523,7 +11523,7 @@
                 </a:solidFill>
                 <a:latin typeface="Google Sans Flex"/>
               </a:rPr>
-              <a:t>Slack, meetings, wiki, PRs, commits, email, paste, PDFs and screenshots (Gemini reads them).</a:t>
+              <a:t>Slack, meetings, wiki, PRs, commits, email, paste, PDFs, screenshots, audio and video (Gemini reads them; 10 min audio, 2 min video, 30 min a day).</a:t>
             </a:r>
           </a:p>
           <a:p>
@@ -11771,7 +11771,7 @@
                 </a:solidFill>
                 <a:latin typeface="Google Sans Flex"/>
               </a:rPr>
-              <a:t>synced every minute (threads, files, PDFs, screenshots); replies under the message; /canon ask, check, catchup, remember.</a:t>
+              <a:t>synced every minute (threads, files, PDFs, screenshots, voice notes); replies under the message; /canon ask, check, catchup, remember.</a:t>
             </a:r>
           </a:p>
           <a:p>

--- a/deck/canon-deck.pptx
+++ b/deck/canon-deck.pptx
@@ -18,6 +18,7 @@
     <p:sldId id="264" r:id="rId14"/>
     <p:sldId id="265" r:id="rId15"/>
     <p:sldId id="266" r:id="rId16"/>
+    <p:sldId id="272" r:id="rId20"/>
     <p:sldId id="267" r:id="rId17"/>
     <p:sldId id="268" r:id="rId18"/>
     <p:sldId id="269" r:id="rId19"/>
@@ -10289,6 +10290,353 @@
           </a:prstGeom>
         </p:spPr>
       </p:pic>
+    </p:spTree>
+  </p:cSld>
+  <p:clrMapOvr>
+    <a:masterClrMapping/>
+  </p:clrMapOvr>
+</p:sld>
+</file>
+
+<file path=ppt/slides/slide15.xml><?xml version="1.0" encoding="utf-8"?>
+<p:sld xmlns:a="http://schemas.openxmlformats.org/drawingml/2006/main" xmlns:p="http://schemas.openxmlformats.org/presentationml/2006/main" xmlns:r="http://schemas.openxmlformats.org/officeDocument/2006/relationships">
+  <p:cSld>
+    <p:spTree>
+      <p:nvGrpSpPr>
+        <p:cNvPr id="1" name=""/>
+        <p:cNvGrpSpPr/>
+        <p:nvPr/>
+      </p:nvGrpSpPr>
+      <p:grpSpPr/>
+      <p:sp>
+        <p:nvSpPr>
+          <p:cNvPr id="2" name="Title 1"/>
+          <p:cNvSpPr>
+            <a:spLocks noGrp="1"/>
+          </p:cNvSpPr>
+          <p:nvPr>
+            <p:ph type="ctrTitle"/>
+          </p:nvPr>
+        </p:nvSpPr>
+        <p:spPr/>
+        <p:txBody>
+          <a:bodyPr/>
+          <a:lstStyle/>
+          <a:p/>
+        </p:txBody>
+      </p:sp>
+      <p:sp>
+        <p:nvSpPr>
+          <p:cNvPr id="3" name="Subtitle 2"/>
+          <p:cNvSpPr>
+            <a:spLocks noGrp="1"/>
+          </p:cNvSpPr>
+          <p:nvPr>
+            <p:ph type="subTitle" idx="1"/>
+          </p:nvPr>
+        </p:nvSpPr>
+        <p:spPr/>
+        <p:txBody>
+          <a:bodyPr/>
+          <a:lstStyle/>
+          <a:p/>
+        </p:txBody>
+      </p:sp>
+      <p:sp>
+        <p:nvSpPr>
+          <p:cNvPr id="135" name="Google Shape;135;p23"/>
+          <p:cNvSpPr txBox="1"/>
+          <p:nvPr/>
+        </p:nvSpPr>
+        <p:spPr>
+          <a:xfrm>
+            <a:off x="265350" y="663825"/>
+            <a:ext cx="8943000" cy="548640"/>
+          </a:xfrm>
+          <a:prstGeom prst="rect">
+            <a:avLst/>
+          </a:prstGeom>
+          <a:noFill/>
+          <a:ln>
+            <a:noFill/>
+          </a:ln>
+        </p:spPr>
+        <p:txBody>
+          <a:bodyPr anchorCtr="0" anchor="t" bIns="91425" lIns="91425" spcFirstLastPara="1" rIns="91425" wrap="square" tIns="91425">
+            <a:noAutofit/>
+          </a:bodyPr>
+          <a:lstStyle/>
+          <a:p>
+            <a:pPr indent="0" lvl="0" marL="0" rtl="0" algn="l">
+              <a:spcBef>
+                <a:spcPts val="0"/>
+              </a:spcBef>
+              <a:spcAft>
+                <a:spcPts val="0"/>
+              </a:spcAft>
+              <a:buNone/>
+            </a:pPr>
+            <a:r>
+              <a:rPr lang="en-GB" sz="1600">
+                <a:latin typeface="Google Sans Flex Medium"/>
+                <a:ea typeface="Google Sans Flex Medium"/>
+                <a:cs typeface="Google Sans Flex Medium"/>
+                <a:sym typeface="Google Sans Flex Medium"/>
+              </a:rPr>
+              <a:t>Live in Discord: Canon learns from a real server</a:t>
+            </a:r>
+            <a:endParaRPr sz="1600">
+              <a:latin typeface="Google Sans Flex Medium"/>
+              <a:ea typeface="Google Sans Flex Medium"/>
+              <a:cs typeface="Google Sans Flex Medium"/>
+              <a:sym typeface="Google Sans Flex Medium"/>
+            </a:endParaRPr>
+          </a:p>
+        </p:txBody>
+      </p:sp>
+      <p:pic>
+        <p:nvPicPr>
+          <p:cNvPr id="136" name="Picture 135" descr="1-general.jpg"/>
+          <p:cNvPicPr>
+            <a:picLocks noChangeAspect="1"/>
+          </p:cNvPicPr>
+          <p:nvPr/>
+        </p:nvPicPr>
+        <p:blipFill>
+          <a:blip r:embed="rId2"/>
+          <a:stretch>
+            <a:fillRect/>
+          </a:stretch>
+        </p:blipFill>
+        <p:spPr>
+          <a:xfrm>
+            <a:off x="320040" y="1455855"/>
+            <a:ext cx="2743200" cy="1340249"/>
+          </a:xfrm>
+          <a:prstGeom prst="rect">
+            <a:avLst/>
+          </a:prstGeom>
+          <a:ln w="9525">
+            <a:solidFill>
+              <a:srgbClr val="D8CFBE"/>
+            </a:solidFill>
+          </a:ln>
+        </p:spPr>
+      </p:pic>
+      <p:sp>
+        <p:nvSpPr>
+          <p:cNvPr id="137" name="TextBox 136"/>
+          <p:cNvSpPr txBox="1"/>
+          <p:nvPr/>
+        </p:nvSpPr>
+        <p:spPr>
+          <a:xfrm>
+            <a:off x="320040" y="3063239"/>
+            <a:ext cx="2743200" cy="274320"/>
+          </a:xfrm>
+          <a:prstGeom prst="rect">
+            <a:avLst/>
+          </a:prstGeom>
+          <a:noFill/>
+        </p:spPr>
+        <p:txBody>
+          <a:bodyPr wrap="square" anchor="t" lIns="45720" rIns="45720">
+            <a:spAutoFit/>
+          </a:bodyPr>
+          <a:lstStyle/>
+          <a:p>
+            <a:pPr algn="ctr">
+              <a:spcAft>
+                <a:spcPts val="400"/>
+              </a:spcAft>
+            </a:pPr>
+            <a:r>
+              <a:rPr sz="900" b="0">
+                <a:solidFill>
+                  <a:srgbClr val="5F5A52"/>
+                </a:solidFill>
+                <a:latin typeface="Google Sans Flex"/>
+              </a:rPr>
+              <a:t>Threads in #general, posted as the people who wrote them</a:t>
+            </a:r>
+          </a:p>
+        </p:txBody>
+      </p:sp>
+      <p:pic>
+        <p:nvPicPr>
+          <p:cNvPr id="138" name="Picture 137" descr="2-engineering.jpg"/>
+          <p:cNvPicPr>
+            <a:picLocks noChangeAspect="1"/>
+          </p:cNvPicPr>
+          <p:nvPr/>
+        </p:nvPicPr>
+        <p:blipFill>
+          <a:blip r:embed="rId3"/>
+          <a:stretch>
+            <a:fillRect/>
+          </a:stretch>
+        </p:blipFill>
+        <p:spPr>
+          <a:xfrm>
+            <a:off x="3200400" y="1461733"/>
+            <a:ext cx="2743200" cy="1328492"/>
+          </a:xfrm>
+          <a:prstGeom prst="rect">
+            <a:avLst/>
+          </a:prstGeom>
+          <a:ln w="9525">
+            <a:solidFill>
+              <a:srgbClr val="D8CFBE"/>
+            </a:solidFill>
+          </a:ln>
+        </p:spPr>
+      </p:pic>
+      <p:sp>
+        <p:nvSpPr>
+          <p:cNvPr id="139" name="TextBox 138"/>
+          <p:cNvSpPr txBox="1"/>
+          <p:nvPr/>
+        </p:nvSpPr>
+        <p:spPr>
+          <a:xfrm>
+            <a:off x="3200400" y="3063239"/>
+            <a:ext cx="2743200" cy="274320"/>
+          </a:xfrm>
+          <a:prstGeom prst="rect">
+            <a:avLst/>
+          </a:prstGeom>
+          <a:noFill/>
+        </p:spPr>
+        <p:txBody>
+          <a:bodyPr wrap="square" anchor="t" lIns="45720" rIns="45720">
+            <a:spAutoFit/>
+          </a:bodyPr>
+          <a:lstStyle/>
+          <a:p>
+            <a:pPr algn="ctr">
+              <a:spcAft>
+                <a:spcPts val="400"/>
+              </a:spcAft>
+            </a:pPr>
+            <a:r>
+              <a:rPr sz="900" b="0">
+                <a:solidFill>
+                  <a:srgbClr val="5F5A52"/>
+                </a:solidFill>
+                <a:latin typeface="Google Sans Flex"/>
+              </a:rPr>
+              <a:t>#engineering: the stale Friday release window, as a screenshot</a:t>
+            </a:r>
+          </a:p>
+        </p:txBody>
+      </p:sp>
+      <p:pic>
+        <p:nvPicPr>
+          <p:cNvPr id="140" name="Picture 139" descr="3-sales.jpg"/>
+          <p:cNvPicPr>
+            <a:picLocks noChangeAspect="1"/>
+          </p:cNvPicPr>
+          <p:nvPr/>
+        </p:nvPicPr>
+        <p:blipFill>
+          <a:blip r:embed="rId4"/>
+          <a:stretch>
+            <a:fillRect/>
+          </a:stretch>
+        </p:blipFill>
+        <p:spPr>
+          <a:xfrm>
+            <a:off x="6080760" y="1343188"/>
+            <a:ext cx="2743200" cy="1565583"/>
+          </a:xfrm>
+          <a:prstGeom prst="rect">
+            <a:avLst/>
+          </a:prstGeom>
+          <a:ln w="9525">
+            <a:solidFill>
+              <a:srgbClr val="D8CFBE"/>
+            </a:solidFill>
+          </a:ln>
+        </p:spPr>
+      </p:pic>
+      <p:sp>
+        <p:nvSpPr>
+          <p:cNvPr id="141" name="TextBox 140"/>
+          <p:cNvSpPr txBox="1"/>
+          <p:nvPr/>
+        </p:nvSpPr>
+        <p:spPr>
+          <a:xfrm>
+            <a:off x="6080760" y="3063239"/>
+            <a:ext cx="2743200" cy="274320"/>
+          </a:xfrm>
+          <a:prstGeom prst="rect">
+            <a:avLst/>
+          </a:prstGeom>
+          <a:noFill/>
+        </p:spPr>
+        <p:txBody>
+          <a:bodyPr wrap="square" anchor="t" lIns="45720" rIns="45720">
+            <a:spAutoFit/>
+          </a:bodyPr>
+          <a:lstStyle/>
+          <a:p>
+            <a:pPr algn="ctr">
+              <a:spcAft>
+                <a:spcPts val="400"/>
+              </a:spcAft>
+            </a:pPr>
+            <a:r>
+              <a:rPr sz="900" b="0">
+                <a:solidFill>
+                  <a:srgbClr val="5F5A52"/>
+                </a:solidFill>
+                <a:latin typeface="Google Sans Flex"/>
+              </a:rPr>
+              <a:t>#sales: the old USD 99 pricing page and the sales FAQ file</a:t>
+            </a:r>
+          </a:p>
+        </p:txBody>
+      </p:sp>
+      <p:sp>
+        <p:nvSpPr>
+          <p:cNvPr id="142" name="TextBox 141"/>
+          <p:cNvSpPr txBox="1"/>
+          <p:nvPr/>
+        </p:nvSpPr>
+        <p:spPr>
+          <a:xfrm>
+            <a:off x="320040" y="3520440"/>
+            <a:ext cx="8503920" cy="548640"/>
+          </a:xfrm>
+          <a:prstGeom prst="rect">
+            <a:avLst/>
+          </a:prstGeom>
+          <a:noFill/>
+        </p:spPr>
+        <p:txBody>
+          <a:bodyPr wrap="square" anchor="t" lIns="45720" rIns="45720">
+            <a:spAutoFit/>
+          </a:bodyPr>
+          <a:lstStyle/>
+          <a:p>
+            <a:pPr>
+              <a:spcAft>
+                <a:spcPts val="400"/>
+              </a:spcAft>
+            </a:pPr>
+            <a:r>
+              <a:rPr sz="1100" b="0">
+                <a:solidFill>
+                  <a:srgbClr val="1C1A17"/>
+                </a:solidFill>
+                <a:latin typeface="Google Sans Flex"/>
+              </a:rPr>
+              <a:t>Synced every minute with no always-on bot: threads, files, PDFs, screenshots and voice notes. Join: discord.gg/HwSgjmcgF5</a:t>
+            </a:r>
+          </a:p>
+        </p:txBody>
+      </p:sp>
     </p:spTree>
   </p:cSld>
   <p:clrMapOvr>

--- a/deck/canon-deck.pptx
+++ b/deck/canon-deck.pptx
@@ -8278,7 +8278,7 @@
         </p:nvGraphicFramePr>
         <p:xfrm>
           <a:off x="320040" y="1188720"/>
-          <a:ext cx="4754879" cy="2487168"/>
+          <a:ext cx="4754878" cy="2487168"/>
         </p:xfrm>
         <a:graphic>
           <a:graphicData uri="http://schemas.openxmlformats.org/drawingml/2006/table">
@@ -8287,10 +8287,10 @@
                 <a:tableStyleId>{5C22544A-7EE6-4342-B048-85BDC9FD1C3A}</a:tableStyleId>
               </a:tblPr>
               <a:tblGrid>
-                <a:gridCol w="2472537"/>
-                <a:gridCol w="713232"/>
-                <a:gridCol w="950976"/>
+                <a:gridCol w="2187244"/>
                 <a:gridCol w="618134"/>
+                <a:gridCol w="1378915"/>
+                <a:gridCol w="570585"/>
               </a:tblGrid>
               <a:tr h="310896">
                 <a:tc>
@@ -10119,6 +10119,7 @@
                   <a:srgbClr val="1C1A17"/>
                 </a:solidFill>
                 <a:latin typeface="Google Sans Flex"/>
+                <a:hlinkClick r:id="rId5"/>
               </a:rPr>
               <a:t>https://github.com/tejasnafde/canon</a:t>
             </a:r>
@@ -10169,8 +10170,9 @@
                   <a:srgbClr val="1C1A17"/>
                 </a:solidFill>
                 <a:latin typeface="Google Sans Flex"/>
-              </a:rPr>
-              <a:t>https://canon-tn07.web.app  (also https://canon.tn07.dev)</a:t>
+                <a:hlinkClick r:id="rId6"/>
+              </a:rPr>
+              <a:t>https://canon-tn07.web.app</a:t>
             </a:r>
           </a:p>
           <a:p>
@@ -10186,6 +10188,32 @@
                 </a:solidFill>
                 <a:latin typeface="Google Sans Flex"/>
               </a:rPr>
+              <a:t>Same app, custom domain: </a:t>
+            </a:r>
+            <a:r>
+              <a:rPr sz="1400" b="0">
+                <a:solidFill>
+                  <a:srgbClr val="1C1A17"/>
+                </a:solidFill>
+                <a:latin typeface="Google Sans Flex"/>
+                <a:hlinkClick r:id="rId7"/>
+              </a:rPr>
+              <a:t>https://canon.tn07.dev</a:t>
+            </a:r>
+          </a:p>
+          <a:p>
+            <a:pPr>
+              <a:spcAft>
+                <a:spcPts val="1000"/>
+              </a:spcAft>
+            </a:pPr>
+            <a:r>
+              <a:rPr sz="1400" b="1">
+                <a:solidFill>
+                  <a:srgbClr val="1C1A17"/>
+                </a:solidFill>
+                <a:latin typeface="Google Sans Flex"/>
+              </a:rPr>
               <a:t>Cloud Run: </a:t>
             </a:r>
             <a:r>
@@ -10194,6 +10222,7 @@
                   <a:srgbClr val="1C1A17"/>
                 </a:solidFill>
                 <a:latin typeface="Google Sans Flex"/>
+                <a:hlinkClick r:id="rId8"/>
               </a:rPr>
               <a:t>https://canon-ezvux7gqxa-el.a.run.app/health</a:t>
             </a:r>
@@ -10219,6 +10248,7 @@
                   <a:srgbClr val="1C1A17"/>
                 </a:solidFill>
                 <a:latin typeface="Google Sans Flex"/>
+                <a:hlinkClick r:id="rId9"/>
               </a:rPr>
               <a:t>https://discord.gg/HwSgjmcgF5</a:t>
             </a:r>
@@ -10275,7 +10305,7 @@
           <p:nvPr/>
         </p:nvPicPr>
         <p:blipFill>
-          <a:blip r:embed="rId5"/>
+          <a:blip r:embed="rId10"/>
           <a:stretch>
             <a:fillRect/>
           </a:stretch>
@@ -13098,9 +13128,45 @@
           </a:fontRef>
         </p:style>
       </p:cxnSp>
+      <p:cxnSp>
+        <p:nvCxnSpPr>
+          <p:cNvPr id="110" name="Connector 109"/>
+          <p:cNvCxnSpPr/>
+          <p:nvPr/>
+        </p:nvCxnSpPr>
+        <p:spPr>
+          <a:xfrm flipH="1">
+            <a:off x="4023360" y="2167128"/>
+            <a:ext cx="4151376" cy="365760"/>
+          </a:xfrm>
+          <a:prstGeom prst="line">
+            <a:avLst/>
+          </a:prstGeom>
+          <a:ln w="15875">
+            <a:solidFill>
+              <a:srgbClr val="5F5A52"/>
+            </a:solidFill>
+            <a:tailEnd type="triangle" w="med" len="med"/>
+          </a:ln>
+        </p:spPr>
+        <p:style>
+          <a:lnRef idx="2">
+            <a:schemeClr val="accent1"/>
+          </a:lnRef>
+          <a:fillRef idx="0">
+            <a:schemeClr val="accent1"/>
+          </a:fillRef>
+          <a:effectRef idx="1">
+            <a:schemeClr val="accent1"/>
+          </a:effectRef>
+          <a:fontRef idx="minor">
+            <a:schemeClr val="tx1"/>
+          </a:fontRef>
+        </p:style>
+      </p:cxnSp>
       <p:sp>
         <p:nvSpPr>
-          <p:cNvPr id="110" name="TextBox 109"/>
+          <p:cNvPr id="111" name="TextBox 110"/>
           <p:cNvSpPr txBox="1"/>
           <p:nvPr/>
         </p:nvSpPr>
@@ -13139,7 +13205,7 @@
       </p:sp>
       <p:sp>
         <p:nvSpPr>
-          <p:cNvPr id="111" name="Rounded Rectangle 110"/>
+          <p:cNvPr id="112" name="Rounded Rectangle 111"/>
           <p:cNvSpPr/>
           <p:nvPr/>
         </p:nvSpPr>
@@ -13206,7 +13272,7 @@
       </p:sp>
       <p:sp>
         <p:nvSpPr>
-          <p:cNvPr id="112" name="Rounded Rectangle 111"/>
+          <p:cNvPr id="113" name="Rounded Rectangle 112"/>
           <p:cNvSpPr/>
           <p:nvPr/>
         </p:nvSpPr>
@@ -13273,7 +13339,7 @@
       </p:sp>
       <p:sp>
         <p:nvSpPr>
-          <p:cNvPr id="113" name="Rounded Rectangle 112"/>
+          <p:cNvPr id="114" name="Rounded Rectangle 113"/>
           <p:cNvSpPr/>
           <p:nvPr/>
         </p:nvSpPr>
@@ -13340,7 +13406,7 @@
       </p:sp>
       <p:sp>
         <p:nvSpPr>
-          <p:cNvPr id="114" name="Rounded Rectangle 113"/>
+          <p:cNvPr id="115" name="Rounded Rectangle 114"/>
           <p:cNvSpPr/>
           <p:nvPr/>
         </p:nvSpPr>
@@ -13407,7 +13473,7 @@
       </p:sp>
       <p:sp>
         <p:nvSpPr>
-          <p:cNvPr id="115" name="Rounded Rectangle 114"/>
+          <p:cNvPr id="116" name="Rounded Rectangle 115"/>
           <p:cNvSpPr/>
           <p:nvPr/>
         </p:nvSpPr>
@@ -13474,7 +13540,7 @@
       </p:sp>
       <p:sp>
         <p:nvSpPr>
-          <p:cNvPr id="116" name="Rounded Rectangle 115"/>
+          <p:cNvPr id="117" name="Rounded Rectangle 116"/>
           <p:cNvSpPr/>
           <p:nvPr/>
         </p:nvSpPr>
@@ -13541,49 +13607,13 @@
       </p:sp>
       <p:cxnSp>
         <p:nvCxnSpPr>
-          <p:cNvPr id="117" name="Connector 116"/>
-          <p:cNvCxnSpPr/>
-          <p:nvPr/>
-        </p:nvCxnSpPr>
-        <p:spPr>
-          <a:xfrm>
-            <a:off x="1581912" y="3973068"/>
-            <a:ext cx="182880" cy="0"/>
-          </a:xfrm>
-          <a:prstGeom prst="line">
-            <a:avLst/>
-          </a:prstGeom>
-          <a:ln w="15875">
-            <a:solidFill>
-              <a:srgbClr val="5F5A52"/>
-            </a:solidFill>
-            <a:tailEnd type="triangle" w="med" len="med"/>
-          </a:ln>
-        </p:spPr>
-        <p:style>
-          <a:lnRef idx="2">
-            <a:schemeClr val="accent1"/>
-          </a:lnRef>
-          <a:fillRef idx="0">
-            <a:schemeClr val="accent1"/>
-          </a:fillRef>
-          <a:effectRef idx="1">
-            <a:schemeClr val="accent1"/>
-          </a:effectRef>
-          <a:fontRef idx="minor">
-            <a:schemeClr val="tx1"/>
-          </a:fontRef>
-        </p:style>
-      </p:cxnSp>
-      <p:cxnSp>
-        <p:nvCxnSpPr>
           <p:cNvPr id="118" name="Connector 117"/>
           <p:cNvCxnSpPr/>
           <p:nvPr/>
         </p:nvCxnSpPr>
         <p:spPr>
           <a:xfrm>
-            <a:off x="3026664" y="3973068"/>
+            <a:off x="1581912" y="3973068"/>
             <a:ext cx="182880" cy="0"/>
           </a:xfrm>
           <a:prstGeom prst="line">
@@ -13619,7 +13649,7 @@
         </p:nvCxnSpPr>
         <p:spPr>
           <a:xfrm>
-            <a:off x="4471416" y="3973068"/>
+            <a:off x="3026664" y="3973068"/>
             <a:ext cx="182880" cy="0"/>
           </a:xfrm>
           <a:prstGeom prst="line">
@@ -13655,7 +13685,7 @@
         </p:nvCxnSpPr>
         <p:spPr>
           <a:xfrm>
-            <a:off x="5916168" y="3973068"/>
+            <a:off x="4471416" y="3973068"/>
             <a:ext cx="182880" cy="0"/>
           </a:xfrm>
           <a:prstGeom prst="line">
@@ -13691,7 +13721,7 @@
         </p:nvCxnSpPr>
         <p:spPr>
           <a:xfrm>
-            <a:off x="7360920" y="3973068"/>
+            <a:off x="5916168" y="3973068"/>
             <a:ext cx="182880" cy="0"/>
           </a:xfrm>
           <a:prstGeom prst="line">
@@ -13722,6 +13752,42 @@
       <p:cxnSp>
         <p:nvCxnSpPr>
           <p:cNvPr id="122" name="Connector 121"/>
+          <p:cNvCxnSpPr/>
+          <p:nvPr/>
+        </p:nvCxnSpPr>
+        <p:spPr>
+          <a:xfrm>
+            <a:off x="7360920" y="3973068"/>
+            <a:ext cx="182880" cy="0"/>
+          </a:xfrm>
+          <a:prstGeom prst="line">
+            <a:avLst/>
+          </a:prstGeom>
+          <a:ln w="15875">
+            <a:solidFill>
+              <a:srgbClr val="5F5A52"/>
+            </a:solidFill>
+            <a:tailEnd type="triangle" w="med" len="med"/>
+          </a:ln>
+        </p:spPr>
+        <p:style>
+          <a:lnRef idx="2">
+            <a:schemeClr val="accent1"/>
+          </a:lnRef>
+          <a:fillRef idx="0">
+            <a:schemeClr val="accent1"/>
+          </a:fillRef>
+          <a:effectRef idx="1">
+            <a:schemeClr val="accent1"/>
+          </a:effectRef>
+          <a:fontRef idx="minor">
+            <a:schemeClr val="tx1"/>
+          </a:fontRef>
+        </p:style>
+      </p:cxnSp>
+      <p:cxnSp>
+        <p:nvCxnSpPr>
+          <p:cNvPr id="123" name="Connector 122"/>
           <p:cNvCxnSpPr/>
           <p:nvPr/>
         </p:nvCxnSpPr>
@@ -13930,9 +13996,48 @@
           </a:p>
         </p:txBody>
       </p:sp>
+      <p:sp>
+        <p:nvSpPr>
+          <p:cNvPr id="104" name="TextBox 103"/>
+          <p:cNvSpPr txBox="1"/>
+          <p:nvPr/>
+        </p:nvSpPr>
+        <p:spPr>
+          <a:xfrm>
+            <a:off x="320040" y="4800600"/>
+            <a:ext cx="8503920" cy="274320"/>
+          </a:xfrm>
+          <a:prstGeom prst="rect">
+            <a:avLst/>
+          </a:prstGeom>
+          <a:noFill/>
+        </p:spPr>
+        <p:txBody>
+          <a:bodyPr wrap="square" anchor="t" lIns="45720" rIns="45720">
+            <a:spAutoFit/>
+          </a:bodyPr>
+          <a:lstStyle/>
+          <a:p>
+            <a:pPr>
+              <a:spcAft>
+                <a:spcPts val="400"/>
+              </a:spcAft>
+            </a:pPr>
+            <a:r>
+              <a:rPr sz="1000" b="0">
+                <a:solidFill>
+                  <a:srgbClr val="5F5A52"/>
+                </a:solidFill>
+                <a:latin typeface="Google Sans Flex"/>
+              </a:rPr>
+              <a:t>Early wireframes: the approved mocks the web app was built from. The live app (current numbers) is on the Snapshots slide.</a:t>
+            </a:r>
+          </a:p>
+        </p:txBody>
+      </p:sp>
       <p:pic>
         <p:nvPicPr>
-          <p:cNvPr id="104" name="Picture 103" descr="home.jpg"/>
+          <p:cNvPr id="105" name="Picture 104" descr="home.jpg"/>
           <p:cNvPicPr>
             <a:picLocks noChangeAspect="1"/>
           </p:cNvPicPr>
@@ -13961,7 +14066,7 @@
       </p:pic>
       <p:sp>
         <p:nvSpPr>
-          <p:cNvPr id="105" name="TextBox 104"/>
+          <p:cNvPr id="106" name="TextBox 105"/>
           <p:cNvSpPr txBox="1"/>
           <p:nvPr/>
         </p:nvSpPr>
@@ -14000,7 +14105,7 @@
       </p:sp>
       <p:pic>
         <p:nvPicPr>
-          <p:cNvPr id="106" name="Picture 105" descr="new-hire.jpg"/>
+          <p:cNvPr id="107" name="Picture 106" descr="new-hire.jpg"/>
           <p:cNvPicPr>
             <a:picLocks noChangeAspect="1"/>
           </p:cNvPicPr>
@@ -14029,7 +14134,7 @@
       </p:pic>
       <p:sp>
         <p:nvSpPr>
-          <p:cNvPr id="107" name="TextBox 106"/>
+          <p:cNvPr id="108" name="TextBox 107"/>
           <p:cNvSpPr txBox="1"/>
           <p:nvPr/>
         </p:nvSpPr>
@@ -14068,7 +14173,7 @@
       </p:sp>
       <p:pic>
         <p:nvPicPr>
-          <p:cNvPr id="108" name="Picture 107" descr="agent.jpg"/>
+          <p:cNvPr id="109" name="Picture 108" descr="agent.jpg"/>
           <p:cNvPicPr>
             <a:picLocks noChangeAspect="1"/>
           </p:cNvPicPr>
@@ -14097,7 +14202,7 @@
       </p:pic>
       <p:sp>
         <p:nvSpPr>
-          <p:cNvPr id="109" name="TextBox 108"/>
+          <p:cNvPr id="110" name="TextBox 109"/>
           <p:cNvSpPr txBox="1"/>
           <p:nvPr/>
         </p:nvSpPr>

--- a/deck/canon-deck.pptx
+++ b/deck/canon-deck.pptx
@@ -10628,15 +10628,83 @@
           </a:p>
         </p:txBody>
       </p:sp>
+      <p:pic>
+        <p:nvPicPr>
+          <p:cNvPr id="142" name="Picture 141" descr="4-reply.jpg"/>
+          <p:cNvPicPr>
+            <a:picLocks noChangeAspect="1"/>
+          </p:cNvPicPr>
+          <p:nvPr/>
+        </p:nvPicPr>
+        <p:blipFill>
+          <a:blip r:embed="rId5"/>
+          <a:stretch>
+            <a:fillRect/>
+          </a:stretch>
+        </p:blipFill>
+        <p:spPr>
+          <a:xfrm>
+            <a:off x="320040" y="3846953"/>
+            <a:ext cx="2743200" cy="1038610"/>
+          </a:xfrm>
+          <a:prstGeom prst="rect">
+            <a:avLst/>
+          </a:prstGeom>
+          <a:ln w="9525">
+            <a:solidFill>
+              <a:srgbClr val="D8CFBE"/>
+            </a:solidFill>
+          </a:ln>
+        </p:spPr>
+      </p:pic>
       <p:sp>
         <p:nvSpPr>
-          <p:cNvPr id="142" name="TextBox 141"/>
+          <p:cNvPr id="143" name="TextBox 142"/>
           <p:cNvSpPr txBox="1"/>
           <p:nvPr/>
         </p:nvSpPr>
         <p:spPr>
           <a:xfrm>
-            <a:off x="320040" y="3520440"/>
+            <a:off x="320040" y="5303518"/>
+            <a:ext cx="2743200" cy="274320"/>
+          </a:xfrm>
+          <a:prstGeom prst="rect">
+            <a:avLst/>
+          </a:prstGeom>
+          <a:noFill/>
+        </p:spPr>
+        <p:txBody>
+          <a:bodyPr wrap="square" anchor="t" lIns="45720" rIns="45720">
+            <a:spAutoFit/>
+          </a:bodyPr>
+          <a:lstStyle/>
+          <a:p>
+            <a:pPr algn="ctr">
+              <a:spcAft>
+                <a:spcPts val="400"/>
+              </a:spcAft>
+            </a:pPr>
+            <a:r>
+              <a:rPr sz="900" b="0">
+                <a:solidFill>
+                  <a:srgbClr val="5F5A52"/>
+                </a:solidFill>
+                <a:latin typeface="Google Sans Flex"/>
+              </a:rPr>
+              <a:t>Canon replies under a message that breaks a decision</a:t>
+            </a:r>
+          </a:p>
+        </p:txBody>
+      </p:sp>
+      <p:sp>
+        <p:nvSpPr>
+          <p:cNvPr id="144" name="TextBox 143"/>
+          <p:cNvSpPr txBox="1"/>
+          <p:nvPr/>
+        </p:nvSpPr>
+        <p:spPr>
+          <a:xfrm>
+            <a:off x="320040" y="5669280"/>
             <a:ext cx="8503920" cy="548640"/>
           </a:xfrm>
           <a:prstGeom prst="rect">

--- a/deck/canon-deck.pptx
+++ b/deck/canon-deck.pptx
@@ -10426,7 +10426,7 @@
       </p:sp>
       <p:pic>
         <p:nvPicPr>
-          <p:cNvPr id="136" name="Picture 135" descr="1-general.jpg"/>
+          <p:cNvPr id="136" name="Picture 135" descr="0-reply.jpg"/>
           <p:cNvPicPr>
             <a:picLocks noChangeAspect="1"/>
           </p:cNvPicPr>
@@ -10440,8 +10440,8 @@
         </p:blipFill>
         <p:spPr>
           <a:xfrm>
-            <a:off x="320040" y="1455855"/>
-            <a:ext cx="2743200" cy="1340249"/>
+            <a:off x="320040" y="1201207"/>
+            <a:ext cx="4160520" cy="1575225"/>
           </a:xfrm>
           <a:prstGeom prst="rect">
             <a:avLst/>
@@ -10461,8 +10461,8 @@
         </p:nvSpPr>
         <p:spPr>
           <a:xfrm>
-            <a:off x="320040" y="3063239"/>
-            <a:ext cx="2743200" cy="274320"/>
+            <a:off x="320040" y="2788920"/>
+            <a:ext cx="4160520" cy="274320"/>
           </a:xfrm>
           <a:prstGeom prst="rect">
             <a:avLst/>
@@ -10487,14 +10487,14 @@
                 </a:solidFill>
                 <a:latin typeface="Google Sans Flex"/>
               </a:rPr>
-              <a:t>Threads in #general, posted as the people who wrote them</a:t>
+              <a:t>A real post at 21:14; Canon replied in about a minute. Join: discord.gg/HwSgjmcgF5</a:t>
             </a:r>
           </a:p>
         </p:txBody>
       </p:sp>
       <p:pic>
         <p:nvPicPr>
-          <p:cNvPr id="138" name="Picture 137" descr="2-engineering.jpg"/>
+          <p:cNvPr id="138" name="Picture 137" descr="1-general.jpg"/>
           <p:cNvPicPr>
             <a:picLocks noChangeAspect="1"/>
           </p:cNvPicPr>
@@ -10508,8 +10508,8 @@
         </p:blipFill>
         <p:spPr>
           <a:xfrm>
-            <a:off x="3200400" y="1461733"/>
-            <a:ext cx="2743200" cy="1328492"/>
+            <a:off x="5106068" y="1188720"/>
+            <a:ext cx="3275263" cy="1600200"/>
           </a:xfrm>
           <a:prstGeom prst="rect">
             <a:avLst/>
@@ -10529,8 +10529,8 @@
         </p:nvSpPr>
         <p:spPr>
           <a:xfrm>
-            <a:off x="3200400" y="3063239"/>
-            <a:ext cx="2743200" cy="274320"/>
+            <a:off x="4663440" y="2788920"/>
+            <a:ext cx="4160520" cy="274320"/>
           </a:xfrm>
           <a:prstGeom prst="rect">
             <a:avLst/>
@@ -10555,14 +10555,14 @@
                 </a:solidFill>
                 <a:latin typeface="Google Sans Flex"/>
               </a:rPr>
-              <a:t>#engineering: the stale Friday release window, as a screenshot</a:t>
+              <a:t>Threads in #general, posted as the people who wrote them</a:t>
             </a:r>
           </a:p>
         </p:txBody>
       </p:sp>
       <p:pic>
         <p:nvPicPr>
-          <p:cNvPr id="140" name="Picture 139" descr="3-sales.jpg"/>
+          <p:cNvPr id="140" name="Picture 139" descr="2-engineering.jpg"/>
           <p:cNvPicPr>
             <a:picLocks noChangeAspect="1"/>
           </p:cNvPicPr>
@@ -10576,8 +10576,8 @@
         </p:blipFill>
         <p:spPr>
           <a:xfrm>
-            <a:off x="6080760" y="1343188"/>
-            <a:ext cx="2743200" cy="1565583"/>
+            <a:off x="748176" y="3200400"/>
+            <a:ext cx="3304247" cy="1600200"/>
           </a:xfrm>
           <a:prstGeom prst="rect">
             <a:avLst/>
@@ -10597,8 +10597,8 @@
         </p:nvSpPr>
         <p:spPr>
           <a:xfrm>
-            <a:off x="6080760" y="3063239"/>
-            <a:ext cx="2743200" cy="274320"/>
+            <a:off x="320040" y="4800600"/>
+            <a:ext cx="4160520" cy="274320"/>
           </a:xfrm>
           <a:prstGeom prst="rect">
             <a:avLst/>
@@ -10623,14 +10623,14 @@
                 </a:solidFill>
                 <a:latin typeface="Google Sans Flex"/>
               </a:rPr>
-              <a:t>#sales: the old USD 99 pricing page and the sales FAQ file</a:t>
+              <a:t>#engineering: the stale Friday release window, as a screenshot</a:t>
             </a:r>
           </a:p>
         </p:txBody>
       </p:sp>
       <p:pic>
         <p:nvPicPr>
-          <p:cNvPr id="142" name="Picture 141" descr="4-reply.jpg"/>
+          <p:cNvPr id="142" name="Picture 141" descr="3-sales.jpg"/>
           <p:cNvPicPr>
             <a:picLocks noChangeAspect="1"/>
           </p:cNvPicPr>
@@ -10644,8 +10644,8 @@
         </p:blipFill>
         <p:spPr>
           <a:xfrm>
-            <a:off x="320040" y="3846953"/>
-            <a:ext cx="2743200" cy="1038610"/>
+            <a:off x="5341773" y="3200400"/>
+            <a:ext cx="2803854" cy="1600200"/>
           </a:xfrm>
           <a:prstGeom prst="rect">
             <a:avLst/>
@@ -10665,8 +10665,8 @@
         </p:nvSpPr>
         <p:spPr>
           <a:xfrm>
-            <a:off x="320040" y="5303518"/>
-            <a:ext cx="2743200" cy="274320"/>
+            <a:off x="4663440" y="4800600"/>
+            <a:ext cx="4160520" cy="274320"/>
           </a:xfrm>
           <a:prstGeom prst="rect">
             <a:avLst/>
@@ -10691,46 +10691,7 @@
                 </a:solidFill>
                 <a:latin typeface="Google Sans Flex"/>
               </a:rPr>
-              <a:t>Canon replies under a message that breaks a decision</a:t>
-            </a:r>
-          </a:p>
-        </p:txBody>
-      </p:sp>
-      <p:sp>
-        <p:nvSpPr>
-          <p:cNvPr id="144" name="TextBox 143"/>
-          <p:cNvSpPr txBox="1"/>
-          <p:nvPr/>
-        </p:nvSpPr>
-        <p:spPr>
-          <a:xfrm>
-            <a:off x="320040" y="5669280"/>
-            <a:ext cx="8503920" cy="548640"/>
-          </a:xfrm>
-          <a:prstGeom prst="rect">
-            <a:avLst/>
-          </a:prstGeom>
-          <a:noFill/>
-        </p:spPr>
-        <p:txBody>
-          <a:bodyPr wrap="square" anchor="t" lIns="45720" rIns="45720">
-            <a:spAutoFit/>
-          </a:bodyPr>
-          <a:lstStyle/>
-          <a:p>
-            <a:pPr>
-              <a:spcAft>
-                <a:spcPts val="400"/>
-              </a:spcAft>
-            </a:pPr>
-            <a:r>
-              <a:rPr sz="1100" b="0">
-                <a:solidFill>
-                  <a:srgbClr val="1C1A17"/>
-                </a:solidFill>
-                <a:latin typeface="Google Sans Flex"/>
-              </a:rPr>
-              <a:t>Synced every minute with no always-on bot: threads, files, PDFs, screenshots and voice notes. Join: discord.gg/HwSgjmcgF5</a:t>
+              <a:t>#sales: the old USD 99 pricing page and the sales FAQ file</a:t>
             </a:r>
           </a:p>
         </p:txBody>

--- a/deck/canon-deck.pptx
+++ b/deck/canon-deck.pptx
@@ -10145,8 +10145,9 @@
                   <a:srgbClr val="1C1A17"/>
                 </a:solidFill>
                 <a:latin typeface="Google Sans Flex"/>
-              </a:rPr>
-              <a:t>(add the video link)</a:t>
+                <a:hlinkClick r:id="rId6"/>
+              </a:rPr>
+              <a:t>https://youtu.be/tPJenhhhjI8</a:t>
             </a:r>
           </a:p>
           <a:p>
@@ -10170,7 +10171,7 @@
                   <a:srgbClr val="1C1A17"/>
                 </a:solidFill>
                 <a:latin typeface="Google Sans Flex"/>
-                <a:hlinkClick r:id="rId6"/>
+                <a:hlinkClick r:id="rId7"/>
               </a:rPr>
               <a:t>https://canon-tn07.web.app</a:t>
             </a:r>
@@ -10196,7 +10197,7 @@
                   <a:srgbClr val="1C1A17"/>
                 </a:solidFill>
                 <a:latin typeface="Google Sans Flex"/>
-                <a:hlinkClick r:id="rId7"/>
+                <a:hlinkClick r:id="rId8"/>
               </a:rPr>
               <a:t>https://canon.tn07.dev</a:t>
             </a:r>
@@ -10222,7 +10223,7 @@
                   <a:srgbClr val="1C1A17"/>
                 </a:solidFill>
                 <a:latin typeface="Google Sans Flex"/>
-                <a:hlinkClick r:id="rId8"/>
+                <a:hlinkClick r:id="rId9"/>
               </a:rPr>
               <a:t>https://canon-ezvux7gqxa-el.a.run.app/health</a:t>
             </a:r>
@@ -10248,7 +10249,7 @@
                   <a:srgbClr val="1C1A17"/>
                 </a:solidFill>
                 <a:latin typeface="Google Sans Flex"/>
-                <a:hlinkClick r:id="rId9"/>
+                <a:hlinkClick r:id="rId10"/>
               </a:rPr>
               <a:t>https://discord.gg/HwSgjmcgF5</a:t>
             </a:r>
@@ -10305,7 +10306,7 @@
           <p:nvPr/>
         </p:nvPicPr>
         <p:blipFill>
-          <a:blip r:embed="rId10"/>
+          <a:blip r:embed="rId11"/>
           <a:stretch>
             <a:fillRect/>
           </a:stretch>
